--- a/docs/TDG-overview.pptx
+++ b/docs/TDG-overview.pptx
@@ -15,9 +15,10 @@
     <p:sldId id="263" r:id="rId9"/>
     <p:sldId id="264" r:id="rId10"/>
     <p:sldId id="265" r:id="rId11"/>
+    <p:sldId id="266" r:id="rId12"/>
   </p:sldIdLst>
   <p:notesMasterIdLst>
-    <p:notesMasterId r:id="rId12"/>
+    <p:notesMasterId r:id="rId13"/>
   </p:notesMasterIdLst>
   <p:sldSz cx="12192000" cy="6858000"/>
   <p:notesSz cx="6858000" cy="12192000"/>
@@ -599,7 +600,7 @@
           <a:p>
             <a:r>
               <a:rPr lang="en-US" dirty="0"/>
-              <a:t>Summary: capability is done, hardening is what remains.</a:t>
+              <a:t>Security is the one that blocks anything beyond a trusted lab network.</a:t>
             </a:r>
             <a:endParaRPr lang="en-US" dirty="0"/>
           </a:p>
@@ -623,6 +624,94 @@
             <a:fld id="{F7021451-1387-4CA6-816F-3879F97B5CBC}" type="slidenum">
               <a:rPr lang="en-US"/>
               <a:t>10</a:t>
+            </a:fld>
+            <a:endParaRPr lang="en-US"/>
+          </a:p>
+        </p:txBody>
+      </p:sp>
+    </p:spTree>
+    <p:extLst>
+      <p:ext uri="{BB962C8B-B14F-4D97-AF65-F5344CB8AC3E}">
+        <p14:creationId xmlns:p14="http://schemas.microsoft.com/office/powerpoint/2010/main" val="1024086991"/>
+      </p:ext>
+    </p:extLst>
+  </p:cSld>
+  <p:clrMapOvr>
+    <a:masterClrMapping/>
+  </p:clrMapOvr>
+</p:notes>
+</file>
+
+<file path=ppt/notesSlides/notesSlide11.xml><?xml version="1.0" encoding="utf-8"?>
+<p:notes xmlns:a="http://schemas.openxmlformats.org/drawingml/2006/main" xmlns:r="http://schemas.openxmlformats.org/officeDocument/2006/relationships" xmlns:p="http://schemas.openxmlformats.org/presentationml/2006/main">
+  <p:cSld>
+    <p:spTree>
+      <p:nvGrpSpPr>
+        <p:cNvPr id="1" name=""/>
+        <p:cNvGrpSpPr/>
+        <p:nvPr/>
+      </p:nvGrpSpPr>
+      <p:grpSpPr>
+        <a:xfrm>
+          <a:off x="0" y="0"/>
+          <a:ext cx="0" cy="0"/>
+          <a:chOff x="0" y="0"/>
+          <a:chExt cx="0" cy="0"/>
+        </a:xfrm>
+      </p:grpSpPr>
+      <p:sp>
+        <p:nvSpPr>
+          <p:cNvPr id="2" name="Slide Image Placeholder 1"/>
+          <p:cNvSpPr>
+            <a:spLocks noGrp="1" noRot="1" noChangeAspect="1"/>
+          </p:cNvSpPr>
+          <p:nvPr>
+            <p:ph type="sldImg"/>
+          </p:nvPr>
+        </p:nvSpPr>
+        <p:spPr/>
+      </p:sp>
+      <p:sp>
+        <p:nvSpPr>
+          <p:cNvPr id="3" name="Notes Placeholder 2"/>
+          <p:cNvSpPr>
+            <a:spLocks noGrp="1"/>
+          </p:cNvSpPr>
+          <p:nvPr>
+            <p:ph type="body" idx="1"/>
+          </p:nvPr>
+        </p:nvSpPr>
+        <p:spPr/>
+        <p:txBody>
+          <a:bodyPr/>
+          <a:lstStyle/>
+          <a:p>
+            <a:r>
+              <a:rPr lang="en-US" dirty="0"/>
+              <a:t>Summary: capability is done, hardening is what remains.</a:t>
+            </a:r>
+            <a:endParaRPr lang="en-US" dirty="0"/>
+          </a:p>
+        </p:txBody>
+      </p:sp>
+      <p:sp>
+        <p:nvSpPr>
+          <p:cNvPr id="4" name="Slide Number Placeholder 3"/>
+          <p:cNvSpPr>
+            <a:spLocks noGrp="1"/>
+          </p:cNvSpPr>
+          <p:nvPr>
+            <p:ph type="sldNum" sz="quarter" idx="10"/>
+          </p:nvPr>
+        </p:nvSpPr>
+        <p:spPr/>
+        <p:txBody>
+          <a:bodyPr/>
+          <a:lstStyle/>
+          <a:p>
+            <a:fld id="{F7021451-1387-4CA6-816F-3879F97B5CBC}" type="slidenum">
+              <a:rPr lang="en-US"/>
+              <a:t>11</a:t>
             </a:fld>
             <a:endParaRPr lang="en-US"/>
           </a:p>
@@ -1039,7 +1128,7 @@
           <a:p>
             <a:r>
               <a:rPr lang="en-US" dirty="0"/>
-              <a:t>These found three real bugs on first run, including one in the iOS loader that lost 300 MB of completed transfer.</a:t>
+              <a:t>Three things compound: a bigger seed pool, more variation per file, and a perceptual-hash gate that redraws a still landing too close to one already in the pack.</a:t>
             </a:r>
             <a:endParaRPr lang="en-US" dirty="0"/>
           </a:p>
@@ -1127,7 +1216,7 @@
           <a:p>
             <a:r>
               <a:rPr lang="en-US" dirty="0"/>
-              <a:t>Primary use case is backup and sync, but anything that scans a gallery benefits.</a:t>
+              <a:t>These found three real bugs on first run, including one in the iOS loader that lost 300 MB of completed transfer.</a:t>
             </a:r>
             <a:endParaRPr lang="en-US" dirty="0"/>
           </a:p>
@@ -1215,7 +1304,7 @@
           <a:p>
             <a:r>
               <a:rPr lang="en-US" dirty="0"/>
-              <a:t>Five of the plan's six conformance devices are covered, including two physical handsets. The S24 and the iPhone 15 Pro are the runs that matter — everything else is a simulator.</a:t>
+              <a:t>Primary use case is backup and sync, but anything that scans a gallery benefits.</a:t>
             </a:r>
             <a:endParaRPr lang="en-US" dirty="0"/>
           </a:p>
@@ -1303,7 +1392,7 @@
           <a:p>
             <a:r>
               <a:rPr lang="en-US" dirty="0"/>
-              <a:t>Security is the one that blocks anything beyond a trusted lab network.</a:t>
+              <a:t>Four of the plan's six conformance devices are covered, including two physical handsets. The S24 and the iPhone 15 Pro are the runs that matter — everything else is a simulator.</a:t>
             </a:r>
             <a:endParaRPr lang="en-US" dirty="0"/>
           </a:p>
@@ -1951,7 +2040,7 @@
                 <a:ea typeface="Cambria" pitchFamily="34" charset="-122"/>
                 <a:cs typeface="Cambria" pitchFamily="34" charset="-120"/>
               </a:rPr>
-              <a:t>5 of 6</a:t>
+              <a:t>4 of 6</a:t>
             </a:r>
             <a:endParaRPr lang="en-US" sz="3400" dirty="0"/>
           </a:p>
@@ -2029,7 +2118,7 @@
                 <a:ea typeface="Cambria" pitchFamily="34" charset="-122"/>
                 <a:cs typeface="Cambria" pitchFamily="34" charset="-120"/>
               </a:rPr>
-              <a:t>157</a:t>
+              <a:t>190</a:t>
             </a:r>
             <a:endParaRPr lang="en-US" sz="3400" dirty="0"/>
           </a:p>
@@ -2085,6 +2174,788 @@
 <file path=ppt/slides/slide10.xml><?xml version="1.0" encoding="utf-8"?>
 <p:sld xmlns:a="http://schemas.openxmlformats.org/drawingml/2006/main" xmlns:r="http://schemas.openxmlformats.org/officeDocument/2006/relationships" xmlns:p="http://schemas.openxmlformats.org/presentationml/2006/main">
   <p:cSld name="Slide 10">
+    <p:spTree>
+      <p:nvGrpSpPr>
+        <p:cNvPr id="1" name=""/>
+        <p:cNvGrpSpPr/>
+        <p:nvPr/>
+      </p:nvGrpSpPr>
+      <p:grpSpPr>
+        <a:xfrm>
+          <a:off x="0" y="0"/>
+          <a:ext cx="0" cy="0"/>
+          <a:chOff x="0" y="0"/>
+          <a:chExt cx="0" cy="0"/>
+        </a:xfrm>
+      </p:grpSpPr>
+      <p:sp>
+        <p:nvSpPr>
+          <p:cNvPr id="2" name="Text 0"/>
+          <p:cNvSpPr txBox="1"/>
+          <p:nvPr/>
+        </p:nvSpPr>
+        <p:spPr>
+          <a:xfrm>
+            <a:off x="548640" y="274320"/>
+            <a:ext cx="11064240" cy="274320"/>
+          </a:xfrm>
+          <a:prstGeom prst="rect">
+            <a:avLst/>
+          </a:prstGeom>
+          <a:noFill/>
+          <a:ln/>
+        </p:spPr>
+        <p:txBody>
+          <a:bodyPr wrap="square" lIns="0" tIns="0" rIns="0" bIns="0" rtlCol="0" anchor="ctr"/>
+          <a:lstStyle/>
+          <a:p>
+            <a:pPr indent="0" marL="0">
+              <a:buNone/>
+            </a:pPr>
+            <a:r>
+              <a:rPr lang="en-US" sz="1400" b="1" spc="200" kern="0" dirty="0">
+                <a:solidFill>
+                  <a:srgbClr val="2F5D50"/>
+                </a:solidFill>
+                <a:latin typeface="Calibri" pitchFamily="34" charset="0"/>
+                <a:ea typeface="Calibri" pitchFamily="34" charset="-122"/>
+                <a:cs typeface="Calibri" pitchFamily="34" charset="-120"/>
+              </a:rPr>
+              <a:t>NEXT STEPS</a:t>
+            </a:r>
+            <a:endParaRPr lang="en-US" sz="1400" dirty="0"/>
+          </a:p>
+        </p:txBody>
+      </p:sp>
+      <p:sp>
+        <p:nvSpPr>
+          <p:cNvPr id="3" name="Text 1"/>
+          <p:cNvSpPr txBox="1"/>
+          <p:nvPr/>
+        </p:nvSpPr>
+        <p:spPr>
+          <a:xfrm>
+            <a:off x="548640" y="585216"/>
+            <a:ext cx="11064240" cy="713232"/>
+          </a:xfrm>
+          <a:prstGeom prst="rect">
+            <a:avLst/>
+          </a:prstGeom>
+          <a:noFill/>
+          <a:ln/>
+        </p:spPr>
+        <p:txBody>
+          <a:bodyPr wrap="square" lIns="0" tIns="0" rIns="0" bIns="0" rtlCol="0" anchor="ctr"/>
+          <a:lstStyle/>
+          <a:p>
+            <a:pPr indent="0" marL="0">
+              <a:buNone/>
+            </a:pPr>
+            <a:r>
+              <a:rPr lang="en-US" sz="3200" b="1" dirty="0">
+                <a:solidFill>
+                  <a:srgbClr val="1B1A18"/>
+                </a:solidFill>
+                <a:latin typeface="Cambria" pitchFamily="34" charset="0"/>
+                <a:ea typeface="Cambria" pitchFamily="34" charset="-122"/>
+                <a:cs typeface="Cambria" pitchFamily="34" charset="-120"/>
+              </a:rPr>
+              <a:t>What it needs before production</a:t>
+            </a:r>
+            <a:endParaRPr lang="en-US" sz="3200" dirty="0"/>
+          </a:p>
+        </p:txBody>
+      </p:sp>
+      <p:sp>
+        <p:nvSpPr>
+          <p:cNvPr id="4" name="Shape 2"/>
+          <p:cNvSpPr/>
+          <p:nvPr/>
+        </p:nvSpPr>
+        <p:spPr>
+          <a:xfrm>
+            <a:off x="548640" y="1444752"/>
+            <a:ext cx="5349240" cy="1901952"/>
+          </a:xfrm>
+          <a:prstGeom prst="roundRect">
+            <a:avLst>
+              <a:gd name="adj" fmla="val 4327"/>
+            </a:avLst>
+          </a:prstGeom>
+          <a:solidFill>
+            <a:srgbClr val="F3E6E2"/>
+          </a:solidFill>
+          <a:ln w="12700">
+            <a:solidFill>
+              <a:srgbClr val="F3E6E2"/>
+            </a:solidFill>
+            <a:prstDash val="solid"/>
+          </a:ln>
+        </p:spPr>
+      </p:sp>
+      <p:sp>
+        <p:nvSpPr>
+          <p:cNvPr id="5" name="Text 3"/>
+          <p:cNvSpPr txBox="1"/>
+          <p:nvPr/>
+        </p:nvSpPr>
+        <p:spPr>
+          <a:xfrm>
+            <a:off x="822960" y="1591056"/>
+            <a:ext cx="4754880" cy="347472"/>
+          </a:xfrm>
+          <a:prstGeom prst="rect">
+            <a:avLst/>
+          </a:prstGeom>
+          <a:noFill/>
+          <a:ln/>
+        </p:spPr>
+        <p:txBody>
+          <a:bodyPr wrap="square" lIns="0" tIns="0" rIns="0" bIns="0" rtlCol="0" anchor="ctr"/>
+          <a:lstStyle/>
+          <a:p>
+            <a:pPr indent="0" marL="0">
+              <a:buNone/>
+            </a:pPr>
+            <a:r>
+              <a:rPr lang="en-US" sz="1700" b="1" dirty="0">
+                <a:solidFill>
+                  <a:srgbClr val="9C4A32"/>
+                </a:solidFill>
+                <a:latin typeface="Cambria" pitchFamily="34" charset="0"/>
+                <a:ea typeface="Cambria" pitchFamily="34" charset="-122"/>
+                <a:cs typeface="Cambria" pitchFamily="34" charset="-120"/>
+              </a:rPr>
+              <a:t>Security</a:t>
+            </a:r>
+            <a:endParaRPr lang="en-US" sz="1700" dirty="0"/>
+          </a:p>
+        </p:txBody>
+      </p:sp>
+      <p:sp>
+        <p:nvSpPr>
+          <p:cNvPr id="6" name="Text 4"/>
+          <p:cNvSpPr txBox="1"/>
+          <p:nvPr/>
+        </p:nvSpPr>
+        <p:spPr>
+          <a:xfrm>
+            <a:off x="822960" y="1993392"/>
+            <a:ext cx="4846320" cy="1234440"/>
+          </a:xfrm>
+          <a:prstGeom prst="rect">
+            <a:avLst/>
+          </a:prstGeom>
+          <a:noFill/>
+          <a:ln/>
+        </p:spPr>
+        <p:txBody>
+          <a:bodyPr wrap="square" lIns="0" tIns="0" rIns="0" bIns="0" rtlCol="0" anchor="t"/>
+          <a:lstStyle/>
+          <a:p>
+            <a:pPr marL="342900" indent="-342900">
+              <a:lnSpc>
+                <a:spcPts val="1800"/>
+              </a:lnSpc>
+              <a:spcAft>
+                <a:spcPts val="600"/>
+              </a:spcAft>
+              <a:buSzPct val="100000"/>
+              <a:buChar char="•"/>
+            </a:pPr>
+            <a:r>
+              <a:rPr lang="en-US" sz="1400" dirty="0">
+                <a:solidFill>
+                  <a:srgbClr val="1B1A18"/>
+                </a:solidFill>
+                <a:latin typeface="Calibri" pitchFamily="34" charset="0"/>
+                <a:ea typeface="Calibri" pitchFamily="34" charset="-122"/>
+                <a:cs typeface="Calibri" pitchFamily="34" charset="-120"/>
+              </a:rPr>
+              <a:t>The pairing code is a speed bump, not authentication</a:t>
+            </a:r>
+            <a:endParaRPr lang="en-US" sz="1400" dirty="0"/>
+          </a:p>
+          <a:p>
+            <a:pPr marL="342900" indent="-342900">
+              <a:lnSpc>
+                <a:spcPts val="1800"/>
+              </a:lnSpc>
+              <a:spcAft>
+                <a:spcPts val="600"/>
+              </a:spcAft>
+              <a:buSzPct val="100000"/>
+              <a:buChar char="•"/>
+            </a:pPr>
+            <a:r>
+              <a:rPr lang="en-US" sz="1400" dirty="0">
+                <a:solidFill>
+                  <a:srgbClr val="1B1A18"/>
+                </a:solidFill>
+                <a:latin typeface="Calibri" pitchFamily="34" charset="0"/>
+                <a:ea typeface="Calibri" pitchFamily="34" charset="-122"/>
+                <a:cs typeface="Calibri" pitchFamily="34" charset="-120"/>
+              </a:rPr>
+              <a:t>No TLS — plain HTTP on an assumed-trusted LAN</a:t>
+            </a:r>
+            <a:endParaRPr lang="en-US" sz="1400" dirty="0"/>
+          </a:p>
+          <a:p>
+            <a:pPr marL="342900" indent="-342900">
+              <a:lnSpc>
+                <a:spcPts val="1800"/>
+              </a:lnSpc>
+              <a:spcAft>
+                <a:spcPts val="600"/>
+              </a:spcAft>
+              <a:buSzPct val="100000"/>
+              <a:buChar char="•"/>
+            </a:pPr>
+            <a:r>
+              <a:rPr lang="en-US" sz="1400" dirty="0">
+                <a:solidFill>
+                  <a:srgbClr val="1B1A18"/>
+                </a:solidFill>
+                <a:latin typeface="Calibri" pitchFamily="34" charset="0"/>
+                <a:ea typeface="Calibri" pitchFamily="34" charset="-122"/>
+                <a:cs typeface="Calibri" pitchFamily="34" charset="-120"/>
+              </a:rPr>
+              <a:t>Anyone on the network can create a job</a:t>
+            </a:r>
+            <a:endParaRPr lang="en-US" sz="1400" dirty="0"/>
+          </a:p>
+        </p:txBody>
+      </p:sp>
+      <p:sp>
+        <p:nvSpPr>
+          <p:cNvPr id="7" name="Shape 5"/>
+          <p:cNvSpPr/>
+          <p:nvPr/>
+        </p:nvSpPr>
+        <p:spPr>
+          <a:xfrm>
+            <a:off x="6263640" y="1444752"/>
+            <a:ext cx="5349240" cy="1901952"/>
+          </a:xfrm>
+          <a:prstGeom prst="roundRect">
+            <a:avLst>
+              <a:gd name="adj" fmla="val 4327"/>
+            </a:avLst>
+          </a:prstGeom>
+          <a:solidFill>
+            <a:srgbClr val="E4EEE9"/>
+          </a:solidFill>
+          <a:ln w="12700">
+            <a:solidFill>
+              <a:srgbClr val="E4EEE9"/>
+            </a:solidFill>
+            <a:prstDash val="solid"/>
+          </a:ln>
+        </p:spPr>
+      </p:sp>
+      <p:sp>
+        <p:nvSpPr>
+          <p:cNvPr id="8" name="Text 6"/>
+          <p:cNvSpPr txBox="1"/>
+          <p:nvPr/>
+        </p:nvSpPr>
+        <p:spPr>
+          <a:xfrm>
+            <a:off x="6537960" y="1591056"/>
+            <a:ext cx="4754880" cy="347472"/>
+          </a:xfrm>
+          <a:prstGeom prst="rect">
+            <a:avLst/>
+          </a:prstGeom>
+          <a:noFill/>
+          <a:ln/>
+        </p:spPr>
+        <p:txBody>
+          <a:bodyPr wrap="square" lIns="0" tIns="0" rIns="0" bIns="0" rtlCol="0" anchor="ctr"/>
+          <a:lstStyle/>
+          <a:p>
+            <a:pPr indent="0" marL="0">
+              <a:buNone/>
+            </a:pPr>
+            <a:r>
+              <a:rPr lang="en-US" sz="1700" b="1" dirty="0">
+                <a:solidFill>
+                  <a:srgbClr val="2F5D50"/>
+                </a:solidFill>
+                <a:latin typeface="Cambria" pitchFamily="34" charset="0"/>
+                <a:ea typeface="Cambria" pitchFamily="34" charset="-122"/>
+                <a:cs typeface="Cambria" pitchFamily="34" charset="-120"/>
+              </a:rPr>
+              <a:t>Operations</a:t>
+            </a:r>
+            <a:endParaRPr lang="en-US" sz="1700" dirty="0"/>
+          </a:p>
+        </p:txBody>
+      </p:sp>
+      <p:sp>
+        <p:nvSpPr>
+          <p:cNvPr id="9" name="Text 7"/>
+          <p:cNvSpPr txBox="1"/>
+          <p:nvPr/>
+        </p:nvSpPr>
+        <p:spPr>
+          <a:xfrm>
+            <a:off x="6537960" y="1993392"/>
+            <a:ext cx="4846320" cy="1234440"/>
+          </a:xfrm>
+          <a:prstGeom prst="rect">
+            <a:avLst/>
+          </a:prstGeom>
+          <a:noFill/>
+          <a:ln/>
+        </p:spPr>
+        <p:txBody>
+          <a:bodyPr wrap="square" lIns="0" tIns="0" rIns="0" bIns="0" rtlCol="0" anchor="t"/>
+          <a:lstStyle/>
+          <a:p>
+            <a:pPr marL="342900" indent="-342900">
+              <a:lnSpc>
+                <a:spcPts val="1800"/>
+              </a:lnSpc>
+              <a:spcAft>
+                <a:spcPts val="600"/>
+              </a:spcAft>
+              <a:buSzPct val="100000"/>
+              <a:buChar char="•"/>
+            </a:pPr>
+            <a:r>
+              <a:rPr lang="en-US" sz="1400" dirty="0">
+                <a:solidFill>
+                  <a:srgbClr val="1B1A18"/>
+                </a:solidFill>
+                <a:latin typeface="Calibri" pitchFamily="34" charset="0"/>
+                <a:ea typeface="Calibri" pitchFamily="34" charset="-122"/>
+                <a:cs typeface="Calibri" pitchFamily="34" charset="-120"/>
+              </a:rPr>
+              <a:t>No job queue — two large builds compete for cores</a:t>
+            </a:r>
+            <a:endParaRPr lang="en-US" sz="1400" dirty="0"/>
+          </a:p>
+          <a:p>
+            <a:pPr marL="342900" indent="-342900">
+              <a:lnSpc>
+                <a:spcPts val="1800"/>
+              </a:lnSpc>
+              <a:spcAft>
+                <a:spcPts val="600"/>
+              </a:spcAft>
+              <a:buSzPct val="100000"/>
+              <a:buChar char="•"/>
+            </a:pPr>
+            <a:r>
+              <a:rPr lang="en-US" sz="1400" dirty="0">
+                <a:solidFill>
+                  <a:srgbClr val="1B1A18"/>
+                </a:solidFill>
+                <a:latin typeface="Calibri" pitchFamily="34" charset="0"/>
+                <a:ea typeface="Calibri" pitchFamily="34" charset="-122"/>
+                <a:cs typeface="Calibri" pitchFamily="34" charset="-120"/>
+              </a:rPr>
+              <a:t>Reclaiming disk is a deliberate act — no expiry, no disk watermark</a:t>
+            </a:r>
+            <a:endParaRPr lang="en-US" sz="1400" dirty="0"/>
+          </a:p>
+          <a:p>
+            <a:pPr marL="342900" indent="-342900">
+              <a:lnSpc>
+                <a:spcPts val="1800"/>
+              </a:lnSpc>
+              <a:spcAft>
+                <a:spcPts val="600"/>
+              </a:spcAft>
+              <a:buSzPct val="100000"/>
+              <a:buChar char="•"/>
+            </a:pPr>
+            <a:r>
+              <a:rPr lang="en-US" sz="1400" dirty="0">
+                <a:solidFill>
+                  <a:srgbClr val="1B1A18"/>
+                </a:solidFill>
+                <a:latin typeface="Calibri" pitchFamily="34" charset="0"/>
+                <a:ea typeface="Calibri" pitchFamily="34" charset="-122"/>
+                <a:cs typeface="Calibri" pitchFamily="34" charset="-120"/>
+              </a:rPr>
+              <a:t>No Docker image yet, so no one-command lab box</a:t>
+            </a:r>
+            <a:endParaRPr lang="en-US" sz="1400" dirty="0"/>
+          </a:p>
+        </p:txBody>
+      </p:sp>
+      <p:sp>
+        <p:nvSpPr>
+          <p:cNvPr id="10" name="Shape 8"/>
+          <p:cNvSpPr/>
+          <p:nvPr/>
+        </p:nvSpPr>
+        <p:spPr>
+          <a:xfrm>
+            <a:off x="548640" y="3529584"/>
+            <a:ext cx="5349240" cy="1901952"/>
+          </a:xfrm>
+          <a:prstGeom prst="roundRect">
+            <a:avLst>
+              <a:gd name="adj" fmla="val 4327"/>
+            </a:avLst>
+          </a:prstGeom>
+          <a:solidFill>
+            <a:srgbClr val="E4EEE9"/>
+          </a:solidFill>
+          <a:ln w="12700">
+            <a:solidFill>
+              <a:srgbClr val="E4EEE9"/>
+            </a:solidFill>
+            <a:prstDash val="solid"/>
+          </a:ln>
+        </p:spPr>
+      </p:sp>
+      <p:sp>
+        <p:nvSpPr>
+          <p:cNvPr id="11" name="Text 9"/>
+          <p:cNvSpPr txBox="1"/>
+          <p:nvPr/>
+        </p:nvSpPr>
+        <p:spPr>
+          <a:xfrm>
+            <a:off x="822960" y="3675888"/>
+            <a:ext cx="4754880" cy="347472"/>
+          </a:xfrm>
+          <a:prstGeom prst="rect">
+            <a:avLst/>
+          </a:prstGeom>
+          <a:noFill/>
+          <a:ln/>
+        </p:spPr>
+        <p:txBody>
+          <a:bodyPr wrap="square" lIns="0" tIns="0" rIns="0" bIns="0" rtlCol="0" anchor="ctr"/>
+          <a:lstStyle/>
+          <a:p>
+            <a:pPr indent="0" marL="0">
+              <a:buNone/>
+            </a:pPr>
+            <a:r>
+              <a:rPr lang="en-US" sz="1700" b="1" dirty="0">
+                <a:solidFill>
+                  <a:srgbClr val="2F5D50"/>
+                </a:solidFill>
+                <a:latin typeface="Cambria" pitchFamily="34" charset="0"/>
+                <a:ea typeface="Cambria" pitchFamily="34" charset="-122"/>
+                <a:cs typeface="Cambria" pitchFamily="34" charset="-120"/>
+              </a:rPr>
+              <a:t>Coverage</a:t>
+            </a:r>
+            <a:endParaRPr lang="en-US" sz="1700" dirty="0"/>
+          </a:p>
+        </p:txBody>
+      </p:sp>
+      <p:sp>
+        <p:nvSpPr>
+          <p:cNvPr id="12" name="Text 10"/>
+          <p:cNvSpPr txBox="1"/>
+          <p:nvPr/>
+        </p:nvSpPr>
+        <p:spPr>
+          <a:xfrm>
+            <a:off x="822960" y="4078224"/>
+            <a:ext cx="4846320" cy="1234440"/>
+          </a:xfrm>
+          <a:prstGeom prst="rect">
+            <a:avLst/>
+          </a:prstGeom>
+          <a:noFill/>
+          <a:ln/>
+        </p:spPr>
+        <p:txBody>
+          <a:bodyPr wrap="square" lIns="0" tIns="0" rIns="0" bIns="0" rtlCol="0" anchor="t"/>
+          <a:lstStyle/>
+          <a:p>
+            <a:pPr marL="342900" indent="-342900">
+              <a:lnSpc>
+                <a:spcPts val="1800"/>
+              </a:lnSpc>
+              <a:spcAft>
+                <a:spcPts val="600"/>
+              </a:spcAft>
+              <a:buSzPct val="100000"/>
+              <a:buChar char="•"/>
+            </a:pPr>
+            <a:r>
+              <a:rPr lang="en-US" sz="1400" dirty="0">
+                <a:solidFill>
+                  <a:srgbClr val="1B1A18"/>
+                </a:solidFill>
+                <a:latin typeface="Calibri" pitchFamily="34" charset="0"/>
+                <a:ea typeface="Calibri" pitchFamily="34" charset="-122"/>
+                <a:cs typeface="Calibri" pitchFamily="34" charset="-120"/>
+              </a:rPr>
+              <a:t>Galaxy A-series and both OS floors untested</a:t>
+            </a:r>
+            <a:endParaRPr lang="en-US" sz="1400" dirty="0"/>
+          </a:p>
+          <a:p>
+            <a:pPr marL="342900" indent="-342900">
+              <a:lnSpc>
+                <a:spcPts val="1800"/>
+              </a:lnSpc>
+              <a:spcAft>
+                <a:spcPts val="600"/>
+              </a:spcAft>
+              <a:buSzPct val="100000"/>
+              <a:buChar char="•"/>
+            </a:pPr>
+            <a:r>
+              <a:rPr lang="en-US" sz="1400" dirty="0">
+                <a:solidFill>
+                  <a:srgbClr val="1B1A18"/>
+                </a:solidFill>
+                <a:latin typeface="Calibri" pitchFamily="34" charset="0"/>
+                <a:ea typeface="Calibri" pitchFamily="34" charset="-122"/>
+                <a:cs typeface="Calibri" pitchFamily="34" charset="-120"/>
+              </a:rPr>
+              <a:t>Multi-hour fills untested — batteries learn over days</a:t>
+            </a:r>
+            <a:endParaRPr lang="en-US" sz="1400" dirty="0"/>
+          </a:p>
+          <a:p>
+            <a:pPr marL="342900" indent="-342900">
+              <a:lnSpc>
+                <a:spcPts val="1800"/>
+              </a:lnSpc>
+              <a:spcAft>
+                <a:spcPts val="600"/>
+              </a:spcAft>
+              <a:buSzPct val="100000"/>
+              <a:buChar char="•"/>
+            </a:pPr>
+            <a:r>
+              <a:rPr lang="en-US" sz="1400" dirty="0">
+                <a:solidFill>
+                  <a:srgbClr val="1B1A18"/>
+                </a:solidFill>
+                <a:latin typeface="Calibri" pitchFamily="34" charset="0"/>
+                <a:ea typeface="Calibri" pitchFamily="34" charset="-122"/>
+                <a:cs typeface="Calibri" pitchFamily="34" charset="-120"/>
+              </a:rPr>
+              <a:t>TestFlight and signed APK distribution not set up</a:t>
+            </a:r>
+            <a:endParaRPr lang="en-US" sz="1400" dirty="0"/>
+          </a:p>
+        </p:txBody>
+      </p:sp>
+      <p:sp>
+        <p:nvSpPr>
+          <p:cNvPr id="13" name="Shape 11"/>
+          <p:cNvSpPr/>
+          <p:nvPr/>
+        </p:nvSpPr>
+        <p:spPr>
+          <a:xfrm>
+            <a:off x="6263640" y="3529584"/>
+            <a:ext cx="5349240" cy="1901952"/>
+          </a:xfrm>
+          <a:prstGeom prst="roundRect">
+            <a:avLst>
+              <a:gd name="adj" fmla="val 4327"/>
+            </a:avLst>
+          </a:prstGeom>
+          <a:solidFill>
+            <a:srgbClr val="E4EEE9"/>
+          </a:solidFill>
+          <a:ln w="12700">
+            <a:solidFill>
+              <a:srgbClr val="E4EEE9"/>
+            </a:solidFill>
+            <a:prstDash val="solid"/>
+          </a:ln>
+        </p:spPr>
+      </p:sp>
+      <p:sp>
+        <p:nvSpPr>
+          <p:cNvPr id="14" name="Text 12"/>
+          <p:cNvSpPr txBox="1"/>
+          <p:nvPr/>
+        </p:nvSpPr>
+        <p:spPr>
+          <a:xfrm>
+            <a:off x="6537960" y="3675888"/>
+            <a:ext cx="4754880" cy="347472"/>
+          </a:xfrm>
+          <a:prstGeom prst="rect">
+            <a:avLst/>
+          </a:prstGeom>
+          <a:noFill/>
+          <a:ln/>
+        </p:spPr>
+        <p:txBody>
+          <a:bodyPr wrap="square" lIns="0" tIns="0" rIns="0" bIns="0" rtlCol="0" anchor="ctr"/>
+          <a:lstStyle/>
+          <a:p>
+            <a:pPr indent="0" marL="0">
+              <a:buNone/>
+            </a:pPr>
+            <a:r>
+              <a:rPr lang="en-US" sz="1700" b="1" dirty="0">
+                <a:solidFill>
+                  <a:srgbClr val="2F5D50"/>
+                </a:solidFill>
+                <a:latin typeface="Cambria" pitchFamily="34" charset="0"/>
+                <a:ea typeface="Cambria" pitchFamily="34" charset="-122"/>
+                <a:cs typeface="Cambria" pitchFamily="34" charset="-120"/>
+              </a:rPr>
+              <a:t>Robustness</a:t>
+            </a:r>
+            <a:endParaRPr lang="en-US" sz="1700" dirty="0"/>
+          </a:p>
+        </p:txBody>
+      </p:sp>
+      <p:sp>
+        <p:nvSpPr>
+          <p:cNvPr id="15" name="Text 13"/>
+          <p:cNvSpPr txBox="1"/>
+          <p:nvPr/>
+        </p:nvSpPr>
+        <p:spPr>
+          <a:xfrm>
+            <a:off x="6537960" y="4078224"/>
+            <a:ext cx="4846320" cy="1234440"/>
+          </a:xfrm>
+          <a:prstGeom prst="rect">
+            <a:avLst/>
+          </a:prstGeom>
+          <a:noFill/>
+          <a:ln/>
+        </p:spPr>
+        <p:txBody>
+          <a:bodyPr wrap="square" lIns="0" tIns="0" rIns="0" bIns="0" rtlCol="0" anchor="t"/>
+          <a:lstStyle/>
+          <a:p>
+            <a:pPr marL="342900" indent="-342900">
+              <a:lnSpc>
+                <a:spcPts val="1800"/>
+              </a:lnSpc>
+              <a:spcAft>
+                <a:spcPts val="600"/>
+              </a:spcAft>
+              <a:buSzPct val="100000"/>
+              <a:buChar char="•"/>
+            </a:pPr>
+            <a:r>
+              <a:rPr lang="en-US" sz="1400" dirty="0">
+                <a:solidFill>
+                  <a:srgbClr val="1B1A18"/>
+                </a:solidFill>
+                <a:latin typeface="Calibri" pitchFamily="34" charset="0"/>
+                <a:ea typeface="Calibri" pitchFamily="34" charset="-122"/>
+                <a:cs typeface="Calibri" pitchFamily="34" charset="-120"/>
+              </a:rPr>
+              <a:t>Resume is per-file, not per-byte, on both loaders</a:t>
+            </a:r>
+            <a:endParaRPr lang="en-US" sz="1400" dirty="0"/>
+          </a:p>
+          <a:p>
+            <a:pPr marL="342900" indent="-342900">
+              <a:lnSpc>
+                <a:spcPts val="1800"/>
+              </a:lnSpc>
+              <a:spcAft>
+                <a:spcPts val="600"/>
+              </a:spcAft>
+              <a:buSzPct val="100000"/>
+              <a:buChar char="•"/>
+            </a:pPr>
+            <a:r>
+              <a:rPr lang="en-US" sz="1400" dirty="0">
+                <a:solidFill>
+                  <a:srgbClr val="1B1A18"/>
+                </a:solidFill>
+                <a:latin typeface="Calibri" pitchFamily="34" charset="0"/>
+                <a:ea typeface="Calibri" pitchFamily="34" charset="-122"/>
+                <a:cs typeface="Calibri" pitchFamily="34" charset="-120"/>
+              </a:rPr>
+              <a:t>Physical iPhones cannot be verified by tdg verify</a:t>
+            </a:r>
+            <a:endParaRPr lang="en-US" sz="1400" dirty="0"/>
+          </a:p>
+          <a:p>
+            <a:pPr marL="342900" indent="-342900">
+              <a:lnSpc>
+                <a:spcPts val="1800"/>
+              </a:lnSpc>
+              <a:spcAft>
+                <a:spcPts val="600"/>
+              </a:spcAft>
+              <a:buSzPct val="100000"/>
+              <a:buChar char="•"/>
+            </a:pPr>
+            <a:r>
+              <a:rPr lang="en-US" sz="1400" dirty="0">
+                <a:solidFill>
+                  <a:srgbClr val="1B1A18"/>
+                </a:solidFill>
+                <a:latin typeface="Calibri" pitchFamily="34" charset="0"/>
+                <a:ea typeface="Calibri" pitchFamily="34" charset="-122"/>
+                <a:cs typeface="Calibri" pitchFamily="34" charset="-120"/>
+              </a:rPr>
+              <a:t>Live Photos and the 4 GB single file not built</a:t>
+            </a:r>
+            <a:endParaRPr lang="en-US" sz="1400" dirty="0"/>
+          </a:p>
+        </p:txBody>
+      </p:sp>
+      <p:sp>
+        <p:nvSpPr>
+          <p:cNvPr id="16" name="Text 14"/>
+          <p:cNvSpPr txBox="1"/>
+          <p:nvPr/>
+        </p:nvSpPr>
+        <p:spPr>
+          <a:xfrm>
+            <a:off x="548640" y="5669280"/>
+            <a:ext cx="11064240" cy="384048"/>
+          </a:xfrm>
+          <a:prstGeom prst="rect">
+            <a:avLst/>
+          </a:prstGeom>
+          <a:noFill/>
+          <a:ln/>
+        </p:spPr>
+        <p:txBody>
+          <a:bodyPr wrap="square" lIns="0" tIns="0" rIns="0" bIns="0" rtlCol="0" anchor="ctr"/>
+          <a:lstStyle/>
+          <a:p>
+            <a:pPr indent="0" marL="0">
+              <a:buNone/>
+            </a:pPr>
+            <a:r>
+              <a:rPr lang="en-US" sz="1500" i="1" dirty="0">
+                <a:solidFill>
+                  <a:srgbClr val="9C4A32"/>
+                </a:solidFill>
+                <a:latin typeface="Cambria" pitchFamily="34" charset="0"/>
+                <a:ea typeface="Cambria" pitchFamily="34" charset="-122"/>
+                <a:cs typeface="Cambria" pitchFamily="34" charset="-120"/>
+              </a:rPr>
+              <a:t>Security is the only group that blocks use beyond a trusted lab network. The rest is packaging and coverage.</a:t>
+            </a:r>
+            <a:endParaRPr lang="en-US" sz="1500" dirty="0"/>
+          </a:p>
+        </p:txBody>
+      </p:sp>
+    </p:spTree>
+  </p:cSld>
+  <p:clrMapOvr>
+    <a:masterClrMapping/>
+  </p:clrMapOvr>
+</p:sld>
+</file>
+
+<file path=ppt/slides/slide11.xml><?xml version="1.0" encoding="utf-8"?>
+<p:sld xmlns:a="http://schemas.openxmlformats.org/drawingml/2006/main" xmlns:r="http://schemas.openxmlformats.org/officeDocument/2006/relationships" xmlns:p="http://schemas.openxmlformats.org/presentationml/2006/main">
+  <p:cSld name="Slide 11">
     <p:bg>
       <p:bgPr>
         <a:solidFill>
@@ -2205,7 +3076,7 @@
                 <a:ea typeface="Calibri" pitchFamily="34" charset="-122"/>
                 <a:cs typeface="Calibri" pitchFamily="34" charset="-120"/>
               </a:rPr>
-              <a:t>All seven planned phases are built and pushed. The generator, the control plane and both mobile loaders work end to end on real hardware, with 157 automated checks and conformance results committed per device.</a:t>
+              <a:t>All seven planned phases are built and pushed. The generator, the control plane and both mobile loaders work end to end on real hardware, with 190 automated checks and conformance results committed per device.</a:t>
             </a:r>
             <a:endParaRPr lang="en-US" sz="1450" dirty="0"/>
           </a:p>
@@ -5694,7 +6565,7 @@
                 <a:ea typeface="Calibri" pitchFamily="34" charset="-122"/>
                 <a:cs typeface="Calibri" pitchFamily="34" charset="-120"/>
               </a:rPr>
-              <a:t>WHAT IT FINDS</a:t>
+              <a:t>UNIQUENESS</a:t>
             </a:r>
             <a:endParaRPr lang="en-US" sz="1400" dirty="0"/>
           </a:p>
@@ -5733,7 +6604,7 @@
                 <a:ea typeface="Cambria" pitchFamily="34" charset="-122"/>
                 <a:cs typeface="Cambria" pitchFamily="34" charset="-120"/>
               </a:rPr>
-              <a:t>The awkward files, on purpose</a:t>
+              <a:t>Every still is a different picture</a:t>
             </a:r>
             <a:endParaRPr lang="en-US" sz="3200" dirty="0"/>
           </a:p>
@@ -5747,8 +6618,8 @@
         </p:nvSpPr>
         <p:spPr>
           <a:xfrm>
-            <a:off x="548640" y="1426464"/>
-            <a:ext cx="11064240" cy="329184"/>
+            <a:off x="548640" y="1389888"/>
+            <a:ext cx="11064240" cy="365760"/>
           </a:xfrm>
           <a:prstGeom prst="rect">
             <a:avLst/>
@@ -5772,7 +6643,7 @@
                 <a:ea typeface="Calibri" pitchFamily="34" charset="-122"/>
                 <a:cs typeface="Calibri" pitchFamily="34" charset="-120"/>
               </a:rPr>
-              <a:t>A pack can carry the assets that break naive gallery code. Each one has found a real bug already.</a:t>
+              <a:t>Different EXIF alone guarantees distinct checksums. The real question is whether two files are the same photograph.</a:t>
             </a:r>
             <a:endParaRPr lang="en-US" sz="1400" dirty="0"/>
           </a:p>
@@ -5786,12 +6657,159 @@
         </p:nvSpPr>
         <p:spPr>
           <a:xfrm>
-            <a:off x="548640" y="1901952"/>
-            <a:ext cx="3447288" cy="1664208"/>
+            <a:off x="548640" y="1847088"/>
+            <a:ext cx="5349240" cy="1463040"/>
           </a:xfrm>
           <a:prstGeom prst="roundRect">
             <a:avLst>
-              <a:gd name="adj" fmla="val 4945"/>
+              <a:gd name="adj" fmla="val 5625"/>
+            </a:avLst>
+          </a:prstGeom>
+          <a:solidFill>
+            <a:srgbClr val="F3E6E2"/>
+          </a:solidFill>
+          <a:ln w="12700">
+            <a:solidFill>
+              <a:srgbClr val="F3E6E2"/>
+            </a:solidFill>
+            <a:prstDash val="solid"/>
+          </a:ln>
+        </p:spPr>
+      </p:sp>
+      <p:sp>
+        <p:nvSpPr>
+          <p:cNvPr id="6" name="Text 4"/>
+          <p:cNvSpPr txBox="1"/>
+          <p:nvPr/>
+        </p:nvSpPr>
+        <p:spPr>
+          <a:xfrm>
+            <a:off x="822960" y="2194560"/>
+            <a:ext cx="1417320" cy="658368"/>
+          </a:xfrm>
+          <a:prstGeom prst="rect">
+            <a:avLst/>
+          </a:prstGeom>
+          <a:noFill/>
+          <a:ln/>
+        </p:spPr>
+        <p:txBody>
+          <a:bodyPr wrap="square" lIns="0" tIns="0" rIns="0" bIns="0" rtlCol="0" anchor="ctr"/>
+          <a:lstStyle/>
+          <a:p>
+            <a:pPr indent="0" marL="0">
+              <a:buNone/>
+            </a:pPr>
+            <a:r>
+              <a:rPr lang="en-US" sz="4000" b="1" dirty="0">
+                <a:solidFill>
+                  <a:srgbClr val="9C4A32"/>
+                </a:solidFill>
+                <a:latin typeface="Cambria" pitchFamily="34" charset="0"/>
+                <a:ea typeface="Cambria" pitchFamily="34" charset="-122"/>
+                <a:cs typeface="Cambria" pitchFamily="34" charset="-120"/>
+              </a:rPr>
+              <a:t>268</a:t>
+            </a:r>
+            <a:endParaRPr lang="en-US" sz="4000" dirty="0"/>
+          </a:p>
+        </p:txBody>
+      </p:sp>
+      <p:sp>
+        <p:nvSpPr>
+          <p:cNvPr id="7" name="Text 5"/>
+          <p:cNvSpPr txBox="1"/>
+          <p:nvPr/>
+        </p:nvSpPr>
+        <p:spPr>
+          <a:xfrm>
+            <a:off x="2331720" y="2029968"/>
+            <a:ext cx="3383280" cy="310896"/>
+          </a:xfrm>
+          <a:prstGeom prst="rect">
+            <a:avLst/>
+          </a:prstGeom>
+          <a:noFill/>
+          <a:ln/>
+        </p:spPr>
+        <p:txBody>
+          <a:bodyPr wrap="square" lIns="0" tIns="0" rIns="0" bIns="0" rtlCol="0" anchor="ctr"/>
+          <a:lstStyle/>
+          <a:p>
+            <a:pPr indent="0" marL="0">
+              <a:buNone/>
+            </a:pPr>
+            <a:r>
+              <a:rPr lang="en-US" sz="1600" b="1" dirty="0">
+                <a:solidFill>
+                  <a:srgbClr val="1B1A18"/>
+                </a:solidFill>
+                <a:latin typeface="Cambria" pitchFamily="34" charset="0"/>
+                <a:ea typeface="Cambria" pitchFamily="34" charset="-122"/>
+                <a:cs typeface="Cambria" pitchFamily="34" charset="-120"/>
+              </a:rPr>
+              <a:t>12 synthetic seeds</a:t>
+            </a:r>
+            <a:endParaRPr lang="en-US" sz="1600" dirty="0"/>
+          </a:p>
+        </p:txBody>
+      </p:sp>
+      <p:sp>
+        <p:nvSpPr>
+          <p:cNvPr id="8" name="Text 6"/>
+          <p:cNvSpPr txBox="1"/>
+          <p:nvPr/>
+        </p:nvSpPr>
+        <p:spPr>
+          <a:xfrm>
+            <a:off x="2331720" y="2359152"/>
+            <a:ext cx="3383280" cy="859536"/>
+          </a:xfrm>
+          <a:prstGeom prst="rect">
+            <a:avLst/>
+          </a:prstGeom>
+          <a:noFill/>
+          <a:ln/>
+        </p:spPr>
+        <p:txBody>
+          <a:bodyPr wrap="square" lIns="0" tIns="0" rIns="0" bIns="0" rtlCol="0" anchor="t"/>
+          <a:lstStyle/>
+          <a:p>
+            <a:pPr indent="0" marL="0">
+              <a:lnSpc>
+                <a:spcPts val="1800"/>
+              </a:lnSpc>
+              <a:buNone/>
+            </a:pPr>
+            <a:r>
+              <a:rPr lang="en-US" sz="1400" dirty="0">
+                <a:solidFill>
+                  <a:srgbClr val="6D6A64"/>
+                </a:solidFill>
+                <a:latin typeface="Calibri" pitchFamily="34" charset="0"/>
+                <a:ea typeface="Calibri" pitchFamily="34" charset="-122"/>
+                <a:cs typeface="Calibri" pitchFamily="34" charset="-120"/>
+              </a:rPr>
+              <a:t>identical pairs in a 2,227-photo pack. At 186 crops per seed, overlapping windows are arithmetic rather than bad luck.</a:t>
+            </a:r>
+            <a:endParaRPr lang="en-US" sz="1400" dirty="0"/>
+          </a:p>
+        </p:txBody>
+      </p:sp>
+      <p:sp>
+        <p:nvSpPr>
+          <p:cNvPr id="9" name="Shape 7"/>
+          <p:cNvSpPr/>
+          <p:nvPr/>
+        </p:nvSpPr>
+        <p:spPr>
+          <a:xfrm>
+            <a:off x="6263640" y="1847088"/>
+            <a:ext cx="5349240" cy="1463040"/>
+          </a:xfrm>
+          <a:prstGeom prst="roundRect">
+            <a:avLst>
+              <a:gd name="adj" fmla="val 5625"/>
             </a:avLst>
           </a:prstGeom>
           <a:solidFill>
@@ -5807,14 +6825,14 @@
       </p:sp>
       <p:sp>
         <p:nvSpPr>
-          <p:cNvPr id="6" name="Text 4"/>
-          <p:cNvSpPr txBox="1"/>
-          <p:nvPr/>
-        </p:nvSpPr>
-        <p:spPr>
-          <a:xfrm>
-            <a:off x="786384" y="2066544"/>
-            <a:ext cx="3017520" cy="347472"/>
+          <p:cNvPr id="10" name="Text 8"/>
+          <p:cNvSpPr txBox="1"/>
+          <p:nvPr/>
+        </p:nvSpPr>
+        <p:spPr>
+          <a:xfrm>
+            <a:off x="6537960" y="2194560"/>
+            <a:ext cx="1417320" cy="658368"/>
           </a:xfrm>
           <a:prstGeom prst="rect">
             <a:avLst/>
@@ -5830,7 +6848,7 @@
               <a:buNone/>
             </a:pPr>
             <a:r>
-              <a:rPr lang="en-US" sz="1600" b="1" dirty="0">
+              <a:rPr lang="en-US" sz="4000" b="1" dirty="0">
                 <a:solidFill>
                   <a:srgbClr val="2F5D50"/>
                 </a:solidFill>
@@ -5838,7 +6856,46 @@
                 <a:ea typeface="Cambria" pitchFamily="34" charset="-122"/>
                 <a:cs typeface="Cambria" pitchFamily="34" charset="-120"/>
               </a:rPr>
-              <a:t>Zero-byte file</a:t>
+              <a:t>0</a:t>
+            </a:r>
+            <a:endParaRPr lang="en-US" sz="4000" dirty="0"/>
+          </a:p>
+        </p:txBody>
+      </p:sp>
+      <p:sp>
+        <p:nvSpPr>
+          <p:cNvPr id="11" name="Text 9"/>
+          <p:cNvSpPr txBox="1"/>
+          <p:nvPr/>
+        </p:nvSpPr>
+        <p:spPr>
+          <a:xfrm>
+            <a:off x="8046720" y="2029968"/>
+            <a:ext cx="3383280" cy="310896"/>
+          </a:xfrm>
+          <a:prstGeom prst="rect">
+            <a:avLst/>
+          </a:prstGeom>
+          <a:noFill/>
+          <a:ln/>
+        </p:spPr>
+        <p:txBody>
+          <a:bodyPr wrap="square" lIns="0" tIns="0" rIns="0" bIns="0" rtlCol="0" anchor="ctr"/>
+          <a:lstStyle/>
+          <a:p>
+            <a:pPr indent="0" marL="0">
+              <a:buNone/>
+            </a:pPr>
+            <a:r>
+              <a:rPr lang="en-US" sz="1600" b="1" dirty="0">
+                <a:solidFill>
+                  <a:srgbClr val="1B1A18"/>
+                </a:solidFill>
+                <a:latin typeface="Cambria" pitchFamily="34" charset="0"/>
+                <a:ea typeface="Cambria" pitchFamily="34" charset="-122"/>
+                <a:cs typeface="Cambria" pitchFamily="34" charset="-120"/>
+              </a:rPr>
+              <a:t>212 harvested seeds</a:t>
             </a:r>
             <a:endParaRPr lang="en-US" sz="1600" dirty="0"/>
           </a:p>
@@ -5846,14 +6903,14 @@
       </p:sp>
       <p:sp>
         <p:nvSpPr>
-          <p:cNvPr id="7" name="Text 5"/>
-          <p:cNvSpPr txBox="1"/>
-          <p:nvPr/>
-        </p:nvSpPr>
-        <p:spPr>
-          <a:xfrm>
-            <a:off x="786384" y="2450592"/>
-            <a:ext cx="2999232" cy="987552"/>
+          <p:cNvPr id="12" name="Text 10"/>
+          <p:cNvSpPr txBox="1"/>
+          <p:nvPr/>
+        </p:nvSpPr>
+        <p:spPr>
+          <a:xfrm>
+            <a:off x="8046720" y="2359152"/>
+            <a:ext cx="3383280" cy="859536"/>
           </a:xfrm>
           <a:prstGeom prst="rect">
             <a:avLst/>
@@ -5867,7 +6924,7 @@
           <a:p>
             <a:pPr indent="0" marL="0">
               <a:lnSpc>
-                <a:spcPts val="1700"/>
+                <a:spcPts val="1800"/>
               </a:lnSpc>
               <a:buNone/>
             </a:pPr>
@@ -5880,7 +6937,7 @@
                 <a:ea typeface="Calibri" pitchFamily="34" charset="-122"/>
                 <a:cs typeface="Calibri" pitchFamily="34" charset="-120"/>
               </a:rPr>
-              <a:t>iOS refuses it; Android indexes it happily — the same pack becomes a different library on each platform.</a:t>
+              <a:t>identical pairs in the same measurement, once the pool, the variation and the gate are all in place.</a:t>
             </a:r>
             <a:endParaRPr lang="en-US" sz="1400" dirty="0"/>
           </a:p>
@@ -5888,18 +6945,18 @@
       </p:sp>
       <p:sp>
         <p:nvSpPr>
-          <p:cNvPr id="8" name="Shape 6"/>
+          <p:cNvPr id="13" name="Shape 11"/>
           <p:cNvSpPr/>
           <p:nvPr/>
         </p:nvSpPr>
         <p:spPr>
           <a:xfrm>
-            <a:off x="4361688" y="1901952"/>
-            <a:ext cx="3447288" cy="1664208"/>
+            <a:off x="548640" y="3493008"/>
+            <a:ext cx="3447288" cy="1993392"/>
           </a:xfrm>
           <a:prstGeom prst="roundRect">
             <a:avLst>
-              <a:gd name="adj" fmla="val 4945"/>
+              <a:gd name="adj" fmla="val 4128"/>
             </a:avLst>
           </a:prstGeom>
           <a:solidFill>
@@ -5915,13 +6972,13 @@
       </p:sp>
       <p:sp>
         <p:nvSpPr>
-          <p:cNvPr id="9" name="Text 7"/>
-          <p:cNvSpPr txBox="1"/>
-          <p:nvPr/>
-        </p:nvSpPr>
-        <p:spPr>
-          <a:xfrm>
-            <a:off x="4599432" y="2066544"/>
+          <p:cNvPr id="14" name="Text 12"/>
+          <p:cNvSpPr txBox="1"/>
+          <p:nvPr/>
+        </p:nvSpPr>
+        <p:spPr>
+          <a:xfrm>
+            <a:off x="786384" y="3657600"/>
             <a:ext cx="3017520" cy="347472"/>
           </a:xfrm>
           <a:prstGeom prst="rect">
@@ -5946,7 +7003,7 @@
                 <a:ea typeface="Cambria" pitchFamily="34" charset="-122"/>
                 <a:cs typeface="Cambria" pitchFamily="34" charset="-120"/>
               </a:rPr>
-              <a:t>Screenshot, no EXIF</a:t>
+              <a:t>The pool</a:t>
             </a:r>
             <a:endParaRPr lang="en-US" sz="1600" dirty="0"/>
           </a:p>
@@ -5954,14 +7011,14 @@
       </p:sp>
       <p:sp>
         <p:nvSpPr>
-          <p:cNvPr id="10" name="Text 8"/>
-          <p:cNvSpPr txBox="1"/>
-          <p:nvPr/>
-        </p:nvSpPr>
-        <p:spPr>
-          <a:xfrm>
-            <a:off x="4599432" y="2450592"/>
-            <a:ext cx="2999232" cy="987552"/>
+          <p:cNvPr id="15" name="Text 13"/>
+          <p:cNvSpPr txBox="1"/>
+          <p:nvPr/>
+        </p:nvSpPr>
+        <p:spPr>
+          <a:xfrm>
+            <a:off x="786384" y="4041648"/>
+            <a:ext cx="2999232" cy="1316736"/>
           </a:xfrm>
           <a:prstGeom prst="rect">
             <a:avLst/>
@@ -5988,7 +7045,7 @@
                 <a:ea typeface="Calibri" pitchFamily="34" charset="-122"/>
                 <a:cs typeface="Calibri" pitchFamily="34" charset="-120"/>
               </a:rPr>
-              <a:t>No DATE_TAKEN, so Samsung files it under "Today" — and it becomes the album cover.</a:t>
+              <a:t>More seeds, fewer crops each. tdg harvest fetches real open-license media once and caches it — stock APIs forbid bulk downloading, so one polite harvest serves every pack thereafter.</a:t>
             </a:r>
             <a:endParaRPr lang="en-US" sz="1400" dirty="0"/>
           </a:p>
@@ -5996,18 +7053,18 @@
       </p:sp>
       <p:sp>
         <p:nvSpPr>
-          <p:cNvPr id="11" name="Shape 9"/>
+          <p:cNvPr id="16" name="Shape 14"/>
           <p:cNvSpPr/>
           <p:nvPr/>
         </p:nvSpPr>
         <p:spPr>
           <a:xfrm>
-            <a:off x="8174736" y="1901952"/>
-            <a:ext cx="3447288" cy="1664208"/>
+            <a:off x="4361688" y="3493008"/>
+            <a:ext cx="3447288" cy="1993392"/>
           </a:xfrm>
           <a:prstGeom prst="roundRect">
             <a:avLst>
-              <a:gd name="adj" fmla="val 4945"/>
+              <a:gd name="adj" fmla="val 4128"/>
             </a:avLst>
           </a:prstGeom>
           <a:solidFill>
@@ -6023,13 +7080,13 @@
       </p:sp>
       <p:sp>
         <p:nvSpPr>
-          <p:cNvPr id="12" name="Text 10"/>
-          <p:cNvSpPr txBox="1"/>
-          <p:nvPr/>
-        </p:nvSpPr>
-        <p:spPr>
-          <a:xfrm>
-            <a:off x="8412480" y="2066544"/>
+          <p:cNvPr id="17" name="Text 15"/>
+          <p:cNvSpPr txBox="1"/>
+          <p:nvPr/>
+        </p:nvSpPr>
+        <p:spPr>
+          <a:xfrm>
+            <a:off x="4599432" y="3657600"/>
             <a:ext cx="3017520" cy="347472"/>
           </a:xfrm>
           <a:prstGeom prst="rect">
@@ -6054,7 +7111,7 @@
                 <a:ea typeface="Cambria" pitchFamily="34" charset="-122"/>
                 <a:cs typeface="Cambria" pitchFamily="34" charset="-120"/>
               </a:rPr>
-              <a:t>Exact duplicate</a:t>
+              <a:t>Variation per file</a:t>
             </a:r>
             <a:endParaRPr lang="en-US" sz="1600" dirty="0"/>
           </a:p>
@@ -6062,14 +7119,14 @@
       </p:sp>
       <p:sp>
         <p:nvSpPr>
-          <p:cNvPr id="13" name="Text 11"/>
-          <p:cNvSpPr txBox="1"/>
-          <p:nvPr/>
-        </p:nvSpPr>
-        <p:spPr>
-          <a:xfrm>
-            <a:off x="8412480" y="2450592"/>
-            <a:ext cx="2999232" cy="987552"/>
+          <p:cNvPr id="18" name="Text 16"/>
+          <p:cNvSpPr txBox="1"/>
+          <p:nvPr/>
+        </p:nvSpPr>
+        <p:spPr>
+          <a:xfrm>
+            <a:off x="4599432" y="4041648"/>
+            <a:ext cx="2999232" cy="1316736"/>
           </a:xfrm>
           <a:prstGeom prst="rect">
             <a:avLst/>
@@ -6096,7 +7153,7 @@
                 <a:ea typeface="Calibri" pitchFamily="34" charset="-122"/>
                 <a:cs typeface="Calibri" pitchFamily="34" charset="-120"/>
               </a:rPr>
-              <a:t>Everything else is re-encoded so nothing collides. This one exists for a dedupe engine to find.</a:t>
+              <a:t>A random crop window and scale, a horizontal flip, a slight rotation, and jitter on colour, brightness and contrast. Geometry alone was not enough: two overlapping crops diverge once their tone does.</a:t>
             </a:r>
             <a:endParaRPr lang="en-US" sz="1400" dirty="0"/>
           </a:p>
@@ -6104,18 +7161,18 @@
       </p:sp>
       <p:sp>
         <p:nvSpPr>
-          <p:cNvPr id="14" name="Shape 12"/>
+          <p:cNvPr id="19" name="Shape 17"/>
           <p:cNvSpPr/>
           <p:nvPr/>
         </p:nvSpPr>
         <p:spPr>
           <a:xfrm>
-            <a:off x="548640" y="3712464"/>
-            <a:ext cx="3447288" cy="1664208"/>
+            <a:off x="8174736" y="3493008"/>
+            <a:ext cx="3447288" cy="1993392"/>
           </a:xfrm>
           <a:prstGeom prst="roundRect">
             <a:avLst>
-              <a:gd name="adj" fmla="val 4945"/>
+              <a:gd name="adj" fmla="val 4128"/>
             </a:avLst>
           </a:prstGeom>
           <a:solidFill>
@@ -6131,13 +7188,13 @@
       </p:sp>
       <p:sp>
         <p:nvSpPr>
-          <p:cNvPr id="15" name="Text 13"/>
-          <p:cNvSpPr txBox="1"/>
-          <p:nvPr/>
-        </p:nvSpPr>
-        <p:spPr>
-          <a:xfrm>
-            <a:off x="786384" y="3877056"/>
+          <p:cNvPr id="20" name="Text 18"/>
+          <p:cNvSpPr txBox="1"/>
+          <p:nvPr/>
+        </p:nvSpPr>
+        <p:spPr>
+          <a:xfrm>
+            <a:off x="8412480" y="3657600"/>
             <a:ext cx="3017520" cy="347472"/>
           </a:xfrm>
           <a:prstGeom prst="rect">
@@ -6162,7 +7219,7 @@
                 <a:ea typeface="Cambria" pitchFamily="34" charset="-122"/>
                 <a:cs typeface="Cambria" pitchFamily="34" charset="-120"/>
               </a:rPr>
-              <a:t>Burst of five</a:t>
+              <a:t>A uniqueness gate</a:t>
             </a:r>
             <a:endParaRPr lang="en-US" sz="1600" dirty="0"/>
           </a:p>
@@ -6170,14 +7227,14 @@
       </p:sp>
       <p:sp>
         <p:nvSpPr>
-          <p:cNvPr id="16" name="Text 14"/>
-          <p:cNvSpPr txBox="1"/>
-          <p:nvPr/>
-        </p:nvSpPr>
-        <p:spPr>
-          <a:xfrm>
-            <a:off x="786384" y="4261104"/>
-            <a:ext cx="2999232" cy="987552"/>
+          <p:cNvPr id="21" name="Text 19"/>
+          <p:cNvSpPr txBox="1"/>
+          <p:nvPr/>
+        </p:nvSpPr>
+        <p:spPr>
+          <a:xfrm>
+            <a:off x="8412480" y="4041648"/>
+            <a:ext cx="2999232" cy="1316736"/>
           </a:xfrm>
           <a:prstGeom prst="rect">
             <a:avLst/>
@@ -6204,7 +7261,7 @@
                 <a:ea typeface="Calibri" pitchFamily="34" charset="-122"/>
                 <a:cs typeface="Calibri" pitchFamily="34" charset="-120"/>
               </a:rPr>
-              <a:t>The same scene 380 ms apart — timeline and "best of" grouping.</a:t>
+              <a:t>Each still is perceptually hashed as it is rendered, and redrawn if it lands within 6 bits of one already in the pack. If the pool is too small to satisfy it, the build says so rather than spinning.</a:t>
             </a:r>
             <a:endParaRPr lang="en-US" sz="1400" dirty="0"/>
           </a:p>
@@ -6212,41 +7269,14 @@
       </p:sp>
       <p:sp>
         <p:nvSpPr>
-          <p:cNvPr id="17" name="Shape 15"/>
-          <p:cNvSpPr/>
-          <p:nvPr/>
-        </p:nvSpPr>
-        <p:spPr>
-          <a:xfrm>
-            <a:off x="4361688" y="3712464"/>
-            <a:ext cx="3447288" cy="1664208"/>
-          </a:xfrm>
-          <a:prstGeom prst="roundRect">
-            <a:avLst>
-              <a:gd name="adj" fmla="val 4945"/>
-            </a:avLst>
-          </a:prstGeom>
-          <a:solidFill>
-            <a:srgbClr val="E4EEE9"/>
-          </a:solidFill>
-          <a:ln w="12700">
-            <a:solidFill>
-              <a:srgbClr val="E4EEE9"/>
-            </a:solidFill>
-            <a:prstDash val="solid"/>
-          </a:ln>
-        </p:spPr>
-      </p:sp>
-      <p:sp>
-        <p:nvSpPr>
-          <p:cNvPr id="18" name="Text 16"/>
-          <p:cNvSpPr txBox="1"/>
-          <p:nvPr/>
-        </p:nvSpPr>
-        <p:spPr>
-          <a:xfrm>
-            <a:off x="4599432" y="3877056"/>
-            <a:ext cx="3017520" cy="347472"/>
+          <p:cNvPr id="22" name="Text 20"/>
+          <p:cNvSpPr txBox="1"/>
+          <p:nvPr/>
+        </p:nvSpPr>
+        <p:spPr>
+          <a:xfrm>
+            <a:off x="548640" y="5650992"/>
+            <a:ext cx="11064240" cy="384048"/>
           </a:xfrm>
           <a:prstGeom prst="rect">
             <a:avLst/>
@@ -6262,204 +7292,15 @@
               <a:buNone/>
             </a:pPr>
             <a:r>
-              <a:rPr lang="en-US" sz="1600" b="1" dirty="0">
-                <a:solidFill>
-                  <a:srgbClr val="2F5D50"/>
+              <a:rPr lang="en-US" sz="1500" i="1" dirty="0">
+                <a:solidFill>
+                  <a:srgbClr val="9C4A32"/>
                 </a:solidFill>
                 <a:latin typeface="Cambria" pitchFamily="34" charset="0"/>
                 <a:ea typeface="Cambria" pitchFamily="34" charset="-122"/>
                 <a:cs typeface="Cambria" pitchFamily="34" charset="-120"/>
               </a:rPr>
-              <a:t>Truncated JPEG</a:t>
-            </a:r>
-            <a:endParaRPr lang="en-US" sz="1600" dirty="0"/>
-          </a:p>
-        </p:txBody>
-      </p:sp>
-      <p:sp>
-        <p:nvSpPr>
-          <p:cNvPr id="19" name="Text 17"/>
-          <p:cNvSpPr txBox="1"/>
-          <p:nvPr/>
-        </p:nvSpPr>
-        <p:spPr>
-          <a:xfrm>
-            <a:off x="4599432" y="4261104"/>
-            <a:ext cx="2999232" cy="987552"/>
-          </a:xfrm>
-          <a:prstGeom prst="rect">
-            <a:avLst/>
-          </a:prstGeom>
-          <a:noFill/>
-          <a:ln/>
-        </p:spPr>
-        <p:txBody>
-          <a:bodyPr wrap="square" lIns="0" tIns="0" rIns="0" bIns="0" rtlCol="0" anchor="t"/>
-          <a:lstStyle/>
-          <a:p>
-            <a:pPr indent="0" marL="0">
-              <a:lnSpc>
-                <a:spcPts val="1700"/>
-              </a:lnSpc>
-              <a:buNone/>
-            </a:pPr>
-            <a:r>
-              <a:rPr lang="en-US" sz="1400" dirty="0">
-                <a:solidFill>
-                  <a:srgbClr val="6D6A64"/>
-                </a:solidFill>
-                <a:latin typeface="Calibri" pitchFamily="34" charset="0"/>
-                <a:ea typeface="Calibri" pitchFamily="34" charset="-122"/>
-                <a:cs typeface="Calibri" pitchFamily="34" charset="-120"/>
-              </a:rPr>
-              <a:t>Valid header, body cut short. Decoders should fail gracefully, not hang.</a:t>
-            </a:r>
-            <a:endParaRPr lang="en-US" sz="1400" dirty="0"/>
-          </a:p>
-        </p:txBody>
-      </p:sp>
-      <p:sp>
-        <p:nvSpPr>
-          <p:cNvPr id="20" name="Shape 18"/>
-          <p:cNvSpPr/>
-          <p:nvPr/>
-        </p:nvSpPr>
-        <p:spPr>
-          <a:xfrm>
-            <a:off x="8174736" y="3712464"/>
-            <a:ext cx="3447288" cy="1664208"/>
-          </a:xfrm>
-          <a:prstGeom prst="roundRect">
-            <a:avLst>
-              <a:gd name="adj" fmla="val 4945"/>
-            </a:avLst>
-          </a:prstGeom>
-          <a:solidFill>
-            <a:srgbClr val="E4EEE9"/>
-          </a:solidFill>
-          <a:ln w="12700">
-            <a:solidFill>
-              <a:srgbClr val="E4EEE9"/>
-            </a:solidFill>
-            <a:prstDash val="solid"/>
-          </a:ln>
-        </p:spPr>
-      </p:sp>
-      <p:sp>
-        <p:nvSpPr>
-          <p:cNvPr id="21" name="Text 19"/>
-          <p:cNvSpPr txBox="1"/>
-          <p:nvPr/>
-        </p:nvSpPr>
-        <p:spPr>
-          <a:xfrm>
-            <a:off x="8412480" y="3877056"/>
-            <a:ext cx="3017520" cy="347472"/>
-          </a:xfrm>
-          <a:prstGeom prst="rect">
-            <a:avLst/>
-          </a:prstGeom>
-          <a:noFill/>
-          <a:ln/>
-        </p:spPr>
-        <p:txBody>
-          <a:bodyPr wrap="square" lIns="0" tIns="0" rIns="0" bIns="0" rtlCol="0" anchor="ctr"/>
-          <a:lstStyle/>
-          <a:p>
-            <a:pPr indent="0" marL="0">
-              <a:buNone/>
-            </a:pPr>
-            <a:r>
-              <a:rPr lang="en-US" sz="1600" b="1" dirty="0">
-                <a:solidFill>
-                  <a:srgbClr val="2F5D50"/>
-                </a:solidFill>
-                <a:latin typeface="Cambria" pitchFamily="34" charset="0"/>
-                <a:ea typeface="Cambria" pitchFamily="34" charset="-122"/>
-                <a:cs typeface="Cambria" pitchFamily="34" charset="-120"/>
-              </a:rPr>
-              <a:t>Non-ASCII filename</a:t>
-            </a:r>
-            <a:endParaRPr lang="en-US" sz="1600" dirty="0"/>
-          </a:p>
-        </p:txBody>
-      </p:sp>
-      <p:sp>
-        <p:nvSpPr>
-          <p:cNvPr id="22" name="Text 20"/>
-          <p:cNvSpPr txBox="1"/>
-          <p:nvPr/>
-        </p:nvSpPr>
-        <p:spPr>
-          <a:xfrm>
-            <a:off x="8412480" y="4261104"/>
-            <a:ext cx="2999232" cy="987552"/>
-          </a:xfrm>
-          <a:prstGeom prst="rect">
-            <a:avLst/>
-          </a:prstGeom>
-          <a:noFill/>
-          <a:ln/>
-        </p:spPr>
-        <p:txBody>
-          <a:bodyPr wrap="square" lIns="0" tIns="0" rIns="0" bIns="0" rtlCol="0" anchor="t"/>
-          <a:lstStyle/>
-          <a:p>
-            <a:pPr indent="0" marL="0">
-              <a:lnSpc>
-                <a:spcPts val="1700"/>
-              </a:lnSpc>
-              <a:buNone/>
-            </a:pPr>
-            <a:r>
-              <a:rPr lang="en-US" sz="1400" dirty="0">
-                <a:solidFill>
-                  <a:srgbClr val="6D6A64"/>
-                </a:solidFill>
-                <a:latin typeface="Calibri" pitchFamily="34" charset="0"/>
-                <a:ea typeface="Calibri" pitchFamily="34" charset="-122"/>
-                <a:cs typeface="Calibri" pitchFamily="34" charset="-120"/>
-              </a:rPr>
-              <a:t>Accented and CJK characters. Every layer that shells out or builds a URL gets a vote — two failed.</a:t>
-            </a:r>
-            <a:endParaRPr lang="en-US" sz="1400" dirty="0"/>
-          </a:p>
-        </p:txBody>
-      </p:sp>
-      <p:sp>
-        <p:nvSpPr>
-          <p:cNvPr id="23" name="Text 21"/>
-          <p:cNvSpPr txBox="1"/>
-          <p:nvPr/>
-        </p:nvSpPr>
-        <p:spPr>
-          <a:xfrm>
-            <a:off x="548640" y="5687568"/>
-            <a:ext cx="11064240" cy="384048"/>
-          </a:xfrm>
-          <a:prstGeom prst="rect">
-            <a:avLst/>
-          </a:prstGeom>
-          <a:noFill/>
-          <a:ln/>
-        </p:spPr>
-        <p:txBody>
-          <a:bodyPr wrap="square" lIns="0" tIns="0" rIns="0" bIns="0" rtlCol="0" anchor="ctr"/>
-          <a:lstStyle/>
-          <a:p>
-            <a:pPr indent="0" marL="0">
-              <a:buNone/>
-            </a:pPr>
-            <a:r>
-              <a:rPr lang="en-US" sz="1500" i="1" dirty="0">
-                <a:solidFill>
-                  <a:srgbClr val="9C4A32"/>
-                </a:solidFill>
-                <a:latin typeface="Cambria" pitchFamily="34" charset="0"/>
-                <a:ea typeface="Cambria" pitchFamily="34" charset="-122"/>
-                <a:cs typeface="Cambria" pitchFamily="34" charset="-120"/>
-              </a:rPr>
-              <a:t>Three of these found real bugs on their first run — including one that made the iOS loader discard 300 MB of completed transfer.</a:t>
+              <a:t>The duplicates a pack is supposed to contain — the byte-identical copy and the burst run — come from --edge-cases and never enter the gate.</a:t>
             </a:r>
             <a:endParaRPr lang="en-US" sz="1500" dirty="0"/>
           </a:p>
@@ -6523,7 +7364,7 @@
                 <a:ea typeface="Calibri" pitchFamily="34" charset="-122"/>
                 <a:cs typeface="Calibri" pitchFamily="34" charset="-120"/>
               </a:rPr>
-              <a:t>USE CASES</a:t>
+              <a:t>WHAT IT FINDS</a:t>
             </a:r>
             <a:endParaRPr lang="en-US" sz="1400" dirty="0"/>
           </a:p>
@@ -6562,7 +7403,7 @@
                 <a:ea typeface="Cambria" pitchFamily="34" charset="-122"/>
                 <a:cs typeface="Cambria" pitchFamily="34" charset="-120"/>
               </a:rPr>
-              <a:t>Who it is for</a:t>
+              <a:t>The awkward files, on purpose</a:t>
             </a:r>
             <a:endParaRPr lang="en-US" sz="3200" dirty="0"/>
           </a:p>
@@ -6570,24 +7411,65 @@
       </p:sp>
       <p:sp>
         <p:nvSpPr>
-          <p:cNvPr id="4" name="Shape 2"/>
+          <p:cNvPr id="4" name="Text 2"/>
+          <p:cNvSpPr txBox="1"/>
+          <p:nvPr/>
+        </p:nvSpPr>
+        <p:spPr>
+          <a:xfrm>
+            <a:off x="548640" y="1426464"/>
+            <a:ext cx="11064240" cy="329184"/>
+          </a:xfrm>
+          <a:prstGeom prst="rect">
+            <a:avLst/>
+          </a:prstGeom>
+          <a:noFill/>
+          <a:ln/>
+        </p:spPr>
+        <p:txBody>
+          <a:bodyPr wrap="square" lIns="0" tIns="0" rIns="0" bIns="0" rtlCol="0" anchor="ctr"/>
+          <a:lstStyle/>
+          <a:p>
+            <a:pPr indent="0" marL="0">
+              <a:buNone/>
+            </a:pPr>
+            <a:r>
+              <a:rPr lang="en-US" sz="1400" dirty="0">
+                <a:solidFill>
+                  <a:srgbClr val="6D6A64"/>
+                </a:solidFill>
+                <a:latin typeface="Calibri" pitchFamily="34" charset="0"/>
+                <a:ea typeface="Calibri" pitchFamily="34" charset="-122"/>
+                <a:cs typeface="Calibri" pitchFamily="34" charset="-120"/>
+              </a:rPr>
+              <a:t>A pack can carry the assets that break naive gallery code. Each one has found a real bug already.</a:t>
+            </a:r>
+            <a:endParaRPr lang="en-US" sz="1400" dirty="0"/>
+          </a:p>
+        </p:txBody>
+      </p:sp>
+      <p:sp>
+        <p:nvSpPr>
+          <p:cNvPr id="5" name="Shape 3"/>
           <p:cNvSpPr/>
           <p:nvPr/>
         </p:nvSpPr>
         <p:spPr>
           <a:xfrm>
-            <a:off x="548640" y="1645920"/>
-            <a:ext cx="164592" cy="164592"/>
-          </a:xfrm>
-          <a:prstGeom prst="ellipse">
-            <a:avLst/>
+            <a:off x="548640" y="1901952"/>
+            <a:ext cx="3447288" cy="1664208"/>
+          </a:xfrm>
+          <a:prstGeom prst="roundRect">
+            <a:avLst>
+              <a:gd name="adj" fmla="val 4945"/>
+            </a:avLst>
           </a:prstGeom>
           <a:solidFill>
-            <a:srgbClr val="AACABD"/>
+            <a:srgbClr val="E4EEE9"/>
           </a:solidFill>
           <a:ln w="12700">
             <a:solidFill>
-              <a:srgbClr val="AACABD"/>
+              <a:srgbClr val="E4EEE9"/>
             </a:solidFill>
             <a:prstDash val="solid"/>
           </a:ln>
@@ -6595,14 +7477,14 @@
       </p:sp>
       <p:sp>
         <p:nvSpPr>
-          <p:cNvPr id="5" name="Text 3"/>
-          <p:cNvSpPr txBox="1"/>
-          <p:nvPr/>
-        </p:nvSpPr>
-        <p:spPr>
-          <a:xfrm>
-            <a:off x="877824" y="1572768"/>
-            <a:ext cx="5029200" cy="329184"/>
+          <p:cNvPr id="6" name="Text 4"/>
+          <p:cNvSpPr txBox="1"/>
+          <p:nvPr/>
+        </p:nvSpPr>
+        <p:spPr>
+          <a:xfrm>
+            <a:off x="786384" y="2066544"/>
+            <a:ext cx="3017520" cy="347472"/>
           </a:xfrm>
           <a:prstGeom prst="rect">
             <a:avLst/>
@@ -6620,13 +7502,13 @@
             <a:r>
               <a:rPr lang="en-US" sz="1600" b="1" dirty="0">
                 <a:solidFill>
-                  <a:srgbClr val="1B1A18"/>
+                  <a:srgbClr val="2F5D50"/>
                 </a:solidFill>
                 <a:latin typeface="Cambria" pitchFamily="34" charset="0"/>
                 <a:ea typeface="Cambria" pitchFamily="34" charset="-122"/>
                 <a:cs typeface="Cambria" pitchFamily="34" charset="-120"/>
               </a:rPr>
-              <a:t>Backup and sync clients</a:t>
+              <a:t>Zero-byte file</a:t>
             </a:r>
             <a:endParaRPr lang="en-US" sz="1600" dirty="0"/>
           </a:p>
@@ -6634,14 +7516,14 @@
       </p:sp>
       <p:sp>
         <p:nvSpPr>
-          <p:cNvPr id="6" name="Text 4"/>
-          <p:cNvSpPr txBox="1"/>
-          <p:nvPr/>
-        </p:nvSpPr>
-        <p:spPr>
-          <a:xfrm>
-            <a:off x="877824" y="1920240"/>
-            <a:ext cx="5074920" cy="914400"/>
+          <p:cNvPr id="7" name="Text 5"/>
+          <p:cNvSpPr txBox="1"/>
+          <p:nvPr/>
+        </p:nvSpPr>
+        <p:spPr>
+          <a:xfrm>
+            <a:off x="786384" y="2450592"/>
+            <a:ext cx="2999232" cy="987552"/>
           </a:xfrm>
           <a:prstGeom prst="rect">
             <a:avLst/>
@@ -6655,7 +7537,7 @@
           <a:p>
             <a:pPr indent="0" marL="0">
               <a:lnSpc>
-                <a:spcPts val="1800"/>
+                <a:spcPts val="1700"/>
               </a:lnSpc>
               <a:buNone/>
             </a:pPr>
@@ -6668,7 +7550,7 @@
                 <a:ea typeface="Calibri" pitchFamily="34" charset="-122"/>
                 <a:cs typeface="Calibri" pitchFamily="34" charset="-120"/>
               </a:rPr>
-              <a:t>Does a 64 GB library upload completely, resume after a drop, and not re-upload what it already has?</a:t>
+              <a:t>iOS refuses it; Android indexes it happily — the same pack becomes a different library on each platform.</a:t>
             </a:r>
             <a:endParaRPr lang="en-US" sz="1400" dirty="0"/>
           </a:p>
@@ -6676,24 +7558,26 @@
       </p:sp>
       <p:sp>
         <p:nvSpPr>
-          <p:cNvPr id="7" name="Shape 5"/>
+          <p:cNvPr id="8" name="Shape 6"/>
           <p:cNvSpPr/>
           <p:nvPr/>
         </p:nvSpPr>
         <p:spPr>
           <a:xfrm>
-            <a:off x="6263640" y="1645920"/>
-            <a:ext cx="164592" cy="164592"/>
-          </a:xfrm>
-          <a:prstGeom prst="ellipse">
-            <a:avLst/>
+            <a:off x="4361688" y="1901952"/>
+            <a:ext cx="3447288" cy="1664208"/>
+          </a:xfrm>
+          <a:prstGeom prst="roundRect">
+            <a:avLst>
+              <a:gd name="adj" fmla="val 4945"/>
+            </a:avLst>
           </a:prstGeom>
           <a:solidFill>
-            <a:srgbClr val="AACABD"/>
+            <a:srgbClr val="E4EEE9"/>
           </a:solidFill>
           <a:ln w="12700">
             <a:solidFill>
-              <a:srgbClr val="AACABD"/>
+              <a:srgbClr val="E4EEE9"/>
             </a:solidFill>
             <a:prstDash val="solid"/>
           </a:ln>
@@ -6701,14 +7585,14 @@
       </p:sp>
       <p:sp>
         <p:nvSpPr>
-          <p:cNvPr id="8" name="Text 6"/>
-          <p:cNvSpPr txBox="1"/>
-          <p:nvPr/>
-        </p:nvSpPr>
-        <p:spPr>
-          <a:xfrm>
-            <a:off x="6592824" y="1572768"/>
-            <a:ext cx="5029200" cy="329184"/>
+          <p:cNvPr id="9" name="Text 7"/>
+          <p:cNvSpPr txBox="1"/>
+          <p:nvPr/>
+        </p:nvSpPr>
+        <p:spPr>
+          <a:xfrm>
+            <a:off x="4599432" y="2066544"/>
+            <a:ext cx="3017520" cy="347472"/>
           </a:xfrm>
           <a:prstGeom prst="rect">
             <a:avLst/>
@@ -6726,13 +7610,13 @@
             <a:r>
               <a:rPr lang="en-US" sz="1600" b="1" dirty="0">
                 <a:solidFill>
-                  <a:srgbClr val="1B1A18"/>
+                  <a:srgbClr val="2F5D50"/>
                 </a:solidFill>
                 <a:latin typeface="Cambria" pitchFamily="34" charset="0"/>
                 <a:ea typeface="Cambria" pitchFamily="34" charset="-122"/>
                 <a:cs typeface="Cambria" pitchFamily="34" charset="-120"/>
               </a:rPr>
-              <a:t>Dedupe engines</a:t>
+              <a:t>Screenshot, no EXIF</a:t>
             </a:r>
             <a:endParaRPr lang="en-US" sz="1600" dirty="0"/>
           </a:p>
@@ -6740,14 +7624,14 @@
       </p:sp>
       <p:sp>
         <p:nvSpPr>
-          <p:cNvPr id="9" name="Text 7"/>
-          <p:cNvSpPr txBox="1"/>
-          <p:nvPr/>
-        </p:nvSpPr>
-        <p:spPr>
-          <a:xfrm>
-            <a:off x="6592824" y="1920240"/>
-            <a:ext cx="5074920" cy="914400"/>
+          <p:cNvPr id="10" name="Text 8"/>
+          <p:cNvSpPr txBox="1"/>
+          <p:nvPr/>
+        </p:nvSpPr>
+        <p:spPr>
+          <a:xfrm>
+            <a:off x="4599432" y="2450592"/>
+            <a:ext cx="2999232" cy="987552"/>
           </a:xfrm>
           <a:prstGeom prst="rect">
             <a:avLst/>
@@ -6761,7 +7645,7 @@
           <a:p>
             <a:pPr indent="0" marL="0">
               <a:lnSpc>
-                <a:spcPts val="1800"/>
+                <a:spcPts val="1700"/>
               </a:lnSpc>
               <a:buNone/>
             </a:pPr>
@@ -6774,7 +7658,7 @@
                 <a:ea typeface="Calibri" pitchFamily="34" charset="-122"/>
                 <a:cs typeface="Calibri" pitchFamily="34" charset="-120"/>
               </a:rPr>
-              <a:t>Byte-identical duplicates and near-identical burst frames, deliberately planted.</a:t>
+              <a:t>No DATE_TAKEN, so Samsung files it under "Today" — and it becomes the album cover.</a:t>
             </a:r>
             <a:endParaRPr lang="en-US" sz="1400" dirty="0"/>
           </a:p>
@@ -6782,24 +7666,26 @@
       </p:sp>
       <p:sp>
         <p:nvSpPr>
-          <p:cNvPr id="10" name="Shape 8"/>
+          <p:cNvPr id="11" name="Shape 9"/>
           <p:cNvSpPr/>
           <p:nvPr/>
         </p:nvSpPr>
         <p:spPr>
           <a:xfrm>
-            <a:off x="548640" y="3163824"/>
-            <a:ext cx="164592" cy="164592"/>
-          </a:xfrm>
-          <a:prstGeom prst="ellipse">
-            <a:avLst/>
+            <a:off x="8174736" y="1901952"/>
+            <a:ext cx="3447288" cy="1664208"/>
+          </a:xfrm>
+          <a:prstGeom prst="roundRect">
+            <a:avLst>
+              <a:gd name="adj" fmla="val 4945"/>
+            </a:avLst>
           </a:prstGeom>
           <a:solidFill>
-            <a:srgbClr val="AACABD"/>
+            <a:srgbClr val="E4EEE9"/>
           </a:solidFill>
           <a:ln w="12700">
             <a:solidFill>
-              <a:srgbClr val="AACABD"/>
+              <a:srgbClr val="E4EEE9"/>
             </a:solidFill>
             <a:prstDash val="solid"/>
           </a:ln>
@@ -6807,14 +7693,14 @@
       </p:sp>
       <p:sp>
         <p:nvSpPr>
-          <p:cNvPr id="11" name="Text 9"/>
-          <p:cNvSpPr txBox="1"/>
-          <p:nvPr/>
-        </p:nvSpPr>
-        <p:spPr>
-          <a:xfrm>
-            <a:off x="877824" y="3090672"/>
-            <a:ext cx="5029200" cy="329184"/>
+          <p:cNvPr id="12" name="Text 10"/>
+          <p:cNvSpPr txBox="1"/>
+          <p:nvPr/>
+        </p:nvSpPr>
+        <p:spPr>
+          <a:xfrm>
+            <a:off x="8412480" y="2066544"/>
+            <a:ext cx="3017520" cy="347472"/>
           </a:xfrm>
           <a:prstGeom prst="rect">
             <a:avLst/>
@@ -6832,13 +7718,13 @@
             <a:r>
               <a:rPr lang="en-US" sz="1600" b="1" dirty="0">
                 <a:solidFill>
-                  <a:srgbClr val="1B1A18"/>
+                  <a:srgbClr val="2F5D50"/>
                 </a:solidFill>
                 <a:latin typeface="Cambria" pitchFamily="34" charset="0"/>
                 <a:ea typeface="Cambria" pitchFamily="34" charset="-122"/>
                 <a:cs typeface="Cambria" pitchFamily="34" charset="-120"/>
               </a:rPr>
-              <a:t>Timeline and album grouping</a:t>
+              <a:t>Exact duplicate</a:t>
             </a:r>
             <a:endParaRPr lang="en-US" sz="1600" dirty="0"/>
           </a:p>
@@ -6846,14 +7732,14 @@
       </p:sp>
       <p:sp>
         <p:nvSpPr>
-          <p:cNvPr id="12" name="Text 10"/>
-          <p:cNvSpPr txBox="1"/>
-          <p:nvPr/>
-        </p:nvSpPr>
-        <p:spPr>
-          <a:xfrm>
-            <a:off x="877824" y="3438144"/>
-            <a:ext cx="5074920" cy="914400"/>
+          <p:cNvPr id="13" name="Text 11"/>
+          <p:cNvSpPr txBox="1"/>
+          <p:nvPr/>
+        </p:nvSpPr>
+        <p:spPr>
+          <a:xfrm>
+            <a:off x="8412480" y="2450592"/>
+            <a:ext cx="2999232" cy="987552"/>
           </a:xfrm>
           <a:prstGeom prst="rect">
             <a:avLst/>
@@ -6867,7 +7753,7 @@
           <a:p>
             <a:pPr indent="0" marL="0">
               <a:lnSpc>
-                <a:spcPts val="1800"/>
+                <a:spcPts val="1700"/>
               </a:lnSpc>
               <a:buNone/>
             </a:pPr>
@@ -6880,7 +7766,7 @@
                 <a:ea typeface="Calibri" pitchFamily="34" charset="-122"/>
                 <a:cs typeface="Calibri" pitchFamily="34" charset="-120"/>
               </a:rPr>
-              <a:t>Capture dates clustered into bursts with sparse months between — a uniform sprinkle makes every grouping feature look identical.</a:t>
+              <a:t>The only one in the pack — every other still is held apart by the uniqueness gate. This one exists for a dedupe engine to find.</a:t>
             </a:r>
             <a:endParaRPr lang="en-US" sz="1400" dirty="0"/>
           </a:p>
@@ -6888,24 +7774,26 @@
       </p:sp>
       <p:sp>
         <p:nvSpPr>
-          <p:cNvPr id="13" name="Shape 11"/>
+          <p:cNvPr id="14" name="Shape 12"/>
           <p:cNvSpPr/>
           <p:nvPr/>
         </p:nvSpPr>
         <p:spPr>
           <a:xfrm>
-            <a:off x="6263640" y="3163824"/>
-            <a:ext cx="164592" cy="164592"/>
-          </a:xfrm>
-          <a:prstGeom prst="ellipse">
-            <a:avLst/>
+            <a:off x="548640" y="3712464"/>
+            <a:ext cx="3447288" cy="1664208"/>
+          </a:xfrm>
+          <a:prstGeom prst="roundRect">
+            <a:avLst>
+              <a:gd name="adj" fmla="val 4945"/>
+            </a:avLst>
           </a:prstGeom>
           <a:solidFill>
-            <a:srgbClr val="AACABD"/>
+            <a:srgbClr val="E4EEE9"/>
           </a:solidFill>
           <a:ln w="12700">
             <a:solidFill>
-              <a:srgbClr val="AACABD"/>
+              <a:srgbClr val="E4EEE9"/>
             </a:solidFill>
             <a:prstDash val="solid"/>
           </a:ln>
@@ -6913,14 +7801,14 @@
       </p:sp>
       <p:sp>
         <p:nvSpPr>
-          <p:cNvPr id="14" name="Text 12"/>
-          <p:cNvSpPr txBox="1"/>
-          <p:nvPr/>
-        </p:nvSpPr>
-        <p:spPr>
-          <a:xfrm>
-            <a:off x="6592824" y="3090672"/>
-            <a:ext cx="5029200" cy="329184"/>
+          <p:cNvPr id="15" name="Text 13"/>
+          <p:cNvSpPr txBox="1"/>
+          <p:nvPr/>
+        </p:nvSpPr>
+        <p:spPr>
+          <a:xfrm>
+            <a:off x="786384" y="3877056"/>
+            <a:ext cx="3017520" cy="347472"/>
           </a:xfrm>
           <a:prstGeom prst="rect">
             <a:avLst/>
@@ -6938,13 +7826,13 @@
             <a:r>
               <a:rPr lang="en-US" sz="1600" b="1" dirty="0">
                 <a:solidFill>
-                  <a:srgbClr val="1B1A18"/>
+                  <a:srgbClr val="2F5D50"/>
                 </a:solidFill>
                 <a:latin typeface="Cambria" pitchFamily="34" charset="0"/>
                 <a:ea typeface="Cambria" pitchFamily="34" charset="-122"/>
                 <a:cs typeface="Cambria" pitchFamily="34" charset="-120"/>
               </a:rPr>
-              <a:t>Migration and device transfer</a:t>
+              <a:t>Burst of five</a:t>
             </a:r>
             <a:endParaRPr lang="en-US" sz="1600" dirty="0"/>
           </a:p>
@@ -6952,14 +7840,14 @@
       </p:sp>
       <p:sp>
         <p:nvSpPr>
-          <p:cNvPr id="15" name="Text 13"/>
-          <p:cNvSpPr txBox="1"/>
-          <p:nvPr/>
-        </p:nvSpPr>
-        <p:spPr>
-          <a:xfrm>
-            <a:off x="6592824" y="3438144"/>
-            <a:ext cx="5074920" cy="914400"/>
+          <p:cNvPr id="16" name="Text 14"/>
+          <p:cNvSpPr txBox="1"/>
+          <p:nvPr/>
+        </p:nvSpPr>
+        <p:spPr>
+          <a:xfrm>
+            <a:off x="786384" y="4261104"/>
+            <a:ext cx="2999232" cy="987552"/>
           </a:xfrm>
           <a:prstGeom prst="rect">
             <a:avLst/>
@@ -6973,7 +7861,7 @@
           <a:p>
             <a:pPr indent="0" marL="0">
               <a:lnSpc>
-                <a:spcPts val="1800"/>
+                <a:spcPts val="1700"/>
               </a:lnSpc>
               <a:buNone/>
             </a:pPr>
@@ -6986,7 +7874,7 @@
                 <a:ea typeface="Calibri" pitchFamily="34" charset="-122"/>
                 <a:cs typeface="Calibri" pitchFamily="34" charset="-120"/>
               </a:rPr>
-              <a:t>Fill the old phone, run the transfer, verify what landed on the new one.</a:t>
+              <a:t>The same scene 380 ms apart — timeline and "best of" grouping.</a:t>
             </a:r>
             <a:endParaRPr lang="en-US" sz="1400" dirty="0"/>
           </a:p>
@@ -6994,24 +7882,26 @@
       </p:sp>
       <p:sp>
         <p:nvSpPr>
-          <p:cNvPr id="16" name="Shape 14"/>
+          <p:cNvPr id="17" name="Shape 15"/>
           <p:cNvSpPr/>
           <p:nvPr/>
         </p:nvSpPr>
         <p:spPr>
           <a:xfrm>
-            <a:off x="548640" y="4681728"/>
-            <a:ext cx="164592" cy="164592"/>
-          </a:xfrm>
-          <a:prstGeom prst="ellipse">
-            <a:avLst/>
+            <a:off x="4361688" y="3712464"/>
+            <a:ext cx="3447288" cy="1664208"/>
+          </a:xfrm>
+          <a:prstGeom prst="roundRect">
+            <a:avLst>
+              <a:gd name="adj" fmla="val 4945"/>
+            </a:avLst>
           </a:prstGeom>
           <a:solidFill>
-            <a:srgbClr val="AACABD"/>
+            <a:srgbClr val="E4EEE9"/>
           </a:solidFill>
           <a:ln w="12700">
             <a:solidFill>
-              <a:srgbClr val="AACABD"/>
+              <a:srgbClr val="E4EEE9"/>
             </a:solidFill>
             <a:prstDash val="solid"/>
           </a:ln>
@@ -7019,14 +7909,14 @@
       </p:sp>
       <p:sp>
         <p:nvSpPr>
-          <p:cNvPr id="17" name="Text 15"/>
-          <p:cNvSpPr txBox="1"/>
-          <p:nvPr/>
-        </p:nvSpPr>
-        <p:spPr>
-          <a:xfrm>
-            <a:off x="877824" y="4608576"/>
-            <a:ext cx="5029200" cy="329184"/>
+          <p:cNvPr id="18" name="Text 16"/>
+          <p:cNvSpPr txBox="1"/>
+          <p:nvPr/>
+        </p:nvSpPr>
+        <p:spPr>
+          <a:xfrm>
+            <a:off x="4599432" y="3877056"/>
+            <a:ext cx="3017520" cy="347472"/>
           </a:xfrm>
           <a:prstGeom prst="rect">
             <a:avLst/>
@@ -7044,13 +7934,13 @@
             <a:r>
               <a:rPr lang="en-US" sz="1600" b="1" dirty="0">
                 <a:solidFill>
-                  <a:srgbClr val="1B1A18"/>
+                  <a:srgbClr val="2F5D50"/>
                 </a:solidFill>
                 <a:latin typeface="Cambria" pitchFamily="34" charset="0"/>
                 <a:ea typeface="Cambria" pitchFamily="34" charset="-122"/>
                 <a:cs typeface="Cambria" pitchFamily="34" charset="-120"/>
               </a:rPr>
-              <a:t>Storage and quota edges</a:t>
+              <a:t>Truncated JPEG</a:t>
             </a:r>
             <a:endParaRPr lang="en-US" sz="1600" dirty="0"/>
           </a:p>
@@ -7058,14 +7948,14 @@
       </p:sp>
       <p:sp>
         <p:nvSpPr>
-          <p:cNvPr id="18" name="Text 16"/>
-          <p:cNvSpPr txBox="1"/>
-          <p:nvPr/>
-        </p:nvSpPr>
-        <p:spPr>
-          <a:xfrm>
-            <a:off x="877824" y="4956048"/>
-            <a:ext cx="5074920" cy="914400"/>
+          <p:cNvPr id="19" name="Text 17"/>
+          <p:cNvSpPr txBox="1"/>
+          <p:nvPr/>
+        </p:nvSpPr>
+        <p:spPr>
+          <a:xfrm>
+            <a:off x="4599432" y="4261104"/>
+            <a:ext cx="2999232" cy="987552"/>
           </a:xfrm>
           <a:prstGeom prst="rect">
             <a:avLst/>
@@ -7079,7 +7969,7 @@
           <a:p>
             <a:pPr indent="0" marL="0">
               <a:lnSpc>
-                <a:spcPts val="1800"/>
+                <a:spcPts val="1700"/>
               </a:lnSpc>
               <a:buNone/>
             </a:pPr>
@@ -7092,7 +7982,7 @@
                 <a:ea typeface="Calibri" pitchFamily="34" charset="-122"/>
                 <a:cs typeface="Calibri" pitchFamily="34" charset="-120"/>
               </a:rPr>
-              <a:t>Exact byte targets put the device precisely at the boundary where the bugs live.</a:t>
+              <a:t>Valid header, body cut short. Decoders should fail gracefully, not hang.</a:t>
             </a:r>
             <a:endParaRPr lang="en-US" sz="1400" dirty="0"/>
           </a:p>
@@ -7100,24 +7990,26 @@
       </p:sp>
       <p:sp>
         <p:nvSpPr>
-          <p:cNvPr id="19" name="Shape 17"/>
+          <p:cNvPr id="20" name="Shape 18"/>
           <p:cNvSpPr/>
           <p:nvPr/>
         </p:nvSpPr>
         <p:spPr>
           <a:xfrm>
-            <a:off x="6263640" y="4681728"/>
-            <a:ext cx="164592" cy="164592"/>
-          </a:xfrm>
-          <a:prstGeom prst="ellipse">
-            <a:avLst/>
+            <a:off x="8174736" y="3712464"/>
+            <a:ext cx="3447288" cy="1664208"/>
+          </a:xfrm>
+          <a:prstGeom prst="roundRect">
+            <a:avLst>
+              <a:gd name="adj" fmla="val 4945"/>
+            </a:avLst>
           </a:prstGeom>
           <a:solidFill>
-            <a:srgbClr val="AACABD"/>
+            <a:srgbClr val="E4EEE9"/>
           </a:solidFill>
           <a:ln w="12700">
             <a:solidFill>
-              <a:srgbClr val="AACABD"/>
+              <a:srgbClr val="E4EEE9"/>
             </a:solidFill>
             <a:prstDash val="solid"/>
           </a:ln>
@@ -7125,14 +8017,14 @@
       </p:sp>
       <p:sp>
         <p:nvSpPr>
-          <p:cNvPr id="20" name="Text 18"/>
-          <p:cNvSpPr txBox="1"/>
-          <p:nvPr/>
-        </p:nvSpPr>
-        <p:spPr>
-          <a:xfrm>
-            <a:off x="6592824" y="4608576"/>
-            <a:ext cx="5029200" cy="329184"/>
+          <p:cNvPr id="21" name="Text 19"/>
+          <p:cNvSpPr txBox="1"/>
+          <p:nvPr/>
+        </p:nvSpPr>
+        <p:spPr>
+          <a:xfrm>
+            <a:off x="8412480" y="3877056"/>
+            <a:ext cx="3017520" cy="347472"/>
           </a:xfrm>
           <a:prstGeom prst="rect">
             <a:avLst/>
@@ -7150,13 +8042,13 @@
             <a:r>
               <a:rPr lang="en-US" sz="1600" b="1" dirty="0">
                 <a:solidFill>
-                  <a:srgbClr val="1B1A18"/>
+                  <a:srgbClr val="2F5D50"/>
                 </a:solidFill>
                 <a:latin typeface="Cambria" pitchFamily="34" charset="0"/>
                 <a:ea typeface="Cambria" pitchFamily="34" charset="-122"/>
                 <a:cs typeface="Cambria" pitchFamily="34" charset="-120"/>
               </a:rPr>
-              <a:t>CI and regression</a:t>
+              <a:t>Non-ASCII filename</a:t>
             </a:r>
             <a:endParaRPr lang="en-US" sz="1600" dirty="0"/>
           </a:p>
@@ -7164,14 +8056,14 @@
       </p:sp>
       <p:sp>
         <p:nvSpPr>
-          <p:cNvPr id="21" name="Text 19"/>
-          <p:cNvSpPr txBox="1"/>
-          <p:nvPr/>
-        </p:nvSpPr>
-        <p:spPr>
-          <a:xfrm>
-            <a:off x="6592824" y="4956048"/>
-            <a:ext cx="5074920" cy="914400"/>
+          <p:cNvPr id="22" name="Text 20"/>
+          <p:cNvSpPr txBox="1"/>
+          <p:nvPr/>
+        </p:nvSpPr>
+        <p:spPr>
+          <a:xfrm>
+            <a:off x="8412480" y="4261104"/>
+            <a:ext cx="2999232" cy="987552"/>
           </a:xfrm>
           <a:prstGeom prst="rect">
             <a:avLst/>
@@ -7185,7 +8077,7 @@
           <a:p>
             <a:pPr indent="0" marL="0">
               <a:lnSpc>
-                <a:spcPts val="1800"/>
+                <a:spcPts val="1700"/>
               </a:lnSpc>
               <a:buNone/>
             </a:pPr>
@@ -7198,9 +8090,48 @@
                 <a:ea typeface="Calibri" pitchFamily="34" charset="-122"/>
                 <a:cs typeface="Calibri" pitchFamily="34" charset="-120"/>
               </a:rPr>
-              <a:t>A failing pack is reproducible from its job id and seed, and tdg verify fails the build.</a:t>
+              <a:t>Accented and CJK characters. Every layer that shells out or builds a URL gets a vote — two failed.</a:t>
             </a:r>
             <a:endParaRPr lang="en-US" sz="1400" dirty="0"/>
+          </a:p>
+        </p:txBody>
+      </p:sp>
+      <p:sp>
+        <p:nvSpPr>
+          <p:cNvPr id="23" name="Text 21"/>
+          <p:cNvSpPr txBox="1"/>
+          <p:nvPr/>
+        </p:nvSpPr>
+        <p:spPr>
+          <a:xfrm>
+            <a:off x="548640" y="5687568"/>
+            <a:ext cx="11064240" cy="384048"/>
+          </a:xfrm>
+          <a:prstGeom prst="rect">
+            <a:avLst/>
+          </a:prstGeom>
+          <a:noFill/>
+          <a:ln/>
+        </p:spPr>
+        <p:txBody>
+          <a:bodyPr wrap="square" lIns="0" tIns="0" rIns="0" bIns="0" rtlCol="0" anchor="ctr"/>
+          <a:lstStyle/>
+          <a:p>
+            <a:pPr indent="0" marL="0">
+              <a:buNone/>
+            </a:pPr>
+            <a:r>
+              <a:rPr lang="en-US" sz="1500" i="1" dirty="0">
+                <a:solidFill>
+                  <a:srgbClr val="9C4A32"/>
+                </a:solidFill>
+                <a:latin typeface="Cambria" pitchFamily="34" charset="0"/>
+                <a:ea typeface="Cambria" pitchFamily="34" charset="-122"/>
+                <a:cs typeface="Cambria" pitchFamily="34" charset="-120"/>
+              </a:rPr>
+              <a:t>Three of these found real bugs on their first run — including one that made the iOS loader discard 300 MB of completed transfer.</a:t>
+            </a:r>
+            <a:endParaRPr lang="en-US" sz="1500" dirty="0"/>
           </a:p>
         </p:txBody>
       </p:sp>
@@ -7262,7 +8193,7 @@
                 <a:ea typeface="Calibri" pitchFamily="34" charset="-122"/>
                 <a:cs typeface="Calibri" pitchFamily="34" charset="-120"/>
               </a:rPr>
-              <a:t>EVIDENCE</a:t>
+              <a:t>USE CASES</a:t>
             </a:r>
             <a:endParaRPr lang="en-US" sz="1400" dirty="0"/>
           </a:p>
@@ -7301,7 +8232,7 @@
                 <a:ea typeface="Cambria" pitchFamily="34" charset="-122"/>
                 <a:cs typeface="Cambria" pitchFamily="34" charset="-120"/>
               </a:rPr>
-              <a:t>Proven on real hardware, not just emulators</a:t>
+              <a:t>Who it is for</a:t>
             </a:r>
             <a:endParaRPr lang="en-US" sz="3200" dirty="0"/>
           </a:p>
@@ -7315,119 +8246,11 @@
         </p:nvSpPr>
         <p:spPr>
           <a:xfrm>
-            <a:off x="548640" y="1426464"/>
-            <a:ext cx="5486400" cy="2724912"/>
-          </a:xfrm>
-          <a:prstGeom prst="roundRect">
-            <a:avLst>
-              <a:gd name="adj" fmla="val 3020"/>
-            </a:avLst>
-          </a:prstGeom>
-          <a:solidFill>
-            <a:srgbClr val="E4EEE9"/>
-          </a:solidFill>
-          <a:ln w="12700">
-            <a:solidFill>
-              <a:srgbClr val="E4EEE9"/>
-            </a:solidFill>
-            <a:prstDash val="solid"/>
-          </a:ln>
-        </p:spPr>
-      </p:sp>
-      <p:sp>
-        <p:nvSpPr>
-          <p:cNvPr id="5" name="Shape 3"/>
-          <p:cNvSpPr/>
-          <p:nvPr/>
-        </p:nvSpPr>
-        <p:spPr>
-          <a:xfrm>
-            <a:off x="896112" y="1700784"/>
-            <a:ext cx="1051560" cy="2155698"/>
-          </a:xfrm>
-          <a:prstGeom prst="roundRect">
-            <a:avLst>
-              <a:gd name="adj" fmla="val 9565"/>
-            </a:avLst>
-          </a:prstGeom>
-          <a:solidFill>
-            <a:srgbClr val="222E38"/>
-          </a:solidFill>
-          <a:ln w="12700">
-            <a:solidFill>
-              <a:srgbClr val="222E38"/>
-            </a:solidFill>
-            <a:prstDash val="solid"/>
-          </a:ln>
-        </p:spPr>
-      </p:sp>
-      <p:sp>
-        <p:nvSpPr>
-          <p:cNvPr id="6" name="Shape 4"/>
-          <p:cNvSpPr/>
-          <p:nvPr/>
-        </p:nvSpPr>
-        <p:spPr>
-          <a:xfrm>
-            <a:off x="959206" y="1763878"/>
-            <a:ext cx="925373" cy="2029511"/>
-          </a:xfrm>
-          <a:prstGeom prst="roundRect">
-            <a:avLst>
-              <a:gd name="adj" fmla="val 7905"/>
-            </a:avLst>
-          </a:prstGeom>
-          <a:solidFill>
-            <a:srgbClr val="F4F8F6"/>
-          </a:solidFill>
-          <a:ln w="12700">
-            <a:solidFill>
-              <a:srgbClr val="F4F8F6"/>
-            </a:solidFill>
-            <a:prstDash val="solid"/>
-          </a:ln>
-        </p:spPr>
-      </p:sp>
-      <p:sp>
-        <p:nvSpPr>
-          <p:cNvPr id="7" name="Shape 5"/>
-          <p:cNvSpPr/>
-          <p:nvPr/>
-        </p:nvSpPr>
-        <p:spPr>
-          <a:xfrm>
-            <a:off x="1385316" y="1814170"/>
-            <a:ext cx="73152" cy="73152"/>
+            <a:off x="548640" y="1645920"/>
+            <a:ext cx="164592" cy="164592"/>
           </a:xfrm>
           <a:prstGeom prst="ellipse">
             <a:avLst/>
-          </a:prstGeom>
-          <a:solidFill>
-            <a:srgbClr val="222E38"/>
-          </a:solidFill>
-          <a:ln w="12700">
-            <a:solidFill>
-              <a:srgbClr val="222E38"/>
-            </a:solidFill>
-            <a:prstDash val="solid"/>
-          </a:ln>
-        </p:spPr>
-      </p:sp>
-      <p:sp>
-        <p:nvSpPr>
-          <p:cNvPr id="8" name="Shape 6"/>
-          <p:cNvSpPr/>
-          <p:nvPr/>
-        </p:nvSpPr>
-        <p:spPr>
-          <a:xfrm>
-            <a:off x="1023214" y="1965046"/>
-            <a:ext cx="244450" cy="244450"/>
-          </a:xfrm>
-          <a:prstGeom prst="roundRect">
-            <a:avLst>
-              <a:gd name="adj" fmla="val 7481"/>
-            </a:avLst>
           </a:prstGeom>
           <a:solidFill>
             <a:srgbClr val="AACABD"/>
@@ -7442,154 +8265,98 @@
       </p:sp>
       <p:sp>
         <p:nvSpPr>
-          <p:cNvPr id="9" name="Shape 7"/>
+          <p:cNvPr id="5" name="Text 3"/>
+          <p:cNvSpPr txBox="1"/>
+          <p:nvPr/>
+        </p:nvSpPr>
+        <p:spPr>
+          <a:xfrm>
+            <a:off x="877824" y="1572768"/>
+            <a:ext cx="5029200" cy="329184"/>
+          </a:xfrm>
+          <a:prstGeom prst="rect">
+            <a:avLst/>
+          </a:prstGeom>
+          <a:noFill/>
+          <a:ln/>
+        </p:spPr>
+        <p:txBody>
+          <a:bodyPr wrap="square" lIns="0" tIns="0" rIns="0" bIns="0" rtlCol="0" anchor="ctr"/>
+          <a:lstStyle/>
+          <a:p>
+            <a:pPr indent="0" marL="0">
+              <a:buNone/>
+            </a:pPr>
+            <a:r>
+              <a:rPr lang="en-US" sz="1600" b="1" dirty="0">
+                <a:solidFill>
+                  <a:srgbClr val="1B1A18"/>
+                </a:solidFill>
+                <a:latin typeface="Cambria" pitchFamily="34" charset="0"/>
+                <a:ea typeface="Cambria" pitchFamily="34" charset="-122"/>
+                <a:cs typeface="Cambria" pitchFamily="34" charset="-120"/>
+              </a:rPr>
+              <a:t>Backup and sync clients</a:t>
+            </a:r>
+            <a:endParaRPr lang="en-US" sz="1600" dirty="0"/>
+          </a:p>
+        </p:txBody>
+      </p:sp>
+      <p:sp>
+        <p:nvSpPr>
+          <p:cNvPr id="6" name="Text 4"/>
+          <p:cNvSpPr txBox="1"/>
+          <p:nvPr/>
+        </p:nvSpPr>
+        <p:spPr>
+          <a:xfrm>
+            <a:off x="877824" y="1920240"/>
+            <a:ext cx="5074920" cy="914400"/>
+          </a:xfrm>
+          <a:prstGeom prst="rect">
+            <a:avLst/>
+          </a:prstGeom>
+          <a:noFill/>
+          <a:ln/>
+        </p:spPr>
+        <p:txBody>
+          <a:bodyPr wrap="square" lIns="0" tIns="0" rIns="0" bIns="0" rtlCol="0" anchor="t"/>
+          <a:lstStyle/>
+          <a:p>
+            <a:pPr indent="0" marL="0">
+              <a:lnSpc>
+                <a:spcPts val="1800"/>
+              </a:lnSpc>
+              <a:buNone/>
+            </a:pPr>
+            <a:r>
+              <a:rPr lang="en-US" sz="1400" dirty="0">
+                <a:solidFill>
+                  <a:srgbClr val="6D6A64"/>
+                </a:solidFill>
+                <a:latin typeface="Calibri" pitchFamily="34" charset="0"/>
+                <a:ea typeface="Calibri" pitchFamily="34" charset="-122"/>
+                <a:cs typeface="Calibri" pitchFamily="34" charset="-120"/>
+              </a:rPr>
+              <a:t>Does a 64 GB library upload completely, resume after a drop, and not re-upload what it already has?</a:t>
+            </a:r>
+            <a:endParaRPr lang="en-US" sz="1400" dirty="0"/>
+          </a:p>
+        </p:txBody>
+      </p:sp>
+      <p:sp>
+        <p:nvSpPr>
+          <p:cNvPr id="7" name="Shape 5"/>
           <p:cNvSpPr/>
           <p:nvPr/>
         </p:nvSpPr>
         <p:spPr>
           <a:xfrm>
-            <a:off x="1299667" y="1965046"/>
-            <a:ext cx="244450" cy="244450"/>
-          </a:xfrm>
-          <a:prstGeom prst="roundRect">
-            <a:avLst>
-              <a:gd name="adj" fmla="val 7481"/>
-            </a:avLst>
-          </a:prstGeom>
-          <a:solidFill>
-            <a:srgbClr val="8FB6A6"/>
-          </a:solidFill>
-          <a:ln w="12700">
-            <a:solidFill>
-              <a:srgbClr val="8FB6A6"/>
-            </a:solidFill>
-            <a:prstDash val="solid"/>
-          </a:ln>
-        </p:spPr>
-      </p:sp>
-      <p:sp>
-        <p:nvSpPr>
-          <p:cNvPr id="10" name="Shape 8"/>
-          <p:cNvSpPr/>
-          <p:nvPr/>
-        </p:nvSpPr>
-        <p:spPr>
-          <a:xfrm>
-            <a:off x="1576121" y="1965046"/>
-            <a:ext cx="244450" cy="244450"/>
-          </a:xfrm>
-          <a:prstGeom prst="roundRect">
-            <a:avLst>
-              <a:gd name="adj" fmla="val 7481"/>
-            </a:avLst>
-          </a:prstGeom>
-          <a:solidFill>
-            <a:srgbClr val="B4D0C4"/>
-          </a:solidFill>
-          <a:ln w="12700">
-            <a:solidFill>
-              <a:srgbClr val="B4D0C4"/>
-            </a:solidFill>
-            <a:prstDash val="solid"/>
-          </a:ln>
-        </p:spPr>
-      </p:sp>
-      <p:sp>
-        <p:nvSpPr>
-          <p:cNvPr id="11" name="Shape 9"/>
-          <p:cNvSpPr/>
-          <p:nvPr/>
-        </p:nvSpPr>
-        <p:spPr>
-          <a:xfrm>
-            <a:off x="1023214" y="2241499"/>
-            <a:ext cx="244450" cy="244450"/>
-          </a:xfrm>
-          <a:prstGeom prst="roundRect">
-            <a:avLst>
-              <a:gd name="adj" fmla="val 7481"/>
-            </a:avLst>
-          </a:prstGeom>
-          <a:solidFill>
-            <a:srgbClr val="7FAE9C"/>
-          </a:solidFill>
-          <a:ln w="12700">
-            <a:solidFill>
-              <a:srgbClr val="7FAE9C"/>
-            </a:solidFill>
-            <a:prstDash val="solid"/>
-          </a:ln>
-        </p:spPr>
-      </p:sp>
-      <p:sp>
-        <p:nvSpPr>
-          <p:cNvPr id="12" name="Shape 10"/>
-          <p:cNvSpPr/>
-          <p:nvPr/>
-        </p:nvSpPr>
-        <p:spPr>
-          <a:xfrm>
-            <a:off x="1299667" y="2241499"/>
-            <a:ext cx="244450" cy="244450"/>
-          </a:xfrm>
-          <a:prstGeom prst="roundRect">
-            <a:avLst>
-              <a:gd name="adj" fmla="val 7481"/>
-            </a:avLst>
-          </a:prstGeom>
-          <a:solidFill>
-            <a:srgbClr val="9FC3B3"/>
-          </a:solidFill>
-          <a:ln w="12700">
-            <a:solidFill>
-              <a:srgbClr val="9FC3B3"/>
-            </a:solidFill>
-            <a:prstDash val="solid"/>
-          </a:ln>
-        </p:spPr>
-      </p:sp>
-      <p:sp>
-        <p:nvSpPr>
-          <p:cNvPr id="13" name="Shape 11"/>
-          <p:cNvSpPr/>
-          <p:nvPr/>
-        </p:nvSpPr>
-        <p:spPr>
-          <a:xfrm>
-            <a:off x="1576121" y="2241499"/>
-            <a:ext cx="244450" cy="244450"/>
-          </a:xfrm>
-          <a:prstGeom prst="roundRect">
-            <a:avLst>
-              <a:gd name="adj" fmla="val 7481"/>
-            </a:avLst>
-          </a:prstGeom>
-          <a:solidFill>
-            <a:srgbClr val="A5C7B8"/>
-          </a:solidFill>
-          <a:ln w="12700">
-            <a:solidFill>
-              <a:srgbClr val="A5C7B8"/>
-            </a:solidFill>
-            <a:prstDash val="solid"/>
-          </a:ln>
-        </p:spPr>
-      </p:sp>
-      <p:sp>
-        <p:nvSpPr>
-          <p:cNvPr id="14" name="Shape 12"/>
-          <p:cNvSpPr/>
-          <p:nvPr/>
-        </p:nvSpPr>
-        <p:spPr>
-          <a:xfrm>
-            <a:off x="1023214" y="2517953"/>
-            <a:ext cx="244450" cy="244450"/>
-          </a:xfrm>
-          <a:prstGeom prst="roundRect">
-            <a:avLst>
-              <a:gd name="adj" fmla="val 7481"/>
-            </a:avLst>
+            <a:off x="6263640" y="1645920"/>
+            <a:ext cx="164592" cy="164592"/>
+          </a:xfrm>
+          <a:prstGeom prst="ellipse">
+            <a:avLst/>
           </a:prstGeom>
           <a:solidFill>
             <a:srgbClr val="AACABD"/>
@@ -7604,154 +8371,98 @@
       </p:sp>
       <p:sp>
         <p:nvSpPr>
-          <p:cNvPr id="15" name="Shape 13"/>
+          <p:cNvPr id="8" name="Text 6"/>
+          <p:cNvSpPr txBox="1"/>
+          <p:nvPr/>
+        </p:nvSpPr>
+        <p:spPr>
+          <a:xfrm>
+            <a:off x="6592824" y="1572768"/>
+            <a:ext cx="5029200" cy="329184"/>
+          </a:xfrm>
+          <a:prstGeom prst="rect">
+            <a:avLst/>
+          </a:prstGeom>
+          <a:noFill/>
+          <a:ln/>
+        </p:spPr>
+        <p:txBody>
+          <a:bodyPr wrap="square" lIns="0" tIns="0" rIns="0" bIns="0" rtlCol="0" anchor="ctr"/>
+          <a:lstStyle/>
+          <a:p>
+            <a:pPr indent="0" marL="0">
+              <a:buNone/>
+            </a:pPr>
+            <a:r>
+              <a:rPr lang="en-US" sz="1600" b="1" dirty="0">
+                <a:solidFill>
+                  <a:srgbClr val="1B1A18"/>
+                </a:solidFill>
+                <a:latin typeface="Cambria" pitchFamily="34" charset="0"/>
+                <a:ea typeface="Cambria" pitchFamily="34" charset="-122"/>
+                <a:cs typeface="Cambria" pitchFamily="34" charset="-120"/>
+              </a:rPr>
+              <a:t>Dedupe engines</a:t>
+            </a:r>
+            <a:endParaRPr lang="en-US" sz="1600" dirty="0"/>
+          </a:p>
+        </p:txBody>
+      </p:sp>
+      <p:sp>
+        <p:nvSpPr>
+          <p:cNvPr id="9" name="Text 7"/>
+          <p:cNvSpPr txBox="1"/>
+          <p:nvPr/>
+        </p:nvSpPr>
+        <p:spPr>
+          <a:xfrm>
+            <a:off x="6592824" y="1920240"/>
+            <a:ext cx="5074920" cy="914400"/>
+          </a:xfrm>
+          <a:prstGeom prst="rect">
+            <a:avLst/>
+          </a:prstGeom>
+          <a:noFill/>
+          <a:ln/>
+        </p:spPr>
+        <p:txBody>
+          <a:bodyPr wrap="square" lIns="0" tIns="0" rIns="0" bIns="0" rtlCol="0" anchor="t"/>
+          <a:lstStyle/>
+          <a:p>
+            <a:pPr indent="0" marL="0">
+              <a:lnSpc>
+                <a:spcPts val="1800"/>
+              </a:lnSpc>
+              <a:buNone/>
+            </a:pPr>
+            <a:r>
+              <a:rPr lang="en-US" sz="1400" dirty="0">
+                <a:solidFill>
+                  <a:srgbClr val="6D6A64"/>
+                </a:solidFill>
+                <a:latin typeface="Calibri" pitchFamily="34" charset="0"/>
+                <a:ea typeface="Calibri" pitchFamily="34" charset="-122"/>
+                <a:cs typeface="Calibri" pitchFamily="34" charset="-120"/>
+              </a:rPr>
+              <a:t>Byte-identical duplicates and near-identical burst frames, deliberately planted.</a:t>
+            </a:r>
+            <a:endParaRPr lang="en-US" sz="1400" dirty="0"/>
+          </a:p>
+        </p:txBody>
+      </p:sp>
+      <p:sp>
+        <p:nvSpPr>
+          <p:cNvPr id="10" name="Shape 8"/>
           <p:cNvSpPr/>
           <p:nvPr/>
         </p:nvSpPr>
         <p:spPr>
           <a:xfrm>
-            <a:off x="1299667" y="2517953"/>
-            <a:ext cx="244450" cy="244450"/>
-          </a:xfrm>
-          <a:prstGeom prst="roundRect">
-            <a:avLst>
-              <a:gd name="adj" fmla="val 7481"/>
-            </a:avLst>
-          </a:prstGeom>
-          <a:solidFill>
-            <a:srgbClr val="8FB6A6"/>
-          </a:solidFill>
-          <a:ln w="12700">
-            <a:solidFill>
-              <a:srgbClr val="8FB6A6"/>
-            </a:solidFill>
-            <a:prstDash val="solid"/>
-          </a:ln>
-        </p:spPr>
-      </p:sp>
-      <p:sp>
-        <p:nvSpPr>
-          <p:cNvPr id="16" name="Shape 14"/>
-          <p:cNvSpPr/>
-          <p:nvPr/>
-        </p:nvSpPr>
-        <p:spPr>
-          <a:xfrm>
-            <a:off x="1576121" y="2517953"/>
-            <a:ext cx="244450" cy="244450"/>
-          </a:xfrm>
-          <a:prstGeom prst="roundRect">
-            <a:avLst>
-              <a:gd name="adj" fmla="val 7481"/>
-            </a:avLst>
-          </a:prstGeom>
-          <a:solidFill>
-            <a:srgbClr val="B4D0C4"/>
-          </a:solidFill>
-          <a:ln w="12700">
-            <a:solidFill>
-              <a:srgbClr val="B4D0C4"/>
-            </a:solidFill>
-            <a:prstDash val="solid"/>
-          </a:ln>
-        </p:spPr>
-      </p:sp>
-      <p:sp>
-        <p:nvSpPr>
-          <p:cNvPr id="17" name="Shape 15"/>
-          <p:cNvSpPr/>
-          <p:nvPr/>
-        </p:nvSpPr>
-        <p:spPr>
-          <a:xfrm>
-            <a:off x="1023214" y="2794406"/>
-            <a:ext cx="244450" cy="244450"/>
-          </a:xfrm>
-          <a:prstGeom prst="roundRect">
-            <a:avLst>
-              <a:gd name="adj" fmla="val 7481"/>
-            </a:avLst>
-          </a:prstGeom>
-          <a:solidFill>
-            <a:srgbClr val="7FAE9C"/>
-          </a:solidFill>
-          <a:ln w="12700">
-            <a:solidFill>
-              <a:srgbClr val="7FAE9C"/>
-            </a:solidFill>
-            <a:prstDash val="solid"/>
-          </a:ln>
-        </p:spPr>
-      </p:sp>
-      <p:sp>
-        <p:nvSpPr>
-          <p:cNvPr id="18" name="Shape 16"/>
-          <p:cNvSpPr/>
-          <p:nvPr/>
-        </p:nvSpPr>
-        <p:spPr>
-          <a:xfrm>
-            <a:off x="1299667" y="2794406"/>
-            <a:ext cx="244450" cy="244450"/>
-          </a:xfrm>
-          <a:prstGeom prst="roundRect">
-            <a:avLst>
-              <a:gd name="adj" fmla="val 7481"/>
-            </a:avLst>
-          </a:prstGeom>
-          <a:solidFill>
-            <a:srgbClr val="9FC3B3"/>
-          </a:solidFill>
-          <a:ln w="12700">
-            <a:solidFill>
-              <a:srgbClr val="9FC3B3"/>
-            </a:solidFill>
-            <a:prstDash val="solid"/>
-          </a:ln>
-        </p:spPr>
-      </p:sp>
-      <p:sp>
-        <p:nvSpPr>
-          <p:cNvPr id="19" name="Shape 17"/>
-          <p:cNvSpPr/>
-          <p:nvPr/>
-        </p:nvSpPr>
-        <p:spPr>
-          <a:xfrm>
-            <a:off x="1576121" y="2794406"/>
-            <a:ext cx="244450" cy="244450"/>
-          </a:xfrm>
-          <a:prstGeom prst="roundRect">
-            <a:avLst>
-              <a:gd name="adj" fmla="val 7481"/>
-            </a:avLst>
-          </a:prstGeom>
-          <a:solidFill>
-            <a:srgbClr val="A5C7B8"/>
-          </a:solidFill>
-          <a:ln w="12700">
-            <a:solidFill>
-              <a:srgbClr val="A5C7B8"/>
-            </a:solidFill>
-            <a:prstDash val="solid"/>
-          </a:ln>
-        </p:spPr>
-      </p:sp>
-      <p:sp>
-        <p:nvSpPr>
-          <p:cNvPr id="20" name="Shape 18"/>
-          <p:cNvSpPr/>
-          <p:nvPr/>
-        </p:nvSpPr>
-        <p:spPr>
-          <a:xfrm>
-            <a:off x="1023214" y="3070860"/>
-            <a:ext cx="244450" cy="244450"/>
-          </a:xfrm>
-          <a:prstGeom prst="roundRect">
-            <a:avLst>
-              <a:gd name="adj" fmla="val 7481"/>
-            </a:avLst>
+            <a:off x="548640" y="3163824"/>
+            <a:ext cx="164592" cy="164592"/>
+          </a:xfrm>
+          <a:prstGeom prst="ellipse">
+            <a:avLst/>
           </a:prstGeom>
           <a:solidFill>
             <a:srgbClr val="AACABD"/>
@@ -7766,149 +8477,14 @@
       </p:sp>
       <p:sp>
         <p:nvSpPr>
-          <p:cNvPr id="21" name="Shape 19"/>
-          <p:cNvSpPr/>
-          <p:nvPr/>
-        </p:nvSpPr>
-        <p:spPr>
-          <a:xfrm>
-            <a:off x="1299667" y="3070860"/>
-            <a:ext cx="244450" cy="244450"/>
-          </a:xfrm>
-          <a:prstGeom prst="roundRect">
-            <a:avLst>
-              <a:gd name="adj" fmla="val 7481"/>
-            </a:avLst>
-          </a:prstGeom>
-          <a:solidFill>
-            <a:srgbClr val="8FB6A6"/>
-          </a:solidFill>
-          <a:ln w="12700">
-            <a:solidFill>
-              <a:srgbClr val="8FB6A6"/>
-            </a:solidFill>
-            <a:prstDash val="solid"/>
-          </a:ln>
-        </p:spPr>
-      </p:sp>
-      <p:sp>
-        <p:nvSpPr>
-          <p:cNvPr id="22" name="Shape 20"/>
-          <p:cNvSpPr/>
-          <p:nvPr/>
-        </p:nvSpPr>
-        <p:spPr>
-          <a:xfrm>
-            <a:off x="1576121" y="3070860"/>
-            <a:ext cx="244450" cy="244450"/>
-          </a:xfrm>
-          <a:prstGeom prst="roundRect">
-            <a:avLst>
-              <a:gd name="adj" fmla="val 7481"/>
-            </a:avLst>
-          </a:prstGeom>
-          <a:solidFill>
-            <a:srgbClr val="B4D0C4"/>
-          </a:solidFill>
-          <a:ln w="12700">
-            <a:solidFill>
-              <a:srgbClr val="B4D0C4"/>
-            </a:solidFill>
-            <a:prstDash val="solid"/>
-          </a:ln>
-        </p:spPr>
-      </p:sp>
-      <p:sp>
-        <p:nvSpPr>
-          <p:cNvPr id="23" name="Shape 21"/>
-          <p:cNvSpPr/>
-          <p:nvPr/>
-        </p:nvSpPr>
-        <p:spPr>
-          <a:xfrm>
-            <a:off x="1023214" y="3347314"/>
-            <a:ext cx="244450" cy="244450"/>
-          </a:xfrm>
-          <a:prstGeom prst="roundRect">
-            <a:avLst>
-              <a:gd name="adj" fmla="val 7481"/>
-            </a:avLst>
-          </a:prstGeom>
-          <a:solidFill>
-            <a:srgbClr val="7FAE9C"/>
-          </a:solidFill>
-          <a:ln w="12700">
-            <a:solidFill>
-              <a:srgbClr val="7FAE9C"/>
-            </a:solidFill>
-            <a:prstDash val="solid"/>
-          </a:ln>
-        </p:spPr>
-      </p:sp>
-      <p:sp>
-        <p:nvSpPr>
-          <p:cNvPr id="24" name="Shape 22"/>
-          <p:cNvSpPr/>
-          <p:nvPr/>
-        </p:nvSpPr>
-        <p:spPr>
-          <a:xfrm>
-            <a:off x="1299667" y="3347314"/>
-            <a:ext cx="244450" cy="244450"/>
-          </a:xfrm>
-          <a:prstGeom prst="roundRect">
-            <a:avLst>
-              <a:gd name="adj" fmla="val 7481"/>
-            </a:avLst>
-          </a:prstGeom>
-          <a:solidFill>
-            <a:srgbClr val="9FC3B3"/>
-          </a:solidFill>
-          <a:ln w="12700">
-            <a:solidFill>
-              <a:srgbClr val="9FC3B3"/>
-            </a:solidFill>
-            <a:prstDash val="solid"/>
-          </a:ln>
-        </p:spPr>
-      </p:sp>
-      <p:sp>
-        <p:nvSpPr>
-          <p:cNvPr id="25" name="Shape 23"/>
-          <p:cNvSpPr/>
-          <p:nvPr/>
-        </p:nvSpPr>
-        <p:spPr>
-          <a:xfrm>
-            <a:off x="1576121" y="3347314"/>
-            <a:ext cx="244450" cy="244450"/>
-          </a:xfrm>
-          <a:prstGeom prst="roundRect">
-            <a:avLst>
-              <a:gd name="adj" fmla="val 7481"/>
-            </a:avLst>
-          </a:prstGeom>
-          <a:solidFill>
-            <a:srgbClr val="A5C7B8"/>
-          </a:solidFill>
-          <a:ln w="12700">
-            <a:solidFill>
-              <a:srgbClr val="A5C7B8"/>
-            </a:solidFill>
-            <a:prstDash val="solid"/>
-          </a:ln>
-        </p:spPr>
-      </p:sp>
-      <p:sp>
-        <p:nvSpPr>
-          <p:cNvPr id="26" name="Text 24"/>
-          <p:cNvSpPr txBox="1"/>
-          <p:nvPr/>
-        </p:nvSpPr>
-        <p:spPr>
-          <a:xfrm>
-            <a:off x="2240280" y="1755648"/>
-            <a:ext cx="3566160" cy="384048"/>
+          <p:cNvPr id="11" name="Text 9"/>
+          <p:cNvSpPr txBox="1"/>
+          <p:nvPr/>
+        </p:nvSpPr>
+        <p:spPr>
+          <a:xfrm>
+            <a:off x="877824" y="3090672"/>
+            <a:ext cx="5029200" cy="329184"/>
           </a:xfrm>
           <a:prstGeom prst="rect">
             <a:avLst/>
@@ -7924,42 +8500,45 @@
               <a:buNone/>
             </a:pPr>
             <a:r>
-              <a:rPr lang="en-US" sz="2000" b="1" dirty="0">
-                <a:solidFill>
-                  <a:srgbClr val="2F5D50"/>
+              <a:rPr lang="en-US" sz="1600" b="1" dirty="0">
+                <a:solidFill>
+                  <a:srgbClr val="1B1A18"/>
                 </a:solidFill>
                 <a:latin typeface="Cambria" pitchFamily="34" charset="0"/>
                 <a:ea typeface="Cambria" pitchFamily="34" charset="-122"/>
                 <a:cs typeface="Cambria" pitchFamily="34" charset="-120"/>
               </a:rPr>
-              <a:t>Galaxy S24</a:t>
-            </a:r>
-            <a:endParaRPr lang="en-US" sz="2000" dirty="0"/>
-          </a:p>
-        </p:txBody>
-      </p:sp>
-      <p:sp>
-        <p:nvSpPr>
-          <p:cNvPr id="27" name="Text 25"/>
-          <p:cNvSpPr txBox="1"/>
-          <p:nvPr/>
-        </p:nvSpPr>
-        <p:spPr>
-          <a:xfrm>
-            <a:off x="2240280" y="2139696"/>
-            <a:ext cx="3566160" cy="292608"/>
-          </a:xfrm>
-          <a:prstGeom prst="rect">
-            <a:avLst/>
-          </a:prstGeom>
-          <a:noFill/>
-          <a:ln/>
-        </p:spPr>
-        <p:txBody>
-          <a:bodyPr wrap="square" lIns="0" tIns="0" rIns="0" bIns="0" rtlCol="0" anchor="ctr"/>
-          <a:lstStyle/>
-          <a:p>
-            <a:pPr indent="0" marL="0">
+              <a:t>Timeline and album grouping</a:t>
+            </a:r>
+            <a:endParaRPr lang="en-US" sz="1600" dirty="0"/>
+          </a:p>
+        </p:txBody>
+      </p:sp>
+      <p:sp>
+        <p:nvSpPr>
+          <p:cNvPr id="12" name="Text 10"/>
+          <p:cNvSpPr txBox="1"/>
+          <p:nvPr/>
+        </p:nvSpPr>
+        <p:spPr>
+          <a:xfrm>
+            <a:off x="877824" y="3438144"/>
+            <a:ext cx="5074920" cy="914400"/>
+          </a:xfrm>
+          <a:prstGeom prst="rect">
+            <a:avLst/>
+          </a:prstGeom>
+          <a:noFill/>
+          <a:ln/>
+        </p:spPr>
+        <p:txBody>
+          <a:bodyPr wrap="square" lIns="0" tIns="0" rIns="0" bIns="0" rtlCol="0" anchor="t"/>
+          <a:lstStyle/>
+          <a:p>
+            <a:pPr indent="0" marL="0">
+              <a:lnSpc>
+                <a:spcPts val="1800"/>
+              </a:lnSpc>
               <a:buNone/>
             </a:pPr>
             <a:r>
@@ -7971,7 +8550,7 @@
                 <a:ea typeface="Calibri" pitchFamily="34" charset="-122"/>
                 <a:cs typeface="Calibri" pitchFamily="34" charset="-120"/>
               </a:rPr>
-              <a:t>Android 16</a:t>
+              <a:t>Capture dates clustered into bursts with sparse months between — a uniform sprinkle makes every grouping feature look identical.</a:t>
             </a:r>
             <a:endParaRPr lang="en-US" sz="1400" dirty="0"/>
           </a:p>
@@ -7979,208 +8558,17 @@
       </p:sp>
       <p:sp>
         <p:nvSpPr>
-          <p:cNvPr id="28" name="Text 26"/>
-          <p:cNvSpPr txBox="1"/>
-          <p:nvPr/>
-        </p:nvSpPr>
-        <p:spPr>
-          <a:xfrm>
-            <a:off x="2240280" y="2523744"/>
-            <a:ext cx="3566160" cy="347472"/>
-          </a:xfrm>
-          <a:prstGeom prst="rect">
-            <a:avLst/>
-          </a:prstGeom>
-          <a:noFill/>
-          <a:ln/>
-        </p:spPr>
-        <p:txBody>
-          <a:bodyPr wrap="square" lIns="0" tIns="0" rIns="0" bIns="0" rtlCol="0" anchor="ctr"/>
-          <a:lstStyle/>
-          <a:p>
-            <a:pPr indent="0" marL="0">
-              <a:buNone/>
-            </a:pPr>
-            <a:r>
-              <a:rPr lang="en-US" sz="1600" b="1" dirty="0">
-                <a:solidFill>
-                  <a:srgbClr val="1B1A18"/>
-                </a:solidFill>
-                <a:latin typeface="Calibri" pitchFamily="34" charset="0"/>
-                <a:ea typeface="Calibri" pitchFamily="34" charset="-122"/>
-                <a:cs typeface="Calibri" pitchFamily="34" charset="-120"/>
-              </a:rPr>
-              <a:t>3,466 assets · 10 GB</a:t>
-            </a:r>
-            <a:endParaRPr lang="en-US" sz="1600" dirty="0"/>
-          </a:p>
-        </p:txBody>
-      </p:sp>
-      <p:sp>
-        <p:nvSpPr>
-          <p:cNvPr id="29" name="Text 27"/>
-          <p:cNvSpPr txBox="1"/>
-          <p:nvPr/>
-        </p:nvSpPr>
-        <p:spPr>
-          <a:xfrm>
-            <a:off x="2240280" y="2926080"/>
-            <a:ext cx="3566160" cy="914400"/>
-          </a:xfrm>
-          <a:prstGeom prst="rect">
-            <a:avLst/>
-          </a:prstGeom>
-          <a:noFill/>
-          <a:ln/>
-        </p:spPr>
-        <p:txBody>
-          <a:bodyPr wrap="square" lIns="0" tIns="0" rIns="0" bIns="0" rtlCol="0" anchor="t"/>
-          <a:lstStyle/>
-          <a:p>
-            <a:pPr indent="0" marL="0">
-              <a:lnSpc>
-                <a:spcPts val="1800"/>
-              </a:lnSpc>
-              <a:buNone/>
-            </a:pPr>
-            <a:r>
-              <a:rPr lang="en-US" sz="1400" dirty="0">
-                <a:solidFill>
-                  <a:srgbClr val="6D6A64"/>
-                </a:solidFill>
-                <a:latin typeface="Calibri" pitchFamily="34" charset="0"/>
-                <a:ea typeface="Calibri" pitchFamily="34" charset="-122"/>
-                <a:cs typeface="Calibri" pitchFamily="34" charset="-120"/>
-              </a:rPr>
-              <a:t>15 min unplugged, screen off — the foreground service was never suspended</a:t>
-            </a:r>
-            <a:endParaRPr lang="en-US" sz="1400" dirty="0"/>
-          </a:p>
-        </p:txBody>
-      </p:sp>
-      <p:sp>
-        <p:nvSpPr>
-          <p:cNvPr id="30" name="Shape 28"/>
+          <p:cNvPr id="13" name="Shape 11"/>
           <p:cNvSpPr/>
           <p:nvPr/>
         </p:nvSpPr>
         <p:spPr>
           <a:xfrm>
-            <a:off x="6309360" y="1426464"/>
-            <a:ext cx="5486400" cy="2724912"/>
-          </a:xfrm>
-          <a:prstGeom prst="roundRect">
-            <a:avLst>
-              <a:gd name="adj" fmla="val 3020"/>
-            </a:avLst>
-          </a:prstGeom>
-          <a:solidFill>
-            <a:srgbClr val="E4EEE9"/>
-          </a:solidFill>
-          <a:ln w="12700">
-            <a:solidFill>
-              <a:srgbClr val="E4EEE9"/>
-            </a:solidFill>
-            <a:prstDash val="solid"/>
-          </a:ln>
-        </p:spPr>
-      </p:sp>
-      <p:sp>
-        <p:nvSpPr>
-          <p:cNvPr id="31" name="Shape 29"/>
-          <p:cNvSpPr/>
-          <p:nvPr/>
-        </p:nvSpPr>
-        <p:spPr>
-          <a:xfrm>
-            <a:off x="6656832" y="1700784"/>
-            <a:ext cx="1051560" cy="2155698"/>
-          </a:xfrm>
-          <a:prstGeom prst="roundRect">
-            <a:avLst>
-              <a:gd name="adj" fmla="val 13043"/>
-            </a:avLst>
-          </a:prstGeom>
-          <a:solidFill>
-            <a:srgbClr val="34343A"/>
-          </a:solidFill>
-          <a:ln w="12700">
-            <a:solidFill>
-              <a:srgbClr val="34343A"/>
-            </a:solidFill>
-            <a:prstDash val="solid"/>
-          </a:ln>
-        </p:spPr>
-      </p:sp>
-      <p:sp>
-        <p:nvSpPr>
-          <p:cNvPr id="32" name="Shape 30"/>
-          <p:cNvSpPr/>
-          <p:nvPr/>
-        </p:nvSpPr>
-        <p:spPr>
-          <a:xfrm>
-            <a:off x="6719926" y="1763878"/>
-            <a:ext cx="925373" cy="2029511"/>
-          </a:xfrm>
-          <a:prstGeom prst="roundRect">
-            <a:avLst>
-              <a:gd name="adj" fmla="val 11858"/>
-            </a:avLst>
-          </a:prstGeom>
-          <a:solidFill>
-            <a:srgbClr val="F4F8F6"/>
-          </a:solidFill>
-          <a:ln w="12700">
-            <a:solidFill>
-              <a:srgbClr val="F4F8F6"/>
-            </a:solidFill>
-            <a:prstDash val="solid"/>
-          </a:ln>
-        </p:spPr>
-      </p:sp>
-      <p:sp>
-        <p:nvSpPr>
-          <p:cNvPr id="33" name="Shape 31"/>
-          <p:cNvSpPr/>
-          <p:nvPr/>
-        </p:nvSpPr>
-        <p:spPr>
-          <a:xfrm>
-            <a:off x="7063740" y="1809598"/>
-            <a:ext cx="237744" cy="77724"/>
-          </a:xfrm>
-          <a:prstGeom prst="roundRect">
-            <a:avLst>
-              <a:gd name="adj" fmla="val 49412"/>
-            </a:avLst>
-          </a:prstGeom>
-          <a:solidFill>
-            <a:srgbClr val="34343A"/>
-          </a:solidFill>
-          <a:ln w="12700">
-            <a:solidFill>
-              <a:srgbClr val="34343A"/>
-            </a:solidFill>
-            <a:prstDash val="solid"/>
-          </a:ln>
-        </p:spPr>
-      </p:sp>
-      <p:sp>
-        <p:nvSpPr>
-          <p:cNvPr id="34" name="Shape 32"/>
-          <p:cNvSpPr/>
-          <p:nvPr/>
-        </p:nvSpPr>
-        <p:spPr>
-          <a:xfrm>
-            <a:off x="6783934" y="1965046"/>
-            <a:ext cx="244450" cy="244450"/>
-          </a:xfrm>
-          <a:prstGeom prst="roundRect">
-            <a:avLst>
-              <a:gd name="adj" fmla="val 7481"/>
-            </a:avLst>
+            <a:off x="6263640" y="3163824"/>
+            <a:ext cx="164592" cy="164592"/>
+          </a:xfrm>
+          <a:prstGeom prst="ellipse">
+            <a:avLst/>
           </a:prstGeom>
           <a:solidFill>
             <a:srgbClr val="AACABD"/>
@@ -8195,154 +8583,98 @@
       </p:sp>
       <p:sp>
         <p:nvSpPr>
-          <p:cNvPr id="35" name="Shape 33"/>
+          <p:cNvPr id="14" name="Text 12"/>
+          <p:cNvSpPr txBox="1"/>
+          <p:nvPr/>
+        </p:nvSpPr>
+        <p:spPr>
+          <a:xfrm>
+            <a:off x="6592824" y="3090672"/>
+            <a:ext cx="5029200" cy="329184"/>
+          </a:xfrm>
+          <a:prstGeom prst="rect">
+            <a:avLst/>
+          </a:prstGeom>
+          <a:noFill/>
+          <a:ln/>
+        </p:spPr>
+        <p:txBody>
+          <a:bodyPr wrap="square" lIns="0" tIns="0" rIns="0" bIns="0" rtlCol="0" anchor="ctr"/>
+          <a:lstStyle/>
+          <a:p>
+            <a:pPr indent="0" marL="0">
+              <a:buNone/>
+            </a:pPr>
+            <a:r>
+              <a:rPr lang="en-US" sz="1600" b="1" dirty="0">
+                <a:solidFill>
+                  <a:srgbClr val="1B1A18"/>
+                </a:solidFill>
+                <a:latin typeface="Cambria" pitchFamily="34" charset="0"/>
+                <a:ea typeface="Cambria" pitchFamily="34" charset="-122"/>
+                <a:cs typeface="Cambria" pitchFamily="34" charset="-120"/>
+              </a:rPr>
+              <a:t>Migration and device transfer</a:t>
+            </a:r>
+            <a:endParaRPr lang="en-US" sz="1600" dirty="0"/>
+          </a:p>
+        </p:txBody>
+      </p:sp>
+      <p:sp>
+        <p:nvSpPr>
+          <p:cNvPr id="15" name="Text 13"/>
+          <p:cNvSpPr txBox="1"/>
+          <p:nvPr/>
+        </p:nvSpPr>
+        <p:spPr>
+          <a:xfrm>
+            <a:off x="6592824" y="3438144"/>
+            <a:ext cx="5074920" cy="914400"/>
+          </a:xfrm>
+          <a:prstGeom prst="rect">
+            <a:avLst/>
+          </a:prstGeom>
+          <a:noFill/>
+          <a:ln/>
+        </p:spPr>
+        <p:txBody>
+          <a:bodyPr wrap="square" lIns="0" tIns="0" rIns="0" bIns="0" rtlCol="0" anchor="t"/>
+          <a:lstStyle/>
+          <a:p>
+            <a:pPr indent="0" marL="0">
+              <a:lnSpc>
+                <a:spcPts val="1800"/>
+              </a:lnSpc>
+              <a:buNone/>
+            </a:pPr>
+            <a:r>
+              <a:rPr lang="en-US" sz="1400" dirty="0">
+                <a:solidFill>
+                  <a:srgbClr val="6D6A64"/>
+                </a:solidFill>
+                <a:latin typeface="Calibri" pitchFamily="34" charset="0"/>
+                <a:ea typeface="Calibri" pitchFamily="34" charset="-122"/>
+                <a:cs typeface="Calibri" pitchFamily="34" charset="-120"/>
+              </a:rPr>
+              <a:t>Fill the old phone, run the transfer, verify what landed on the new one.</a:t>
+            </a:r>
+            <a:endParaRPr lang="en-US" sz="1400" dirty="0"/>
+          </a:p>
+        </p:txBody>
+      </p:sp>
+      <p:sp>
+        <p:nvSpPr>
+          <p:cNvPr id="16" name="Shape 14"/>
           <p:cNvSpPr/>
           <p:nvPr/>
         </p:nvSpPr>
         <p:spPr>
           <a:xfrm>
-            <a:off x="7060387" y="1965046"/>
-            <a:ext cx="244450" cy="244450"/>
-          </a:xfrm>
-          <a:prstGeom prst="roundRect">
-            <a:avLst>
-              <a:gd name="adj" fmla="val 7481"/>
-            </a:avLst>
-          </a:prstGeom>
-          <a:solidFill>
-            <a:srgbClr val="8FB6A6"/>
-          </a:solidFill>
-          <a:ln w="12700">
-            <a:solidFill>
-              <a:srgbClr val="8FB6A6"/>
-            </a:solidFill>
-            <a:prstDash val="solid"/>
-          </a:ln>
-        </p:spPr>
-      </p:sp>
-      <p:sp>
-        <p:nvSpPr>
-          <p:cNvPr id="36" name="Shape 34"/>
-          <p:cNvSpPr/>
-          <p:nvPr/>
-        </p:nvSpPr>
-        <p:spPr>
-          <a:xfrm>
-            <a:off x="7336841" y="1965046"/>
-            <a:ext cx="244450" cy="244450"/>
-          </a:xfrm>
-          <a:prstGeom prst="roundRect">
-            <a:avLst>
-              <a:gd name="adj" fmla="val 7481"/>
-            </a:avLst>
-          </a:prstGeom>
-          <a:solidFill>
-            <a:srgbClr val="B4D0C4"/>
-          </a:solidFill>
-          <a:ln w="12700">
-            <a:solidFill>
-              <a:srgbClr val="B4D0C4"/>
-            </a:solidFill>
-            <a:prstDash val="solid"/>
-          </a:ln>
-        </p:spPr>
-      </p:sp>
-      <p:sp>
-        <p:nvSpPr>
-          <p:cNvPr id="37" name="Shape 35"/>
-          <p:cNvSpPr/>
-          <p:nvPr/>
-        </p:nvSpPr>
-        <p:spPr>
-          <a:xfrm>
-            <a:off x="6783934" y="2241499"/>
-            <a:ext cx="244450" cy="244450"/>
-          </a:xfrm>
-          <a:prstGeom prst="roundRect">
-            <a:avLst>
-              <a:gd name="adj" fmla="val 7481"/>
-            </a:avLst>
-          </a:prstGeom>
-          <a:solidFill>
-            <a:srgbClr val="7FAE9C"/>
-          </a:solidFill>
-          <a:ln w="12700">
-            <a:solidFill>
-              <a:srgbClr val="7FAE9C"/>
-            </a:solidFill>
-            <a:prstDash val="solid"/>
-          </a:ln>
-        </p:spPr>
-      </p:sp>
-      <p:sp>
-        <p:nvSpPr>
-          <p:cNvPr id="38" name="Shape 36"/>
-          <p:cNvSpPr/>
-          <p:nvPr/>
-        </p:nvSpPr>
-        <p:spPr>
-          <a:xfrm>
-            <a:off x="7060387" y="2241499"/>
-            <a:ext cx="244450" cy="244450"/>
-          </a:xfrm>
-          <a:prstGeom prst="roundRect">
-            <a:avLst>
-              <a:gd name="adj" fmla="val 7481"/>
-            </a:avLst>
-          </a:prstGeom>
-          <a:solidFill>
-            <a:srgbClr val="9FC3B3"/>
-          </a:solidFill>
-          <a:ln w="12700">
-            <a:solidFill>
-              <a:srgbClr val="9FC3B3"/>
-            </a:solidFill>
-            <a:prstDash val="solid"/>
-          </a:ln>
-        </p:spPr>
-      </p:sp>
-      <p:sp>
-        <p:nvSpPr>
-          <p:cNvPr id="39" name="Shape 37"/>
-          <p:cNvSpPr/>
-          <p:nvPr/>
-        </p:nvSpPr>
-        <p:spPr>
-          <a:xfrm>
-            <a:off x="7336841" y="2241499"/>
-            <a:ext cx="244450" cy="244450"/>
-          </a:xfrm>
-          <a:prstGeom prst="roundRect">
-            <a:avLst>
-              <a:gd name="adj" fmla="val 7481"/>
-            </a:avLst>
-          </a:prstGeom>
-          <a:solidFill>
-            <a:srgbClr val="A5C7B8"/>
-          </a:solidFill>
-          <a:ln w="12700">
-            <a:solidFill>
-              <a:srgbClr val="A5C7B8"/>
-            </a:solidFill>
-            <a:prstDash val="solid"/>
-          </a:ln>
-        </p:spPr>
-      </p:sp>
-      <p:sp>
-        <p:nvSpPr>
-          <p:cNvPr id="40" name="Shape 38"/>
-          <p:cNvSpPr/>
-          <p:nvPr/>
-        </p:nvSpPr>
-        <p:spPr>
-          <a:xfrm>
-            <a:off x="6783934" y="2517953"/>
-            <a:ext cx="244450" cy="244450"/>
-          </a:xfrm>
-          <a:prstGeom prst="roundRect">
-            <a:avLst>
-              <a:gd name="adj" fmla="val 7481"/>
-            </a:avLst>
+            <a:off x="548640" y="4681728"/>
+            <a:ext cx="164592" cy="164592"/>
+          </a:xfrm>
+          <a:prstGeom prst="ellipse">
+            <a:avLst/>
           </a:prstGeom>
           <a:solidFill>
             <a:srgbClr val="AACABD"/>
@@ -8357,154 +8689,98 @@
       </p:sp>
       <p:sp>
         <p:nvSpPr>
-          <p:cNvPr id="41" name="Shape 39"/>
+          <p:cNvPr id="17" name="Text 15"/>
+          <p:cNvSpPr txBox="1"/>
+          <p:nvPr/>
+        </p:nvSpPr>
+        <p:spPr>
+          <a:xfrm>
+            <a:off x="877824" y="4608576"/>
+            <a:ext cx="5029200" cy="329184"/>
+          </a:xfrm>
+          <a:prstGeom prst="rect">
+            <a:avLst/>
+          </a:prstGeom>
+          <a:noFill/>
+          <a:ln/>
+        </p:spPr>
+        <p:txBody>
+          <a:bodyPr wrap="square" lIns="0" tIns="0" rIns="0" bIns="0" rtlCol="0" anchor="ctr"/>
+          <a:lstStyle/>
+          <a:p>
+            <a:pPr indent="0" marL="0">
+              <a:buNone/>
+            </a:pPr>
+            <a:r>
+              <a:rPr lang="en-US" sz="1600" b="1" dirty="0">
+                <a:solidFill>
+                  <a:srgbClr val="1B1A18"/>
+                </a:solidFill>
+                <a:latin typeface="Cambria" pitchFamily="34" charset="0"/>
+                <a:ea typeface="Cambria" pitchFamily="34" charset="-122"/>
+                <a:cs typeface="Cambria" pitchFamily="34" charset="-120"/>
+              </a:rPr>
+              <a:t>Storage and quota edges</a:t>
+            </a:r>
+            <a:endParaRPr lang="en-US" sz="1600" dirty="0"/>
+          </a:p>
+        </p:txBody>
+      </p:sp>
+      <p:sp>
+        <p:nvSpPr>
+          <p:cNvPr id="18" name="Text 16"/>
+          <p:cNvSpPr txBox="1"/>
+          <p:nvPr/>
+        </p:nvSpPr>
+        <p:spPr>
+          <a:xfrm>
+            <a:off x="877824" y="4956048"/>
+            <a:ext cx="5074920" cy="914400"/>
+          </a:xfrm>
+          <a:prstGeom prst="rect">
+            <a:avLst/>
+          </a:prstGeom>
+          <a:noFill/>
+          <a:ln/>
+        </p:spPr>
+        <p:txBody>
+          <a:bodyPr wrap="square" lIns="0" tIns="0" rIns="0" bIns="0" rtlCol="0" anchor="t"/>
+          <a:lstStyle/>
+          <a:p>
+            <a:pPr indent="0" marL="0">
+              <a:lnSpc>
+                <a:spcPts val="1800"/>
+              </a:lnSpc>
+              <a:buNone/>
+            </a:pPr>
+            <a:r>
+              <a:rPr lang="en-US" sz="1400" dirty="0">
+                <a:solidFill>
+                  <a:srgbClr val="6D6A64"/>
+                </a:solidFill>
+                <a:latin typeface="Calibri" pitchFamily="34" charset="0"/>
+                <a:ea typeface="Calibri" pitchFamily="34" charset="-122"/>
+                <a:cs typeface="Calibri" pitchFamily="34" charset="-120"/>
+              </a:rPr>
+              <a:t>Exact byte targets put the device precisely at the boundary where the bugs live.</a:t>
+            </a:r>
+            <a:endParaRPr lang="en-US" sz="1400" dirty="0"/>
+          </a:p>
+        </p:txBody>
+      </p:sp>
+      <p:sp>
+        <p:nvSpPr>
+          <p:cNvPr id="19" name="Shape 17"/>
           <p:cNvSpPr/>
           <p:nvPr/>
         </p:nvSpPr>
         <p:spPr>
           <a:xfrm>
-            <a:off x="7060387" y="2517953"/>
-            <a:ext cx="244450" cy="244450"/>
-          </a:xfrm>
-          <a:prstGeom prst="roundRect">
-            <a:avLst>
-              <a:gd name="adj" fmla="val 7481"/>
-            </a:avLst>
-          </a:prstGeom>
-          <a:solidFill>
-            <a:srgbClr val="8FB6A6"/>
-          </a:solidFill>
-          <a:ln w="12700">
-            <a:solidFill>
-              <a:srgbClr val="8FB6A6"/>
-            </a:solidFill>
-            <a:prstDash val="solid"/>
-          </a:ln>
-        </p:spPr>
-      </p:sp>
-      <p:sp>
-        <p:nvSpPr>
-          <p:cNvPr id="42" name="Shape 40"/>
-          <p:cNvSpPr/>
-          <p:nvPr/>
-        </p:nvSpPr>
-        <p:spPr>
-          <a:xfrm>
-            <a:off x="7336841" y="2517953"/>
-            <a:ext cx="244450" cy="244450"/>
-          </a:xfrm>
-          <a:prstGeom prst="roundRect">
-            <a:avLst>
-              <a:gd name="adj" fmla="val 7481"/>
-            </a:avLst>
-          </a:prstGeom>
-          <a:solidFill>
-            <a:srgbClr val="B4D0C4"/>
-          </a:solidFill>
-          <a:ln w="12700">
-            <a:solidFill>
-              <a:srgbClr val="B4D0C4"/>
-            </a:solidFill>
-            <a:prstDash val="solid"/>
-          </a:ln>
-        </p:spPr>
-      </p:sp>
-      <p:sp>
-        <p:nvSpPr>
-          <p:cNvPr id="43" name="Shape 41"/>
-          <p:cNvSpPr/>
-          <p:nvPr/>
-        </p:nvSpPr>
-        <p:spPr>
-          <a:xfrm>
-            <a:off x="6783934" y="2794406"/>
-            <a:ext cx="244450" cy="244450"/>
-          </a:xfrm>
-          <a:prstGeom prst="roundRect">
-            <a:avLst>
-              <a:gd name="adj" fmla="val 7481"/>
-            </a:avLst>
-          </a:prstGeom>
-          <a:solidFill>
-            <a:srgbClr val="7FAE9C"/>
-          </a:solidFill>
-          <a:ln w="12700">
-            <a:solidFill>
-              <a:srgbClr val="7FAE9C"/>
-            </a:solidFill>
-            <a:prstDash val="solid"/>
-          </a:ln>
-        </p:spPr>
-      </p:sp>
-      <p:sp>
-        <p:nvSpPr>
-          <p:cNvPr id="44" name="Shape 42"/>
-          <p:cNvSpPr/>
-          <p:nvPr/>
-        </p:nvSpPr>
-        <p:spPr>
-          <a:xfrm>
-            <a:off x="7060387" y="2794406"/>
-            <a:ext cx="244450" cy="244450"/>
-          </a:xfrm>
-          <a:prstGeom prst="roundRect">
-            <a:avLst>
-              <a:gd name="adj" fmla="val 7481"/>
-            </a:avLst>
-          </a:prstGeom>
-          <a:solidFill>
-            <a:srgbClr val="9FC3B3"/>
-          </a:solidFill>
-          <a:ln w="12700">
-            <a:solidFill>
-              <a:srgbClr val="9FC3B3"/>
-            </a:solidFill>
-            <a:prstDash val="solid"/>
-          </a:ln>
-        </p:spPr>
-      </p:sp>
-      <p:sp>
-        <p:nvSpPr>
-          <p:cNvPr id="45" name="Shape 43"/>
-          <p:cNvSpPr/>
-          <p:nvPr/>
-        </p:nvSpPr>
-        <p:spPr>
-          <a:xfrm>
-            <a:off x="7336841" y="2794406"/>
-            <a:ext cx="244450" cy="244450"/>
-          </a:xfrm>
-          <a:prstGeom prst="roundRect">
-            <a:avLst>
-              <a:gd name="adj" fmla="val 7481"/>
-            </a:avLst>
-          </a:prstGeom>
-          <a:solidFill>
-            <a:srgbClr val="A5C7B8"/>
-          </a:solidFill>
-          <a:ln w="12700">
-            <a:solidFill>
-              <a:srgbClr val="A5C7B8"/>
-            </a:solidFill>
-            <a:prstDash val="solid"/>
-          </a:ln>
-        </p:spPr>
-      </p:sp>
-      <p:sp>
-        <p:nvSpPr>
-          <p:cNvPr id="46" name="Shape 44"/>
-          <p:cNvSpPr/>
-          <p:nvPr/>
-        </p:nvSpPr>
-        <p:spPr>
-          <a:xfrm>
-            <a:off x="6783934" y="3070860"/>
-            <a:ext cx="244450" cy="244450"/>
-          </a:xfrm>
-          <a:prstGeom prst="roundRect">
-            <a:avLst>
-              <a:gd name="adj" fmla="val 7481"/>
-            </a:avLst>
+            <a:off x="6263640" y="4681728"/>
+            <a:ext cx="164592" cy="164592"/>
+          </a:xfrm>
+          <a:prstGeom prst="ellipse">
+            <a:avLst/>
           </a:prstGeom>
           <a:solidFill>
             <a:srgbClr val="AACABD"/>
@@ -8519,149 +8795,14 @@
       </p:sp>
       <p:sp>
         <p:nvSpPr>
-          <p:cNvPr id="47" name="Shape 45"/>
-          <p:cNvSpPr/>
-          <p:nvPr/>
-        </p:nvSpPr>
-        <p:spPr>
-          <a:xfrm>
-            <a:off x="7060387" y="3070860"/>
-            <a:ext cx="244450" cy="244450"/>
-          </a:xfrm>
-          <a:prstGeom prst="roundRect">
-            <a:avLst>
-              <a:gd name="adj" fmla="val 7481"/>
-            </a:avLst>
-          </a:prstGeom>
-          <a:solidFill>
-            <a:srgbClr val="8FB6A6"/>
-          </a:solidFill>
-          <a:ln w="12700">
-            <a:solidFill>
-              <a:srgbClr val="8FB6A6"/>
-            </a:solidFill>
-            <a:prstDash val="solid"/>
-          </a:ln>
-        </p:spPr>
-      </p:sp>
-      <p:sp>
-        <p:nvSpPr>
-          <p:cNvPr id="48" name="Shape 46"/>
-          <p:cNvSpPr/>
-          <p:nvPr/>
-        </p:nvSpPr>
-        <p:spPr>
-          <a:xfrm>
-            <a:off x="7336841" y="3070860"/>
-            <a:ext cx="244450" cy="244450"/>
-          </a:xfrm>
-          <a:prstGeom prst="roundRect">
-            <a:avLst>
-              <a:gd name="adj" fmla="val 7481"/>
-            </a:avLst>
-          </a:prstGeom>
-          <a:solidFill>
-            <a:srgbClr val="B4D0C4"/>
-          </a:solidFill>
-          <a:ln w="12700">
-            <a:solidFill>
-              <a:srgbClr val="B4D0C4"/>
-            </a:solidFill>
-            <a:prstDash val="solid"/>
-          </a:ln>
-        </p:spPr>
-      </p:sp>
-      <p:sp>
-        <p:nvSpPr>
-          <p:cNvPr id="49" name="Shape 47"/>
-          <p:cNvSpPr/>
-          <p:nvPr/>
-        </p:nvSpPr>
-        <p:spPr>
-          <a:xfrm>
-            <a:off x="6783934" y="3347314"/>
-            <a:ext cx="244450" cy="244450"/>
-          </a:xfrm>
-          <a:prstGeom prst="roundRect">
-            <a:avLst>
-              <a:gd name="adj" fmla="val 7481"/>
-            </a:avLst>
-          </a:prstGeom>
-          <a:solidFill>
-            <a:srgbClr val="7FAE9C"/>
-          </a:solidFill>
-          <a:ln w="12700">
-            <a:solidFill>
-              <a:srgbClr val="7FAE9C"/>
-            </a:solidFill>
-            <a:prstDash val="solid"/>
-          </a:ln>
-        </p:spPr>
-      </p:sp>
-      <p:sp>
-        <p:nvSpPr>
-          <p:cNvPr id="50" name="Shape 48"/>
-          <p:cNvSpPr/>
-          <p:nvPr/>
-        </p:nvSpPr>
-        <p:spPr>
-          <a:xfrm>
-            <a:off x="7060387" y="3347314"/>
-            <a:ext cx="244450" cy="244450"/>
-          </a:xfrm>
-          <a:prstGeom prst="roundRect">
-            <a:avLst>
-              <a:gd name="adj" fmla="val 7481"/>
-            </a:avLst>
-          </a:prstGeom>
-          <a:solidFill>
-            <a:srgbClr val="9FC3B3"/>
-          </a:solidFill>
-          <a:ln w="12700">
-            <a:solidFill>
-              <a:srgbClr val="9FC3B3"/>
-            </a:solidFill>
-            <a:prstDash val="solid"/>
-          </a:ln>
-        </p:spPr>
-      </p:sp>
-      <p:sp>
-        <p:nvSpPr>
-          <p:cNvPr id="51" name="Shape 49"/>
-          <p:cNvSpPr/>
-          <p:nvPr/>
-        </p:nvSpPr>
-        <p:spPr>
-          <a:xfrm>
-            <a:off x="7336841" y="3347314"/>
-            <a:ext cx="244450" cy="244450"/>
-          </a:xfrm>
-          <a:prstGeom prst="roundRect">
-            <a:avLst>
-              <a:gd name="adj" fmla="val 7481"/>
-            </a:avLst>
-          </a:prstGeom>
-          <a:solidFill>
-            <a:srgbClr val="A5C7B8"/>
-          </a:solidFill>
-          <a:ln w="12700">
-            <a:solidFill>
-              <a:srgbClr val="A5C7B8"/>
-            </a:solidFill>
-            <a:prstDash val="solid"/>
-          </a:ln>
-        </p:spPr>
-      </p:sp>
-      <p:sp>
-        <p:nvSpPr>
-          <p:cNvPr id="52" name="Text 50"/>
-          <p:cNvSpPr txBox="1"/>
-          <p:nvPr/>
-        </p:nvSpPr>
-        <p:spPr>
-          <a:xfrm>
-            <a:off x="8001000" y="1755648"/>
-            <a:ext cx="3566160" cy="384048"/>
+          <p:cNvPr id="20" name="Text 18"/>
+          <p:cNvSpPr txBox="1"/>
+          <p:nvPr/>
+        </p:nvSpPr>
+        <p:spPr>
+          <a:xfrm>
+            <a:off x="6592824" y="4608576"/>
+            <a:ext cx="5029200" cy="329184"/>
           </a:xfrm>
           <a:prstGeom prst="rect">
             <a:avLst/>
@@ -8677,42 +8818,45 @@
               <a:buNone/>
             </a:pPr>
             <a:r>
-              <a:rPr lang="en-US" sz="2000" b="1" dirty="0">
-                <a:solidFill>
-                  <a:srgbClr val="2F5D50"/>
+              <a:rPr lang="en-US" sz="1600" b="1" dirty="0">
+                <a:solidFill>
+                  <a:srgbClr val="1B1A18"/>
                 </a:solidFill>
                 <a:latin typeface="Cambria" pitchFamily="34" charset="0"/>
                 <a:ea typeface="Cambria" pitchFamily="34" charset="-122"/>
                 <a:cs typeface="Cambria" pitchFamily="34" charset="-120"/>
               </a:rPr>
-              <a:t>iPhone 15 Pro</a:t>
-            </a:r>
-            <a:endParaRPr lang="en-US" sz="2000" dirty="0"/>
-          </a:p>
-        </p:txBody>
-      </p:sp>
-      <p:sp>
-        <p:nvSpPr>
-          <p:cNvPr id="53" name="Text 51"/>
-          <p:cNvSpPr txBox="1"/>
-          <p:nvPr/>
-        </p:nvSpPr>
-        <p:spPr>
-          <a:xfrm>
-            <a:off x="8001000" y="2139696"/>
-            <a:ext cx="3566160" cy="292608"/>
-          </a:xfrm>
-          <a:prstGeom prst="rect">
-            <a:avLst/>
-          </a:prstGeom>
-          <a:noFill/>
-          <a:ln/>
-        </p:spPr>
-        <p:txBody>
-          <a:bodyPr wrap="square" lIns="0" tIns="0" rIns="0" bIns="0" rtlCol="0" anchor="ctr"/>
-          <a:lstStyle/>
-          <a:p>
-            <a:pPr indent="0" marL="0">
+              <a:t>CI and regression</a:t>
+            </a:r>
+            <a:endParaRPr lang="en-US" sz="1600" dirty="0"/>
+          </a:p>
+        </p:txBody>
+      </p:sp>
+      <p:sp>
+        <p:nvSpPr>
+          <p:cNvPr id="21" name="Text 19"/>
+          <p:cNvSpPr txBox="1"/>
+          <p:nvPr/>
+        </p:nvSpPr>
+        <p:spPr>
+          <a:xfrm>
+            <a:off x="6592824" y="4956048"/>
+            <a:ext cx="5074920" cy="914400"/>
+          </a:xfrm>
+          <a:prstGeom prst="rect">
+            <a:avLst/>
+          </a:prstGeom>
+          <a:noFill/>
+          <a:ln/>
+        </p:spPr>
+        <p:txBody>
+          <a:bodyPr wrap="square" lIns="0" tIns="0" rIns="0" bIns="0" rtlCol="0" anchor="t"/>
+          <a:lstStyle/>
+          <a:p>
+            <a:pPr indent="0" marL="0">
+              <a:lnSpc>
+                <a:spcPts val="1800"/>
+              </a:lnSpc>
               <a:buNone/>
             </a:pPr>
             <a:r>
@@ -8724,345 +8868,9 @@
                 <a:ea typeface="Calibri" pitchFamily="34" charset="-122"/>
                 <a:cs typeface="Calibri" pitchFamily="34" charset="-120"/>
               </a:rPr>
-              <a:t>iOS 26.6.1</a:t>
+              <a:t>A failing pack is reproducible from its job id and seed, and tdg verify fails the build.</a:t>
             </a:r>
             <a:endParaRPr lang="en-US" sz="1400" dirty="0"/>
-          </a:p>
-        </p:txBody>
-      </p:sp>
-      <p:sp>
-        <p:nvSpPr>
-          <p:cNvPr id="54" name="Text 52"/>
-          <p:cNvSpPr txBox="1"/>
-          <p:nvPr/>
-        </p:nvSpPr>
-        <p:spPr>
-          <a:xfrm>
-            <a:off x="8001000" y="2523744"/>
-            <a:ext cx="3566160" cy="347472"/>
-          </a:xfrm>
-          <a:prstGeom prst="rect">
-            <a:avLst/>
-          </a:prstGeom>
-          <a:noFill/>
-          <a:ln/>
-        </p:spPr>
-        <p:txBody>
-          <a:bodyPr wrap="square" lIns="0" tIns="0" rIns="0" bIns="0" rtlCol="0" anchor="ctr"/>
-          <a:lstStyle/>
-          <a:p>
-            <a:pPr indent="0" marL="0">
-              <a:buNone/>
-            </a:pPr>
-            <a:r>
-              <a:rPr lang="en-US" sz="1600" b="1" dirty="0">
-                <a:solidFill>
-                  <a:srgbClr val="1B1A18"/>
-                </a:solidFill>
-                <a:latin typeface="Calibri" pitchFamily="34" charset="0"/>
-                <a:ea typeface="Calibri" pitchFamily="34" charset="-122"/>
-                <a:cs typeface="Calibri" pitchFamily="34" charset="-120"/>
-              </a:rPr>
-              <a:t>71 of 72 accepted</a:t>
-            </a:r>
-            <a:endParaRPr lang="en-US" sz="1600" dirty="0"/>
-          </a:p>
-        </p:txBody>
-      </p:sp>
-      <p:sp>
-        <p:nvSpPr>
-          <p:cNvPr id="55" name="Text 53"/>
-          <p:cNvSpPr txBox="1"/>
-          <p:nvPr/>
-        </p:nvSpPr>
-        <p:spPr>
-          <a:xfrm>
-            <a:off x="8001000" y="2926080"/>
-            <a:ext cx="3566160" cy="914400"/>
-          </a:xfrm>
-          <a:prstGeom prst="rect">
-            <a:avLst/>
-          </a:prstGeom>
-          <a:noFill/>
-          <a:ln/>
-        </p:spPr>
-        <p:txBody>
-          <a:bodyPr wrap="square" lIns="0" tIns="0" rIns="0" bIns="0" rtlCol="0" anchor="t"/>
-          <a:lstStyle/>
-          <a:p>
-            <a:pPr indent="0" marL="0">
-              <a:lnSpc>
-                <a:spcPts val="1800"/>
-              </a:lnSpc>
-              <a:buNone/>
-            </a:pPr>
-            <a:r>
-              <a:rPr lang="en-US" sz="1400" dirty="0">
-                <a:solidFill>
-                  <a:srgbClr val="6D6A64"/>
-                </a:solidFill>
-                <a:latin typeface="Calibri" pitchFamily="34" charset="0"/>
-                <a:ea typeface="Calibri" pitchFamily="34" charset="-122"/>
-                <a:cs typeface="Calibri" pitchFamily="34" charset="-120"/>
-              </a:rPr>
-              <a:t>the one refusal is a zero-byte file, which is correct</a:t>
-            </a:r>
-            <a:endParaRPr lang="en-US" sz="1400" dirty="0"/>
-          </a:p>
-        </p:txBody>
-      </p:sp>
-      <p:sp>
-        <p:nvSpPr>
-          <p:cNvPr id="56" name="Shape 54"/>
-          <p:cNvSpPr/>
-          <p:nvPr/>
-        </p:nvSpPr>
-        <p:spPr>
-          <a:xfrm>
-            <a:off x="548640" y="4334256"/>
-            <a:ext cx="5486400" cy="1152144"/>
-          </a:xfrm>
-          <a:prstGeom prst="roundRect">
-            <a:avLst>
-              <a:gd name="adj" fmla="val 7143"/>
-            </a:avLst>
-          </a:prstGeom>
-          <a:solidFill>
-            <a:srgbClr val="E4EEE9"/>
-          </a:solidFill>
-          <a:ln w="12700">
-            <a:solidFill>
-              <a:srgbClr val="E4EEE9"/>
-            </a:solidFill>
-            <a:prstDash val="solid"/>
-          </a:ln>
-        </p:spPr>
-      </p:sp>
-      <p:sp>
-        <p:nvSpPr>
-          <p:cNvPr id="57" name="Text 55"/>
-          <p:cNvSpPr txBox="1"/>
-          <p:nvPr/>
-        </p:nvSpPr>
-        <p:spPr>
-          <a:xfrm>
-            <a:off x="822960" y="4480560"/>
-            <a:ext cx="5029200" cy="329184"/>
-          </a:xfrm>
-          <a:prstGeom prst="rect">
-            <a:avLst/>
-          </a:prstGeom>
-          <a:noFill/>
-          <a:ln/>
-        </p:spPr>
-        <p:txBody>
-          <a:bodyPr wrap="square" lIns="0" tIns="0" rIns="0" bIns="0" rtlCol="0" anchor="ctr"/>
-          <a:lstStyle/>
-          <a:p>
-            <a:pPr indent="0" marL="0">
-              <a:buNone/>
-            </a:pPr>
-            <a:r>
-              <a:rPr lang="en-US" sz="1600" b="1" dirty="0">
-                <a:solidFill>
-                  <a:srgbClr val="2F5D50"/>
-                </a:solidFill>
-                <a:latin typeface="Cambria" pitchFamily="34" charset="0"/>
-                <a:ea typeface="Cambria" pitchFamily="34" charset="-122"/>
-                <a:cs typeface="Cambria" pitchFamily="34" charset="-120"/>
-              </a:rPr>
-              <a:t>Pixel 9 emulator · Android 17</a:t>
-            </a:r>
-            <a:endParaRPr lang="en-US" sz="1600" dirty="0"/>
-          </a:p>
-        </p:txBody>
-      </p:sp>
-      <p:sp>
-        <p:nvSpPr>
-          <p:cNvPr id="58" name="Text 56"/>
-          <p:cNvSpPr txBox="1"/>
-          <p:nvPr/>
-        </p:nvSpPr>
-        <p:spPr>
-          <a:xfrm>
-            <a:off x="822960" y="4846320"/>
-            <a:ext cx="4983480" cy="548640"/>
-          </a:xfrm>
-          <a:prstGeom prst="rect">
-            <a:avLst/>
-          </a:prstGeom>
-          <a:noFill/>
-          <a:ln/>
-        </p:spPr>
-        <p:txBody>
-          <a:bodyPr wrap="square" lIns="0" tIns="0" rIns="0" bIns="0" rtlCol="0" anchor="t"/>
-          <a:lstStyle/>
-          <a:p>
-            <a:pPr indent="0" marL="0">
-              <a:lnSpc>
-                <a:spcPts val="1800"/>
-              </a:lnSpc>
-              <a:buNone/>
-            </a:pPr>
-            <a:r>
-              <a:rPr lang="en-US" sz="1400" dirty="0">
-                <a:solidFill>
-                  <a:srgbClr val="6D6A64"/>
-                </a:solidFill>
-                <a:latin typeface="Calibri" pitchFamily="34" charset="0"/>
-                <a:ea typeface="Calibri" pitchFamily="34" charset="-122"/>
-                <a:cs typeface="Calibri" pitchFamily="34" charset="-120"/>
-              </a:rPr>
-              <a:t>all assets indexed — DATE_TAKEN matched the manifest to under a second</a:t>
-            </a:r>
-            <a:endParaRPr lang="en-US" sz="1400" dirty="0"/>
-          </a:p>
-        </p:txBody>
-      </p:sp>
-      <p:sp>
-        <p:nvSpPr>
-          <p:cNvPr id="59" name="Shape 57"/>
-          <p:cNvSpPr/>
-          <p:nvPr/>
-        </p:nvSpPr>
-        <p:spPr>
-          <a:xfrm>
-            <a:off x="6309360" y="4334256"/>
-            <a:ext cx="5486400" cy="1152144"/>
-          </a:xfrm>
-          <a:prstGeom prst="roundRect">
-            <a:avLst>
-              <a:gd name="adj" fmla="val 7143"/>
-            </a:avLst>
-          </a:prstGeom>
-          <a:solidFill>
-            <a:srgbClr val="E4EEE9"/>
-          </a:solidFill>
-          <a:ln w="12700">
-            <a:solidFill>
-              <a:srgbClr val="E4EEE9"/>
-            </a:solidFill>
-            <a:prstDash val="solid"/>
-          </a:ln>
-        </p:spPr>
-      </p:sp>
-      <p:sp>
-        <p:nvSpPr>
-          <p:cNvPr id="60" name="Text 58"/>
-          <p:cNvSpPr txBox="1"/>
-          <p:nvPr/>
-        </p:nvSpPr>
-        <p:spPr>
-          <a:xfrm>
-            <a:off x="6583680" y="4480560"/>
-            <a:ext cx="5029200" cy="329184"/>
-          </a:xfrm>
-          <a:prstGeom prst="rect">
-            <a:avLst/>
-          </a:prstGeom>
-          <a:noFill/>
-          <a:ln/>
-        </p:spPr>
-        <p:txBody>
-          <a:bodyPr wrap="square" lIns="0" tIns="0" rIns="0" bIns="0" rtlCol="0" anchor="ctr"/>
-          <a:lstStyle/>
-          <a:p>
-            <a:pPr indent="0" marL="0">
-              <a:buNone/>
-            </a:pPr>
-            <a:r>
-              <a:rPr lang="en-US" sz="1600" b="1" dirty="0">
-                <a:solidFill>
-                  <a:srgbClr val="2F5D50"/>
-                </a:solidFill>
-                <a:latin typeface="Cambria" pitchFamily="34" charset="0"/>
-                <a:ea typeface="Cambria" pitchFamily="34" charset="-122"/>
-                <a:cs typeface="Cambria" pitchFamily="34" charset="-120"/>
-              </a:rPr>
-              <a:t>iPhone 17 Pro simulator · iOS 26.5</a:t>
-            </a:r>
-            <a:endParaRPr lang="en-US" sz="1600" dirty="0"/>
-          </a:p>
-        </p:txBody>
-      </p:sp>
-      <p:sp>
-        <p:nvSpPr>
-          <p:cNvPr id="61" name="Text 59"/>
-          <p:cNvSpPr txBox="1"/>
-          <p:nvPr/>
-        </p:nvSpPr>
-        <p:spPr>
-          <a:xfrm>
-            <a:off x="6583680" y="4846320"/>
-            <a:ext cx="4983480" cy="548640"/>
-          </a:xfrm>
-          <a:prstGeom prst="rect">
-            <a:avLst/>
-          </a:prstGeom>
-          <a:noFill/>
-          <a:ln/>
-        </p:spPr>
-        <p:txBody>
-          <a:bodyPr wrap="square" lIns="0" tIns="0" rIns="0" bIns="0" rtlCol="0" anchor="t"/>
-          <a:lstStyle/>
-          <a:p>
-            <a:pPr indent="0" marL="0">
-              <a:lnSpc>
-                <a:spcPts val="1800"/>
-              </a:lnSpc>
-              <a:buNone/>
-            </a:pPr>
-            <a:r>
-              <a:rPr lang="en-US" sz="1400" dirty="0">
-                <a:solidFill>
-                  <a:srgbClr val="6D6A64"/>
-                </a:solidFill>
-                <a:latin typeface="Calibri" pitchFamily="34" charset="0"/>
-                <a:ea typeface="Calibri" pitchFamily="34" charset="-122"/>
-                <a:cs typeface="Calibri" pitchFamily="34" charset="-120"/>
-              </a:rPr>
-              <a:t>HEIC + HEVC — creationDate exact, 0.000 s delta</a:t>
-            </a:r>
-            <a:endParaRPr lang="en-US" sz="1400" dirty="0"/>
-          </a:p>
-        </p:txBody>
-      </p:sp>
-      <p:sp>
-        <p:nvSpPr>
-          <p:cNvPr id="62" name="Text 60"/>
-          <p:cNvSpPr txBox="1"/>
-          <p:nvPr/>
-        </p:nvSpPr>
-        <p:spPr>
-          <a:xfrm>
-            <a:off x="548640" y="5687568"/>
-            <a:ext cx="11064240" cy="384048"/>
-          </a:xfrm>
-          <a:prstGeom prst="rect">
-            <a:avLst/>
-          </a:prstGeom>
-          <a:noFill/>
-          <a:ln/>
-        </p:spPr>
-        <p:txBody>
-          <a:bodyPr wrap="square" lIns="0" tIns="0" rIns="0" bIns="0" rtlCol="0" anchor="ctr"/>
-          <a:lstStyle/>
-          <a:p>
-            <a:pPr indent="0" marL="0">
-              <a:buNone/>
-            </a:pPr>
-            <a:r>
-              <a:rPr lang="en-US" sz="1500" i="1" dirty="0">
-                <a:solidFill>
-                  <a:srgbClr val="9C4A32"/>
-                </a:solidFill>
-                <a:latin typeface="Cambria" pitchFamily="34" charset="0"/>
-                <a:ea typeface="Cambria" pitchFamily="34" charset="-122"/>
-                <a:cs typeface="Cambria" pitchFamily="34" charset="-120"/>
-              </a:rPr>
-              <a:t>Two iOS loader bugs were found by the first physical run that no simulator had surfaced.</a:t>
-            </a:r>
-            <a:endParaRPr lang="en-US" sz="1500" dirty="0"/>
           </a:p>
         </p:txBody>
       </p:sp>
@@ -9124,7 +8932,7 @@
                 <a:ea typeface="Calibri" pitchFamily="34" charset="-122"/>
                 <a:cs typeface="Calibri" pitchFamily="34" charset="-120"/>
               </a:rPr>
-              <a:t>NEXT STEPS</a:t>
+              <a:t>EVIDENCE</a:t>
             </a:r>
             <a:endParaRPr lang="en-US" sz="1400" dirty="0"/>
           </a:p>
@@ -9163,7 +8971,7 @@
                 <a:ea typeface="Cambria" pitchFamily="34" charset="-122"/>
                 <a:cs typeface="Cambria" pitchFamily="34" charset="-120"/>
               </a:rPr>
-              <a:t>What it needs before production</a:t>
+              <a:t>Proven on real hardware, not just emulators</a:t>
             </a:r>
             <a:endParaRPr lang="en-US" sz="3200" dirty="0"/>
           </a:p>
@@ -9177,172 +8985,12 @@
         </p:nvSpPr>
         <p:spPr>
           <a:xfrm>
-            <a:off x="548640" y="1444752"/>
-            <a:ext cx="5349240" cy="1901952"/>
+            <a:off x="548640" y="1426464"/>
+            <a:ext cx="5486400" cy="2724912"/>
           </a:xfrm>
           <a:prstGeom prst="roundRect">
             <a:avLst>
-              <a:gd name="adj" fmla="val 4327"/>
-            </a:avLst>
-          </a:prstGeom>
-          <a:solidFill>
-            <a:srgbClr val="F3E6E2"/>
-          </a:solidFill>
-          <a:ln w="12700">
-            <a:solidFill>
-              <a:srgbClr val="F3E6E2"/>
-            </a:solidFill>
-            <a:prstDash val="solid"/>
-          </a:ln>
-        </p:spPr>
-      </p:sp>
-      <p:sp>
-        <p:nvSpPr>
-          <p:cNvPr id="5" name="Text 3"/>
-          <p:cNvSpPr txBox="1"/>
-          <p:nvPr/>
-        </p:nvSpPr>
-        <p:spPr>
-          <a:xfrm>
-            <a:off x="822960" y="1591056"/>
-            <a:ext cx="4754880" cy="347472"/>
-          </a:xfrm>
-          <a:prstGeom prst="rect">
-            <a:avLst/>
-          </a:prstGeom>
-          <a:noFill/>
-          <a:ln/>
-        </p:spPr>
-        <p:txBody>
-          <a:bodyPr wrap="square" lIns="0" tIns="0" rIns="0" bIns="0" rtlCol="0" anchor="ctr"/>
-          <a:lstStyle/>
-          <a:p>
-            <a:pPr indent="0" marL="0">
-              <a:buNone/>
-            </a:pPr>
-            <a:r>
-              <a:rPr lang="en-US" sz="1700" b="1" dirty="0">
-                <a:solidFill>
-                  <a:srgbClr val="9C4A32"/>
-                </a:solidFill>
-                <a:latin typeface="Cambria" pitchFamily="34" charset="0"/>
-                <a:ea typeface="Cambria" pitchFamily="34" charset="-122"/>
-                <a:cs typeface="Cambria" pitchFamily="34" charset="-120"/>
-              </a:rPr>
-              <a:t>Security</a:t>
-            </a:r>
-            <a:endParaRPr lang="en-US" sz="1700" dirty="0"/>
-          </a:p>
-        </p:txBody>
-      </p:sp>
-      <p:sp>
-        <p:nvSpPr>
-          <p:cNvPr id="6" name="Text 4"/>
-          <p:cNvSpPr txBox="1"/>
-          <p:nvPr/>
-        </p:nvSpPr>
-        <p:spPr>
-          <a:xfrm>
-            <a:off x="822960" y="1993392"/>
-            <a:ext cx="4846320" cy="1234440"/>
-          </a:xfrm>
-          <a:prstGeom prst="rect">
-            <a:avLst/>
-          </a:prstGeom>
-          <a:noFill/>
-          <a:ln/>
-        </p:spPr>
-        <p:txBody>
-          <a:bodyPr wrap="square" lIns="0" tIns="0" rIns="0" bIns="0" rtlCol="0" anchor="t"/>
-          <a:lstStyle/>
-          <a:p>
-            <a:pPr marL="342900" indent="-342900">
-              <a:lnSpc>
-                <a:spcPts val="1800"/>
-              </a:lnSpc>
-              <a:spcAft>
-                <a:spcPts val="600"/>
-              </a:spcAft>
-              <a:buSzPct val="100000"/>
-              <a:buChar char="•"/>
-            </a:pPr>
-            <a:r>
-              <a:rPr lang="en-US" sz="1400" dirty="0">
-                <a:solidFill>
-                  <a:srgbClr val="1B1A18"/>
-                </a:solidFill>
-                <a:latin typeface="Calibri" pitchFamily="34" charset="0"/>
-                <a:ea typeface="Calibri" pitchFamily="34" charset="-122"/>
-                <a:cs typeface="Calibri" pitchFamily="34" charset="-120"/>
-              </a:rPr>
-              <a:t>The pairing code is a speed bump, not authentication</a:t>
-            </a:r>
-            <a:endParaRPr lang="en-US" sz="1400" dirty="0"/>
-          </a:p>
-          <a:p>
-            <a:pPr marL="342900" indent="-342900">
-              <a:lnSpc>
-                <a:spcPts val="1800"/>
-              </a:lnSpc>
-              <a:spcAft>
-                <a:spcPts val="600"/>
-              </a:spcAft>
-              <a:buSzPct val="100000"/>
-              <a:buChar char="•"/>
-            </a:pPr>
-            <a:r>
-              <a:rPr lang="en-US" sz="1400" dirty="0">
-                <a:solidFill>
-                  <a:srgbClr val="1B1A18"/>
-                </a:solidFill>
-                <a:latin typeface="Calibri" pitchFamily="34" charset="0"/>
-                <a:ea typeface="Calibri" pitchFamily="34" charset="-122"/>
-                <a:cs typeface="Calibri" pitchFamily="34" charset="-120"/>
-              </a:rPr>
-              <a:t>No TLS — plain HTTP on an assumed-trusted LAN</a:t>
-            </a:r>
-            <a:endParaRPr lang="en-US" sz="1400" dirty="0"/>
-          </a:p>
-          <a:p>
-            <a:pPr marL="342900" indent="-342900">
-              <a:lnSpc>
-                <a:spcPts val="1800"/>
-              </a:lnSpc>
-              <a:spcAft>
-                <a:spcPts val="600"/>
-              </a:spcAft>
-              <a:buSzPct val="100000"/>
-              <a:buChar char="•"/>
-            </a:pPr>
-            <a:r>
-              <a:rPr lang="en-US" sz="1400" dirty="0">
-                <a:solidFill>
-                  <a:srgbClr val="1B1A18"/>
-                </a:solidFill>
-                <a:latin typeface="Calibri" pitchFamily="34" charset="0"/>
-                <a:ea typeface="Calibri" pitchFamily="34" charset="-122"/>
-                <a:cs typeface="Calibri" pitchFamily="34" charset="-120"/>
-              </a:rPr>
-              <a:t>Anyone on the network can create a job</a:t>
-            </a:r>
-            <a:endParaRPr lang="en-US" sz="1400" dirty="0"/>
-          </a:p>
-        </p:txBody>
-      </p:sp>
-      <p:sp>
-        <p:nvSpPr>
-          <p:cNvPr id="7" name="Shape 5"/>
-          <p:cNvSpPr/>
-          <p:nvPr/>
-        </p:nvSpPr>
-        <p:spPr>
-          <a:xfrm>
-            <a:off x="6263640" y="1444752"/>
-            <a:ext cx="5349240" cy="1901952"/>
-          </a:xfrm>
-          <a:prstGeom prst="roundRect">
-            <a:avLst>
-              <a:gd name="adj" fmla="val 4327"/>
+              <a:gd name="adj" fmla="val 3020"/>
             </a:avLst>
           </a:prstGeom>
           <a:solidFill>
@@ -9358,14 +9006,579 @@
       </p:sp>
       <p:sp>
         <p:nvSpPr>
-          <p:cNvPr id="8" name="Text 6"/>
-          <p:cNvSpPr txBox="1"/>
-          <p:nvPr/>
-        </p:nvSpPr>
-        <p:spPr>
-          <a:xfrm>
-            <a:off x="6537960" y="1591056"/>
-            <a:ext cx="4754880" cy="347472"/>
+          <p:cNvPr id="5" name="Shape 3"/>
+          <p:cNvSpPr/>
+          <p:nvPr/>
+        </p:nvSpPr>
+        <p:spPr>
+          <a:xfrm>
+            <a:off x="896112" y="1700784"/>
+            <a:ext cx="1051560" cy="2155698"/>
+          </a:xfrm>
+          <a:prstGeom prst="roundRect">
+            <a:avLst>
+              <a:gd name="adj" fmla="val 9565"/>
+            </a:avLst>
+          </a:prstGeom>
+          <a:solidFill>
+            <a:srgbClr val="222E38"/>
+          </a:solidFill>
+          <a:ln w="12700">
+            <a:solidFill>
+              <a:srgbClr val="222E38"/>
+            </a:solidFill>
+            <a:prstDash val="solid"/>
+          </a:ln>
+        </p:spPr>
+      </p:sp>
+      <p:sp>
+        <p:nvSpPr>
+          <p:cNvPr id="6" name="Shape 4"/>
+          <p:cNvSpPr/>
+          <p:nvPr/>
+        </p:nvSpPr>
+        <p:spPr>
+          <a:xfrm>
+            <a:off x="959206" y="1763878"/>
+            <a:ext cx="925373" cy="2029511"/>
+          </a:xfrm>
+          <a:prstGeom prst="roundRect">
+            <a:avLst>
+              <a:gd name="adj" fmla="val 7905"/>
+            </a:avLst>
+          </a:prstGeom>
+          <a:solidFill>
+            <a:srgbClr val="F4F8F6"/>
+          </a:solidFill>
+          <a:ln w="12700">
+            <a:solidFill>
+              <a:srgbClr val="F4F8F6"/>
+            </a:solidFill>
+            <a:prstDash val="solid"/>
+          </a:ln>
+        </p:spPr>
+      </p:sp>
+      <p:sp>
+        <p:nvSpPr>
+          <p:cNvPr id="7" name="Shape 5"/>
+          <p:cNvSpPr/>
+          <p:nvPr/>
+        </p:nvSpPr>
+        <p:spPr>
+          <a:xfrm>
+            <a:off x="1385316" y="1814170"/>
+            <a:ext cx="73152" cy="73152"/>
+          </a:xfrm>
+          <a:prstGeom prst="ellipse">
+            <a:avLst/>
+          </a:prstGeom>
+          <a:solidFill>
+            <a:srgbClr val="222E38"/>
+          </a:solidFill>
+          <a:ln w="12700">
+            <a:solidFill>
+              <a:srgbClr val="222E38"/>
+            </a:solidFill>
+            <a:prstDash val="solid"/>
+          </a:ln>
+        </p:spPr>
+      </p:sp>
+      <p:sp>
+        <p:nvSpPr>
+          <p:cNvPr id="8" name="Shape 6"/>
+          <p:cNvSpPr/>
+          <p:nvPr/>
+        </p:nvSpPr>
+        <p:spPr>
+          <a:xfrm>
+            <a:off x="1023214" y="1965046"/>
+            <a:ext cx="244450" cy="244450"/>
+          </a:xfrm>
+          <a:prstGeom prst="roundRect">
+            <a:avLst>
+              <a:gd name="adj" fmla="val 7481"/>
+            </a:avLst>
+          </a:prstGeom>
+          <a:solidFill>
+            <a:srgbClr val="AACABD"/>
+          </a:solidFill>
+          <a:ln w="12700">
+            <a:solidFill>
+              <a:srgbClr val="AACABD"/>
+            </a:solidFill>
+            <a:prstDash val="solid"/>
+          </a:ln>
+        </p:spPr>
+      </p:sp>
+      <p:sp>
+        <p:nvSpPr>
+          <p:cNvPr id="9" name="Shape 7"/>
+          <p:cNvSpPr/>
+          <p:nvPr/>
+        </p:nvSpPr>
+        <p:spPr>
+          <a:xfrm>
+            <a:off x="1299667" y="1965046"/>
+            <a:ext cx="244450" cy="244450"/>
+          </a:xfrm>
+          <a:prstGeom prst="roundRect">
+            <a:avLst>
+              <a:gd name="adj" fmla="val 7481"/>
+            </a:avLst>
+          </a:prstGeom>
+          <a:solidFill>
+            <a:srgbClr val="8FB6A6"/>
+          </a:solidFill>
+          <a:ln w="12700">
+            <a:solidFill>
+              <a:srgbClr val="8FB6A6"/>
+            </a:solidFill>
+            <a:prstDash val="solid"/>
+          </a:ln>
+        </p:spPr>
+      </p:sp>
+      <p:sp>
+        <p:nvSpPr>
+          <p:cNvPr id="10" name="Shape 8"/>
+          <p:cNvSpPr/>
+          <p:nvPr/>
+        </p:nvSpPr>
+        <p:spPr>
+          <a:xfrm>
+            <a:off x="1576121" y="1965046"/>
+            <a:ext cx="244450" cy="244450"/>
+          </a:xfrm>
+          <a:prstGeom prst="roundRect">
+            <a:avLst>
+              <a:gd name="adj" fmla="val 7481"/>
+            </a:avLst>
+          </a:prstGeom>
+          <a:solidFill>
+            <a:srgbClr val="B4D0C4"/>
+          </a:solidFill>
+          <a:ln w="12700">
+            <a:solidFill>
+              <a:srgbClr val="B4D0C4"/>
+            </a:solidFill>
+            <a:prstDash val="solid"/>
+          </a:ln>
+        </p:spPr>
+      </p:sp>
+      <p:sp>
+        <p:nvSpPr>
+          <p:cNvPr id="11" name="Shape 9"/>
+          <p:cNvSpPr/>
+          <p:nvPr/>
+        </p:nvSpPr>
+        <p:spPr>
+          <a:xfrm>
+            <a:off x="1023214" y="2241499"/>
+            <a:ext cx="244450" cy="244450"/>
+          </a:xfrm>
+          <a:prstGeom prst="roundRect">
+            <a:avLst>
+              <a:gd name="adj" fmla="val 7481"/>
+            </a:avLst>
+          </a:prstGeom>
+          <a:solidFill>
+            <a:srgbClr val="7FAE9C"/>
+          </a:solidFill>
+          <a:ln w="12700">
+            <a:solidFill>
+              <a:srgbClr val="7FAE9C"/>
+            </a:solidFill>
+            <a:prstDash val="solid"/>
+          </a:ln>
+        </p:spPr>
+      </p:sp>
+      <p:sp>
+        <p:nvSpPr>
+          <p:cNvPr id="12" name="Shape 10"/>
+          <p:cNvSpPr/>
+          <p:nvPr/>
+        </p:nvSpPr>
+        <p:spPr>
+          <a:xfrm>
+            <a:off x="1299667" y="2241499"/>
+            <a:ext cx="244450" cy="244450"/>
+          </a:xfrm>
+          <a:prstGeom prst="roundRect">
+            <a:avLst>
+              <a:gd name="adj" fmla="val 7481"/>
+            </a:avLst>
+          </a:prstGeom>
+          <a:solidFill>
+            <a:srgbClr val="9FC3B3"/>
+          </a:solidFill>
+          <a:ln w="12700">
+            <a:solidFill>
+              <a:srgbClr val="9FC3B3"/>
+            </a:solidFill>
+            <a:prstDash val="solid"/>
+          </a:ln>
+        </p:spPr>
+      </p:sp>
+      <p:sp>
+        <p:nvSpPr>
+          <p:cNvPr id="13" name="Shape 11"/>
+          <p:cNvSpPr/>
+          <p:nvPr/>
+        </p:nvSpPr>
+        <p:spPr>
+          <a:xfrm>
+            <a:off x="1576121" y="2241499"/>
+            <a:ext cx="244450" cy="244450"/>
+          </a:xfrm>
+          <a:prstGeom prst="roundRect">
+            <a:avLst>
+              <a:gd name="adj" fmla="val 7481"/>
+            </a:avLst>
+          </a:prstGeom>
+          <a:solidFill>
+            <a:srgbClr val="A5C7B8"/>
+          </a:solidFill>
+          <a:ln w="12700">
+            <a:solidFill>
+              <a:srgbClr val="A5C7B8"/>
+            </a:solidFill>
+            <a:prstDash val="solid"/>
+          </a:ln>
+        </p:spPr>
+      </p:sp>
+      <p:sp>
+        <p:nvSpPr>
+          <p:cNvPr id="14" name="Shape 12"/>
+          <p:cNvSpPr/>
+          <p:nvPr/>
+        </p:nvSpPr>
+        <p:spPr>
+          <a:xfrm>
+            <a:off x="1023214" y="2517953"/>
+            <a:ext cx="244450" cy="244450"/>
+          </a:xfrm>
+          <a:prstGeom prst="roundRect">
+            <a:avLst>
+              <a:gd name="adj" fmla="val 7481"/>
+            </a:avLst>
+          </a:prstGeom>
+          <a:solidFill>
+            <a:srgbClr val="AACABD"/>
+          </a:solidFill>
+          <a:ln w="12700">
+            <a:solidFill>
+              <a:srgbClr val="AACABD"/>
+            </a:solidFill>
+            <a:prstDash val="solid"/>
+          </a:ln>
+        </p:spPr>
+      </p:sp>
+      <p:sp>
+        <p:nvSpPr>
+          <p:cNvPr id="15" name="Shape 13"/>
+          <p:cNvSpPr/>
+          <p:nvPr/>
+        </p:nvSpPr>
+        <p:spPr>
+          <a:xfrm>
+            <a:off x="1299667" y="2517953"/>
+            <a:ext cx="244450" cy="244450"/>
+          </a:xfrm>
+          <a:prstGeom prst="roundRect">
+            <a:avLst>
+              <a:gd name="adj" fmla="val 7481"/>
+            </a:avLst>
+          </a:prstGeom>
+          <a:solidFill>
+            <a:srgbClr val="8FB6A6"/>
+          </a:solidFill>
+          <a:ln w="12700">
+            <a:solidFill>
+              <a:srgbClr val="8FB6A6"/>
+            </a:solidFill>
+            <a:prstDash val="solid"/>
+          </a:ln>
+        </p:spPr>
+      </p:sp>
+      <p:sp>
+        <p:nvSpPr>
+          <p:cNvPr id="16" name="Shape 14"/>
+          <p:cNvSpPr/>
+          <p:nvPr/>
+        </p:nvSpPr>
+        <p:spPr>
+          <a:xfrm>
+            <a:off x="1576121" y="2517953"/>
+            <a:ext cx="244450" cy="244450"/>
+          </a:xfrm>
+          <a:prstGeom prst="roundRect">
+            <a:avLst>
+              <a:gd name="adj" fmla="val 7481"/>
+            </a:avLst>
+          </a:prstGeom>
+          <a:solidFill>
+            <a:srgbClr val="B4D0C4"/>
+          </a:solidFill>
+          <a:ln w="12700">
+            <a:solidFill>
+              <a:srgbClr val="B4D0C4"/>
+            </a:solidFill>
+            <a:prstDash val="solid"/>
+          </a:ln>
+        </p:spPr>
+      </p:sp>
+      <p:sp>
+        <p:nvSpPr>
+          <p:cNvPr id="17" name="Shape 15"/>
+          <p:cNvSpPr/>
+          <p:nvPr/>
+        </p:nvSpPr>
+        <p:spPr>
+          <a:xfrm>
+            <a:off x="1023214" y="2794406"/>
+            <a:ext cx="244450" cy="244450"/>
+          </a:xfrm>
+          <a:prstGeom prst="roundRect">
+            <a:avLst>
+              <a:gd name="adj" fmla="val 7481"/>
+            </a:avLst>
+          </a:prstGeom>
+          <a:solidFill>
+            <a:srgbClr val="7FAE9C"/>
+          </a:solidFill>
+          <a:ln w="12700">
+            <a:solidFill>
+              <a:srgbClr val="7FAE9C"/>
+            </a:solidFill>
+            <a:prstDash val="solid"/>
+          </a:ln>
+        </p:spPr>
+      </p:sp>
+      <p:sp>
+        <p:nvSpPr>
+          <p:cNvPr id="18" name="Shape 16"/>
+          <p:cNvSpPr/>
+          <p:nvPr/>
+        </p:nvSpPr>
+        <p:spPr>
+          <a:xfrm>
+            <a:off x="1299667" y="2794406"/>
+            <a:ext cx="244450" cy="244450"/>
+          </a:xfrm>
+          <a:prstGeom prst="roundRect">
+            <a:avLst>
+              <a:gd name="adj" fmla="val 7481"/>
+            </a:avLst>
+          </a:prstGeom>
+          <a:solidFill>
+            <a:srgbClr val="9FC3B3"/>
+          </a:solidFill>
+          <a:ln w="12700">
+            <a:solidFill>
+              <a:srgbClr val="9FC3B3"/>
+            </a:solidFill>
+            <a:prstDash val="solid"/>
+          </a:ln>
+        </p:spPr>
+      </p:sp>
+      <p:sp>
+        <p:nvSpPr>
+          <p:cNvPr id="19" name="Shape 17"/>
+          <p:cNvSpPr/>
+          <p:nvPr/>
+        </p:nvSpPr>
+        <p:spPr>
+          <a:xfrm>
+            <a:off x="1576121" y="2794406"/>
+            <a:ext cx="244450" cy="244450"/>
+          </a:xfrm>
+          <a:prstGeom prst="roundRect">
+            <a:avLst>
+              <a:gd name="adj" fmla="val 7481"/>
+            </a:avLst>
+          </a:prstGeom>
+          <a:solidFill>
+            <a:srgbClr val="A5C7B8"/>
+          </a:solidFill>
+          <a:ln w="12700">
+            <a:solidFill>
+              <a:srgbClr val="A5C7B8"/>
+            </a:solidFill>
+            <a:prstDash val="solid"/>
+          </a:ln>
+        </p:spPr>
+      </p:sp>
+      <p:sp>
+        <p:nvSpPr>
+          <p:cNvPr id="20" name="Shape 18"/>
+          <p:cNvSpPr/>
+          <p:nvPr/>
+        </p:nvSpPr>
+        <p:spPr>
+          <a:xfrm>
+            <a:off x="1023214" y="3070860"/>
+            <a:ext cx="244450" cy="244450"/>
+          </a:xfrm>
+          <a:prstGeom prst="roundRect">
+            <a:avLst>
+              <a:gd name="adj" fmla="val 7481"/>
+            </a:avLst>
+          </a:prstGeom>
+          <a:solidFill>
+            <a:srgbClr val="AACABD"/>
+          </a:solidFill>
+          <a:ln w="12700">
+            <a:solidFill>
+              <a:srgbClr val="AACABD"/>
+            </a:solidFill>
+            <a:prstDash val="solid"/>
+          </a:ln>
+        </p:spPr>
+      </p:sp>
+      <p:sp>
+        <p:nvSpPr>
+          <p:cNvPr id="21" name="Shape 19"/>
+          <p:cNvSpPr/>
+          <p:nvPr/>
+        </p:nvSpPr>
+        <p:spPr>
+          <a:xfrm>
+            <a:off x="1299667" y="3070860"/>
+            <a:ext cx="244450" cy="244450"/>
+          </a:xfrm>
+          <a:prstGeom prst="roundRect">
+            <a:avLst>
+              <a:gd name="adj" fmla="val 7481"/>
+            </a:avLst>
+          </a:prstGeom>
+          <a:solidFill>
+            <a:srgbClr val="8FB6A6"/>
+          </a:solidFill>
+          <a:ln w="12700">
+            <a:solidFill>
+              <a:srgbClr val="8FB6A6"/>
+            </a:solidFill>
+            <a:prstDash val="solid"/>
+          </a:ln>
+        </p:spPr>
+      </p:sp>
+      <p:sp>
+        <p:nvSpPr>
+          <p:cNvPr id="22" name="Shape 20"/>
+          <p:cNvSpPr/>
+          <p:nvPr/>
+        </p:nvSpPr>
+        <p:spPr>
+          <a:xfrm>
+            <a:off x="1576121" y="3070860"/>
+            <a:ext cx="244450" cy="244450"/>
+          </a:xfrm>
+          <a:prstGeom prst="roundRect">
+            <a:avLst>
+              <a:gd name="adj" fmla="val 7481"/>
+            </a:avLst>
+          </a:prstGeom>
+          <a:solidFill>
+            <a:srgbClr val="B4D0C4"/>
+          </a:solidFill>
+          <a:ln w="12700">
+            <a:solidFill>
+              <a:srgbClr val="B4D0C4"/>
+            </a:solidFill>
+            <a:prstDash val="solid"/>
+          </a:ln>
+        </p:spPr>
+      </p:sp>
+      <p:sp>
+        <p:nvSpPr>
+          <p:cNvPr id="23" name="Shape 21"/>
+          <p:cNvSpPr/>
+          <p:nvPr/>
+        </p:nvSpPr>
+        <p:spPr>
+          <a:xfrm>
+            <a:off x="1023214" y="3347314"/>
+            <a:ext cx="244450" cy="244450"/>
+          </a:xfrm>
+          <a:prstGeom prst="roundRect">
+            <a:avLst>
+              <a:gd name="adj" fmla="val 7481"/>
+            </a:avLst>
+          </a:prstGeom>
+          <a:solidFill>
+            <a:srgbClr val="7FAE9C"/>
+          </a:solidFill>
+          <a:ln w="12700">
+            <a:solidFill>
+              <a:srgbClr val="7FAE9C"/>
+            </a:solidFill>
+            <a:prstDash val="solid"/>
+          </a:ln>
+        </p:spPr>
+      </p:sp>
+      <p:sp>
+        <p:nvSpPr>
+          <p:cNvPr id="24" name="Shape 22"/>
+          <p:cNvSpPr/>
+          <p:nvPr/>
+        </p:nvSpPr>
+        <p:spPr>
+          <a:xfrm>
+            <a:off x="1299667" y="3347314"/>
+            <a:ext cx="244450" cy="244450"/>
+          </a:xfrm>
+          <a:prstGeom prst="roundRect">
+            <a:avLst>
+              <a:gd name="adj" fmla="val 7481"/>
+            </a:avLst>
+          </a:prstGeom>
+          <a:solidFill>
+            <a:srgbClr val="9FC3B3"/>
+          </a:solidFill>
+          <a:ln w="12700">
+            <a:solidFill>
+              <a:srgbClr val="9FC3B3"/>
+            </a:solidFill>
+            <a:prstDash val="solid"/>
+          </a:ln>
+        </p:spPr>
+      </p:sp>
+      <p:sp>
+        <p:nvSpPr>
+          <p:cNvPr id="25" name="Shape 23"/>
+          <p:cNvSpPr/>
+          <p:nvPr/>
+        </p:nvSpPr>
+        <p:spPr>
+          <a:xfrm>
+            <a:off x="1576121" y="3347314"/>
+            <a:ext cx="244450" cy="244450"/>
+          </a:xfrm>
+          <a:prstGeom prst="roundRect">
+            <a:avLst>
+              <a:gd name="adj" fmla="val 7481"/>
+            </a:avLst>
+          </a:prstGeom>
+          <a:solidFill>
+            <a:srgbClr val="A5C7B8"/>
+          </a:solidFill>
+          <a:ln w="12700">
+            <a:solidFill>
+              <a:srgbClr val="A5C7B8"/>
+            </a:solidFill>
+            <a:prstDash val="solid"/>
+          </a:ln>
+        </p:spPr>
+      </p:sp>
+      <p:sp>
+        <p:nvSpPr>
+          <p:cNvPr id="26" name="Text 24"/>
+          <p:cNvSpPr txBox="1"/>
+          <p:nvPr/>
+        </p:nvSpPr>
+        <p:spPr>
+          <a:xfrm>
+            <a:off x="2240280" y="1755648"/>
+            <a:ext cx="3566160" cy="384048"/>
           </a:xfrm>
           <a:prstGeom prst="rect">
             <a:avLst/>
@@ -9381,7 +9594,7 @@
               <a:buNone/>
             </a:pPr>
             <a:r>
-              <a:rPr lang="en-US" sz="1700" b="1" dirty="0">
+              <a:rPr lang="en-US" sz="2000" b="1" dirty="0">
                 <a:solidFill>
                   <a:srgbClr val="2F5D50"/>
                 </a:solidFill>
@@ -9389,22 +9602,100 @@
                 <a:ea typeface="Cambria" pitchFamily="34" charset="-122"/>
                 <a:cs typeface="Cambria" pitchFamily="34" charset="-120"/>
               </a:rPr>
-              <a:t>Operations</a:t>
-            </a:r>
-            <a:endParaRPr lang="en-US" sz="1700" dirty="0"/>
-          </a:p>
-        </p:txBody>
-      </p:sp>
-      <p:sp>
-        <p:nvSpPr>
-          <p:cNvPr id="9" name="Text 7"/>
-          <p:cNvSpPr txBox="1"/>
-          <p:nvPr/>
-        </p:nvSpPr>
-        <p:spPr>
-          <a:xfrm>
-            <a:off x="6537960" y="1993392"/>
-            <a:ext cx="4846320" cy="1234440"/>
+              <a:t>Galaxy S24</a:t>
+            </a:r>
+            <a:endParaRPr lang="en-US" sz="2000" dirty="0"/>
+          </a:p>
+        </p:txBody>
+      </p:sp>
+      <p:sp>
+        <p:nvSpPr>
+          <p:cNvPr id="27" name="Text 25"/>
+          <p:cNvSpPr txBox="1"/>
+          <p:nvPr/>
+        </p:nvSpPr>
+        <p:spPr>
+          <a:xfrm>
+            <a:off x="2240280" y="2139696"/>
+            <a:ext cx="3566160" cy="292608"/>
+          </a:xfrm>
+          <a:prstGeom prst="rect">
+            <a:avLst/>
+          </a:prstGeom>
+          <a:noFill/>
+          <a:ln/>
+        </p:spPr>
+        <p:txBody>
+          <a:bodyPr wrap="square" lIns="0" tIns="0" rIns="0" bIns="0" rtlCol="0" anchor="ctr"/>
+          <a:lstStyle/>
+          <a:p>
+            <a:pPr indent="0" marL="0">
+              <a:buNone/>
+            </a:pPr>
+            <a:r>
+              <a:rPr lang="en-US" sz="1400" dirty="0">
+                <a:solidFill>
+                  <a:srgbClr val="6D6A64"/>
+                </a:solidFill>
+                <a:latin typeface="Calibri" pitchFamily="34" charset="0"/>
+                <a:ea typeface="Calibri" pitchFamily="34" charset="-122"/>
+                <a:cs typeface="Calibri" pitchFamily="34" charset="-120"/>
+              </a:rPr>
+              <a:t>Android 16</a:t>
+            </a:r>
+            <a:endParaRPr lang="en-US" sz="1400" dirty="0"/>
+          </a:p>
+        </p:txBody>
+      </p:sp>
+      <p:sp>
+        <p:nvSpPr>
+          <p:cNvPr id="28" name="Text 26"/>
+          <p:cNvSpPr txBox="1"/>
+          <p:nvPr/>
+        </p:nvSpPr>
+        <p:spPr>
+          <a:xfrm>
+            <a:off x="2240280" y="2523744"/>
+            <a:ext cx="3566160" cy="347472"/>
+          </a:xfrm>
+          <a:prstGeom prst="rect">
+            <a:avLst/>
+          </a:prstGeom>
+          <a:noFill/>
+          <a:ln/>
+        </p:spPr>
+        <p:txBody>
+          <a:bodyPr wrap="square" lIns="0" tIns="0" rIns="0" bIns="0" rtlCol="0" anchor="ctr"/>
+          <a:lstStyle/>
+          <a:p>
+            <a:pPr indent="0" marL="0">
+              <a:buNone/>
+            </a:pPr>
+            <a:r>
+              <a:rPr lang="en-US" sz="1600" b="1" dirty="0">
+                <a:solidFill>
+                  <a:srgbClr val="1B1A18"/>
+                </a:solidFill>
+                <a:latin typeface="Calibri" pitchFamily="34" charset="0"/>
+                <a:ea typeface="Calibri" pitchFamily="34" charset="-122"/>
+                <a:cs typeface="Calibri" pitchFamily="34" charset="-120"/>
+              </a:rPr>
+              <a:t>3,466 assets · 10 GB</a:t>
+            </a:r>
+            <a:endParaRPr lang="en-US" sz="1600" dirty="0"/>
+          </a:p>
+        </p:txBody>
+      </p:sp>
+      <p:sp>
+        <p:nvSpPr>
+          <p:cNvPr id="29" name="Text 27"/>
+          <p:cNvSpPr txBox="1"/>
+          <p:nvPr/>
+        </p:nvSpPr>
+        <p:spPr>
+          <a:xfrm>
+            <a:off x="2240280" y="2926080"/>
+            <a:ext cx="3566160" cy="914400"/>
           </a:xfrm>
           <a:prstGeom prst="rect">
             <a:avLst/>
@@ -9416,93 +9707,41 @@
           <a:bodyPr wrap="square" lIns="0" tIns="0" rIns="0" bIns="0" rtlCol="0" anchor="t"/>
           <a:lstStyle/>
           <a:p>
-            <a:pPr marL="342900" indent="-342900">
+            <a:pPr indent="0" marL="0">
               <a:lnSpc>
                 <a:spcPts val="1800"/>
               </a:lnSpc>
-              <a:spcAft>
-                <a:spcPts val="600"/>
-              </a:spcAft>
-              <a:buSzPct val="100000"/>
-              <a:buChar char="•"/>
+              <a:buNone/>
             </a:pPr>
             <a:r>
               <a:rPr lang="en-US" sz="1400" dirty="0">
                 <a:solidFill>
-                  <a:srgbClr val="1B1A18"/>
+                  <a:srgbClr val="6D6A64"/>
                 </a:solidFill>
                 <a:latin typeface="Calibri" pitchFamily="34" charset="0"/>
                 <a:ea typeface="Calibri" pitchFamily="34" charset="-122"/>
                 <a:cs typeface="Calibri" pitchFamily="34" charset="-120"/>
               </a:rPr>
-              <a:t>No job queue — two large builds compete for cores</a:t>
+              <a:t>15 min unplugged, screen off — the foreground service was never suspended</a:t>
             </a:r>
             <a:endParaRPr lang="en-US" sz="1400" dirty="0"/>
           </a:p>
-          <a:p>
-            <a:pPr marL="342900" indent="-342900">
-              <a:lnSpc>
-                <a:spcPts val="1800"/>
-              </a:lnSpc>
-              <a:spcAft>
-                <a:spcPts val="600"/>
-              </a:spcAft>
-              <a:buSzPct val="100000"/>
-              <a:buChar char="•"/>
-            </a:pPr>
-            <a:r>
-              <a:rPr lang="en-US" sz="1400" dirty="0">
-                <a:solidFill>
-                  <a:srgbClr val="1B1A18"/>
-                </a:solidFill>
-                <a:latin typeface="Calibri" pitchFamily="34" charset="0"/>
-                <a:ea typeface="Calibri" pitchFamily="34" charset="-122"/>
-                <a:cs typeface="Calibri" pitchFamily="34" charset="-120"/>
-              </a:rPr>
-              <a:t>Packs are pruned by hand — no expiry or disk watermark</a:t>
-            </a:r>
-            <a:endParaRPr lang="en-US" sz="1400" dirty="0"/>
-          </a:p>
-          <a:p>
-            <a:pPr marL="342900" indent="-342900">
-              <a:lnSpc>
-                <a:spcPts val="1800"/>
-              </a:lnSpc>
-              <a:spcAft>
-                <a:spcPts val="600"/>
-              </a:spcAft>
-              <a:buSzPct val="100000"/>
-              <a:buChar char="•"/>
-            </a:pPr>
-            <a:r>
-              <a:rPr lang="en-US" sz="1400" dirty="0">
-                <a:solidFill>
-                  <a:srgbClr val="1B1A18"/>
-                </a:solidFill>
-                <a:latin typeface="Calibri" pitchFamily="34" charset="0"/>
-                <a:ea typeface="Calibri" pitchFamily="34" charset="-122"/>
-                <a:cs typeface="Calibri" pitchFamily="34" charset="-120"/>
-              </a:rPr>
-              <a:t>No Docker image yet, so no one-command lab box</a:t>
-            </a:r>
-            <a:endParaRPr lang="en-US" sz="1400" dirty="0"/>
-          </a:p>
-        </p:txBody>
-      </p:sp>
-      <p:sp>
-        <p:nvSpPr>
-          <p:cNvPr id="10" name="Shape 8"/>
+        </p:txBody>
+      </p:sp>
+      <p:sp>
+        <p:nvSpPr>
+          <p:cNvPr id="30" name="Shape 28"/>
           <p:cNvSpPr/>
           <p:nvPr/>
         </p:nvSpPr>
         <p:spPr>
           <a:xfrm>
-            <a:off x="548640" y="3529584"/>
-            <a:ext cx="5349240" cy="1901952"/>
+            <a:off x="6309360" y="1426464"/>
+            <a:ext cx="5486400" cy="2724912"/>
           </a:xfrm>
           <a:prstGeom prst="roundRect">
             <a:avLst>
-              <a:gd name="adj" fmla="val 4327"/>
+              <a:gd name="adj" fmla="val 3020"/>
             </a:avLst>
           </a:prstGeom>
           <a:solidFill>
@@ -9518,14 +9757,581 @@
       </p:sp>
       <p:sp>
         <p:nvSpPr>
-          <p:cNvPr id="11" name="Text 9"/>
-          <p:cNvSpPr txBox="1"/>
-          <p:nvPr/>
-        </p:nvSpPr>
-        <p:spPr>
-          <a:xfrm>
-            <a:off x="822960" y="3675888"/>
-            <a:ext cx="4754880" cy="347472"/>
+          <p:cNvPr id="31" name="Shape 29"/>
+          <p:cNvSpPr/>
+          <p:nvPr/>
+        </p:nvSpPr>
+        <p:spPr>
+          <a:xfrm>
+            <a:off x="6656832" y="1700784"/>
+            <a:ext cx="1051560" cy="2155698"/>
+          </a:xfrm>
+          <a:prstGeom prst="roundRect">
+            <a:avLst>
+              <a:gd name="adj" fmla="val 13043"/>
+            </a:avLst>
+          </a:prstGeom>
+          <a:solidFill>
+            <a:srgbClr val="34343A"/>
+          </a:solidFill>
+          <a:ln w="12700">
+            <a:solidFill>
+              <a:srgbClr val="34343A"/>
+            </a:solidFill>
+            <a:prstDash val="solid"/>
+          </a:ln>
+        </p:spPr>
+      </p:sp>
+      <p:sp>
+        <p:nvSpPr>
+          <p:cNvPr id="32" name="Shape 30"/>
+          <p:cNvSpPr/>
+          <p:nvPr/>
+        </p:nvSpPr>
+        <p:spPr>
+          <a:xfrm>
+            <a:off x="6719926" y="1763878"/>
+            <a:ext cx="925373" cy="2029511"/>
+          </a:xfrm>
+          <a:prstGeom prst="roundRect">
+            <a:avLst>
+              <a:gd name="adj" fmla="val 11858"/>
+            </a:avLst>
+          </a:prstGeom>
+          <a:solidFill>
+            <a:srgbClr val="F4F8F6"/>
+          </a:solidFill>
+          <a:ln w="12700">
+            <a:solidFill>
+              <a:srgbClr val="F4F8F6"/>
+            </a:solidFill>
+            <a:prstDash val="solid"/>
+          </a:ln>
+        </p:spPr>
+      </p:sp>
+      <p:sp>
+        <p:nvSpPr>
+          <p:cNvPr id="33" name="Shape 31"/>
+          <p:cNvSpPr/>
+          <p:nvPr/>
+        </p:nvSpPr>
+        <p:spPr>
+          <a:xfrm>
+            <a:off x="7063740" y="1809598"/>
+            <a:ext cx="237744" cy="77724"/>
+          </a:xfrm>
+          <a:prstGeom prst="roundRect">
+            <a:avLst>
+              <a:gd name="adj" fmla="val 49412"/>
+            </a:avLst>
+          </a:prstGeom>
+          <a:solidFill>
+            <a:srgbClr val="34343A"/>
+          </a:solidFill>
+          <a:ln w="12700">
+            <a:solidFill>
+              <a:srgbClr val="34343A"/>
+            </a:solidFill>
+            <a:prstDash val="solid"/>
+          </a:ln>
+        </p:spPr>
+      </p:sp>
+      <p:sp>
+        <p:nvSpPr>
+          <p:cNvPr id="34" name="Shape 32"/>
+          <p:cNvSpPr/>
+          <p:nvPr/>
+        </p:nvSpPr>
+        <p:spPr>
+          <a:xfrm>
+            <a:off x="6783934" y="1965046"/>
+            <a:ext cx="244450" cy="244450"/>
+          </a:xfrm>
+          <a:prstGeom prst="roundRect">
+            <a:avLst>
+              <a:gd name="adj" fmla="val 7481"/>
+            </a:avLst>
+          </a:prstGeom>
+          <a:solidFill>
+            <a:srgbClr val="AACABD"/>
+          </a:solidFill>
+          <a:ln w="12700">
+            <a:solidFill>
+              <a:srgbClr val="AACABD"/>
+            </a:solidFill>
+            <a:prstDash val="solid"/>
+          </a:ln>
+        </p:spPr>
+      </p:sp>
+      <p:sp>
+        <p:nvSpPr>
+          <p:cNvPr id="35" name="Shape 33"/>
+          <p:cNvSpPr/>
+          <p:nvPr/>
+        </p:nvSpPr>
+        <p:spPr>
+          <a:xfrm>
+            <a:off x="7060387" y="1965046"/>
+            <a:ext cx="244450" cy="244450"/>
+          </a:xfrm>
+          <a:prstGeom prst="roundRect">
+            <a:avLst>
+              <a:gd name="adj" fmla="val 7481"/>
+            </a:avLst>
+          </a:prstGeom>
+          <a:solidFill>
+            <a:srgbClr val="8FB6A6"/>
+          </a:solidFill>
+          <a:ln w="12700">
+            <a:solidFill>
+              <a:srgbClr val="8FB6A6"/>
+            </a:solidFill>
+            <a:prstDash val="solid"/>
+          </a:ln>
+        </p:spPr>
+      </p:sp>
+      <p:sp>
+        <p:nvSpPr>
+          <p:cNvPr id="36" name="Shape 34"/>
+          <p:cNvSpPr/>
+          <p:nvPr/>
+        </p:nvSpPr>
+        <p:spPr>
+          <a:xfrm>
+            <a:off x="7336841" y="1965046"/>
+            <a:ext cx="244450" cy="244450"/>
+          </a:xfrm>
+          <a:prstGeom prst="roundRect">
+            <a:avLst>
+              <a:gd name="adj" fmla="val 7481"/>
+            </a:avLst>
+          </a:prstGeom>
+          <a:solidFill>
+            <a:srgbClr val="B4D0C4"/>
+          </a:solidFill>
+          <a:ln w="12700">
+            <a:solidFill>
+              <a:srgbClr val="B4D0C4"/>
+            </a:solidFill>
+            <a:prstDash val="solid"/>
+          </a:ln>
+        </p:spPr>
+      </p:sp>
+      <p:sp>
+        <p:nvSpPr>
+          <p:cNvPr id="37" name="Shape 35"/>
+          <p:cNvSpPr/>
+          <p:nvPr/>
+        </p:nvSpPr>
+        <p:spPr>
+          <a:xfrm>
+            <a:off x="6783934" y="2241499"/>
+            <a:ext cx="244450" cy="244450"/>
+          </a:xfrm>
+          <a:prstGeom prst="roundRect">
+            <a:avLst>
+              <a:gd name="adj" fmla="val 7481"/>
+            </a:avLst>
+          </a:prstGeom>
+          <a:solidFill>
+            <a:srgbClr val="7FAE9C"/>
+          </a:solidFill>
+          <a:ln w="12700">
+            <a:solidFill>
+              <a:srgbClr val="7FAE9C"/>
+            </a:solidFill>
+            <a:prstDash val="solid"/>
+          </a:ln>
+        </p:spPr>
+      </p:sp>
+      <p:sp>
+        <p:nvSpPr>
+          <p:cNvPr id="38" name="Shape 36"/>
+          <p:cNvSpPr/>
+          <p:nvPr/>
+        </p:nvSpPr>
+        <p:spPr>
+          <a:xfrm>
+            <a:off x="7060387" y="2241499"/>
+            <a:ext cx="244450" cy="244450"/>
+          </a:xfrm>
+          <a:prstGeom prst="roundRect">
+            <a:avLst>
+              <a:gd name="adj" fmla="val 7481"/>
+            </a:avLst>
+          </a:prstGeom>
+          <a:solidFill>
+            <a:srgbClr val="9FC3B3"/>
+          </a:solidFill>
+          <a:ln w="12700">
+            <a:solidFill>
+              <a:srgbClr val="9FC3B3"/>
+            </a:solidFill>
+            <a:prstDash val="solid"/>
+          </a:ln>
+        </p:spPr>
+      </p:sp>
+      <p:sp>
+        <p:nvSpPr>
+          <p:cNvPr id="39" name="Shape 37"/>
+          <p:cNvSpPr/>
+          <p:nvPr/>
+        </p:nvSpPr>
+        <p:spPr>
+          <a:xfrm>
+            <a:off x="7336841" y="2241499"/>
+            <a:ext cx="244450" cy="244450"/>
+          </a:xfrm>
+          <a:prstGeom prst="roundRect">
+            <a:avLst>
+              <a:gd name="adj" fmla="val 7481"/>
+            </a:avLst>
+          </a:prstGeom>
+          <a:solidFill>
+            <a:srgbClr val="A5C7B8"/>
+          </a:solidFill>
+          <a:ln w="12700">
+            <a:solidFill>
+              <a:srgbClr val="A5C7B8"/>
+            </a:solidFill>
+            <a:prstDash val="solid"/>
+          </a:ln>
+        </p:spPr>
+      </p:sp>
+      <p:sp>
+        <p:nvSpPr>
+          <p:cNvPr id="40" name="Shape 38"/>
+          <p:cNvSpPr/>
+          <p:nvPr/>
+        </p:nvSpPr>
+        <p:spPr>
+          <a:xfrm>
+            <a:off x="6783934" y="2517953"/>
+            <a:ext cx="244450" cy="244450"/>
+          </a:xfrm>
+          <a:prstGeom prst="roundRect">
+            <a:avLst>
+              <a:gd name="adj" fmla="val 7481"/>
+            </a:avLst>
+          </a:prstGeom>
+          <a:solidFill>
+            <a:srgbClr val="AACABD"/>
+          </a:solidFill>
+          <a:ln w="12700">
+            <a:solidFill>
+              <a:srgbClr val="AACABD"/>
+            </a:solidFill>
+            <a:prstDash val="solid"/>
+          </a:ln>
+        </p:spPr>
+      </p:sp>
+      <p:sp>
+        <p:nvSpPr>
+          <p:cNvPr id="41" name="Shape 39"/>
+          <p:cNvSpPr/>
+          <p:nvPr/>
+        </p:nvSpPr>
+        <p:spPr>
+          <a:xfrm>
+            <a:off x="7060387" y="2517953"/>
+            <a:ext cx="244450" cy="244450"/>
+          </a:xfrm>
+          <a:prstGeom prst="roundRect">
+            <a:avLst>
+              <a:gd name="adj" fmla="val 7481"/>
+            </a:avLst>
+          </a:prstGeom>
+          <a:solidFill>
+            <a:srgbClr val="8FB6A6"/>
+          </a:solidFill>
+          <a:ln w="12700">
+            <a:solidFill>
+              <a:srgbClr val="8FB6A6"/>
+            </a:solidFill>
+            <a:prstDash val="solid"/>
+          </a:ln>
+        </p:spPr>
+      </p:sp>
+      <p:sp>
+        <p:nvSpPr>
+          <p:cNvPr id="42" name="Shape 40"/>
+          <p:cNvSpPr/>
+          <p:nvPr/>
+        </p:nvSpPr>
+        <p:spPr>
+          <a:xfrm>
+            <a:off x="7336841" y="2517953"/>
+            <a:ext cx="244450" cy="244450"/>
+          </a:xfrm>
+          <a:prstGeom prst="roundRect">
+            <a:avLst>
+              <a:gd name="adj" fmla="val 7481"/>
+            </a:avLst>
+          </a:prstGeom>
+          <a:solidFill>
+            <a:srgbClr val="B4D0C4"/>
+          </a:solidFill>
+          <a:ln w="12700">
+            <a:solidFill>
+              <a:srgbClr val="B4D0C4"/>
+            </a:solidFill>
+            <a:prstDash val="solid"/>
+          </a:ln>
+        </p:spPr>
+      </p:sp>
+      <p:sp>
+        <p:nvSpPr>
+          <p:cNvPr id="43" name="Shape 41"/>
+          <p:cNvSpPr/>
+          <p:nvPr/>
+        </p:nvSpPr>
+        <p:spPr>
+          <a:xfrm>
+            <a:off x="6783934" y="2794406"/>
+            <a:ext cx="244450" cy="244450"/>
+          </a:xfrm>
+          <a:prstGeom prst="roundRect">
+            <a:avLst>
+              <a:gd name="adj" fmla="val 7481"/>
+            </a:avLst>
+          </a:prstGeom>
+          <a:solidFill>
+            <a:srgbClr val="7FAE9C"/>
+          </a:solidFill>
+          <a:ln w="12700">
+            <a:solidFill>
+              <a:srgbClr val="7FAE9C"/>
+            </a:solidFill>
+            <a:prstDash val="solid"/>
+          </a:ln>
+        </p:spPr>
+      </p:sp>
+      <p:sp>
+        <p:nvSpPr>
+          <p:cNvPr id="44" name="Shape 42"/>
+          <p:cNvSpPr/>
+          <p:nvPr/>
+        </p:nvSpPr>
+        <p:spPr>
+          <a:xfrm>
+            <a:off x="7060387" y="2794406"/>
+            <a:ext cx="244450" cy="244450"/>
+          </a:xfrm>
+          <a:prstGeom prst="roundRect">
+            <a:avLst>
+              <a:gd name="adj" fmla="val 7481"/>
+            </a:avLst>
+          </a:prstGeom>
+          <a:solidFill>
+            <a:srgbClr val="9FC3B3"/>
+          </a:solidFill>
+          <a:ln w="12700">
+            <a:solidFill>
+              <a:srgbClr val="9FC3B3"/>
+            </a:solidFill>
+            <a:prstDash val="solid"/>
+          </a:ln>
+        </p:spPr>
+      </p:sp>
+      <p:sp>
+        <p:nvSpPr>
+          <p:cNvPr id="45" name="Shape 43"/>
+          <p:cNvSpPr/>
+          <p:nvPr/>
+        </p:nvSpPr>
+        <p:spPr>
+          <a:xfrm>
+            <a:off x="7336841" y="2794406"/>
+            <a:ext cx="244450" cy="244450"/>
+          </a:xfrm>
+          <a:prstGeom prst="roundRect">
+            <a:avLst>
+              <a:gd name="adj" fmla="val 7481"/>
+            </a:avLst>
+          </a:prstGeom>
+          <a:solidFill>
+            <a:srgbClr val="A5C7B8"/>
+          </a:solidFill>
+          <a:ln w="12700">
+            <a:solidFill>
+              <a:srgbClr val="A5C7B8"/>
+            </a:solidFill>
+            <a:prstDash val="solid"/>
+          </a:ln>
+        </p:spPr>
+      </p:sp>
+      <p:sp>
+        <p:nvSpPr>
+          <p:cNvPr id="46" name="Shape 44"/>
+          <p:cNvSpPr/>
+          <p:nvPr/>
+        </p:nvSpPr>
+        <p:spPr>
+          <a:xfrm>
+            <a:off x="6783934" y="3070860"/>
+            <a:ext cx="244450" cy="244450"/>
+          </a:xfrm>
+          <a:prstGeom prst="roundRect">
+            <a:avLst>
+              <a:gd name="adj" fmla="val 7481"/>
+            </a:avLst>
+          </a:prstGeom>
+          <a:solidFill>
+            <a:srgbClr val="AACABD"/>
+          </a:solidFill>
+          <a:ln w="12700">
+            <a:solidFill>
+              <a:srgbClr val="AACABD"/>
+            </a:solidFill>
+            <a:prstDash val="solid"/>
+          </a:ln>
+        </p:spPr>
+      </p:sp>
+      <p:sp>
+        <p:nvSpPr>
+          <p:cNvPr id="47" name="Shape 45"/>
+          <p:cNvSpPr/>
+          <p:nvPr/>
+        </p:nvSpPr>
+        <p:spPr>
+          <a:xfrm>
+            <a:off x="7060387" y="3070860"/>
+            <a:ext cx="244450" cy="244450"/>
+          </a:xfrm>
+          <a:prstGeom prst="roundRect">
+            <a:avLst>
+              <a:gd name="adj" fmla="val 7481"/>
+            </a:avLst>
+          </a:prstGeom>
+          <a:solidFill>
+            <a:srgbClr val="8FB6A6"/>
+          </a:solidFill>
+          <a:ln w="12700">
+            <a:solidFill>
+              <a:srgbClr val="8FB6A6"/>
+            </a:solidFill>
+            <a:prstDash val="solid"/>
+          </a:ln>
+        </p:spPr>
+      </p:sp>
+      <p:sp>
+        <p:nvSpPr>
+          <p:cNvPr id="48" name="Shape 46"/>
+          <p:cNvSpPr/>
+          <p:nvPr/>
+        </p:nvSpPr>
+        <p:spPr>
+          <a:xfrm>
+            <a:off x="7336841" y="3070860"/>
+            <a:ext cx="244450" cy="244450"/>
+          </a:xfrm>
+          <a:prstGeom prst="roundRect">
+            <a:avLst>
+              <a:gd name="adj" fmla="val 7481"/>
+            </a:avLst>
+          </a:prstGeom>
+          <a:solidFill>
+            <a:srgbClr val="B4D0C4"/>
+          </a:solidFill>
+          <a:ln w="12700">
+            <a:solidFill>
+              <a:srgbClr val="B4D0C4"/>
+            </a:solidFill>
+            <a:prstDash val="solid"/>
+          </a:ln>
+        </p:spPr>
+      </p:sp>
+      <p:sp>
+        <p:nvSpPr>
+          <p:cNvPr id="49" name="Shape 47"/>
+          <p:cNvSpPr/>
+          <p:nvPr/>
+        </p:nvSpPr>
+        <p:spPr>
+          <a:xfrm>
+            <a:off x="6783934" y="3347314"/>
+            <a:ext cx="244450" cy="244450"/>
+          </a:xfrm>
+          <a:prstGeom prst="roundRect">
+            <a:avLst>
+              <a:gd name="adj" fmla="val 7481"/>
+            </a:avLst>
+          </a:prstGeom>
+          <a:solidFill>
+            <a:srgbClr val="7FAE9C"/>
+          </a:solidFill>
+          <a:ln w="12700">
+            <a:solidFill>
+              <a:srgbClr val="7FAE9C"/>
+            </a:solidFill>
+            <a:prstDash val="solid"/>
+          </a:ln>
+        </p:spPr>
+      </p:sp>
+      <p:sp>
+        <p:nvSpPr>
+          <p:cNvPr id="50" name="Shape 48"/>
+          <p:cNvSpPr/>
+          <p:nvPr/>
+        </p:nvSpPr>
+        <p:spPr>
+          <a:xfrm>
+            <a:off x="7060387" y="3347314"/>
+            <a:ext cx="244450" cy="244450"/>
+          </a:xfrm>
+          <a:prstGeom prst="roundRect">
+            <a:avLst>
+              <a:gd name="adj" fmla="val 7481"/>
+            </a:avLst>
+          </a:prstGeom>
+          <a:solidFill>
+            <a:srgbClr val="9FC3B3"/>
+          </a:solidFill>
+          <a:ln w="12700">
+            <a:solidFill>
+              <a:srgbClr val="9FC3B3"/>
+            </a:solidFill>
+            <a:prstDash val="solid"/>
+          </a:ln>
+        </p:spPr>
+      </p:sp>
+      <p:sp>
+        <p:nvSpPr>
+          <p:cNvPr id="51" name="Shape 49"/>
+          <p:cNvSpPr/>
+          <p:nvPr/>
+        </p:nvSpPr>
+        <p:spPr>
+          <a:xfrm>
+            <a:off x="7336841" y="3347314"/>
+            <a:ext cx="244450" cy="244450"/>
+          </a:xfrm>
+          <a:prstGeom prst="roundRect">
+            <a:avLst>
+              <a:gd name="adj" fmla="val 7481"/>
+            </a:avLst>
+          </a:prstGeom>
+          <a:solidFill>
+            <a:srgbClr val="A5C7B8"/>
+          </a:solidFill>
+          <a:ln w="12700">
+            <a:solidFill>
+              <a:srgbClr val="A5C7B8"/>
+            </a:solidFill>
+            <a:prstDash val="solid"/>
+          </a:ln>
+        </p:spPr>
+      </p:sp>
+      <p:sp>
+        <p:nvSpPr>
+          <p:cNvPr id="52" name="Text 50"/>
+          <p:cNvSpPr txBox="1"/>
+          <p:nvPr/>
+        </p:nvSpPr>
+        <p:spPr>
+          <a:xfrm>
+            <a:off x="8001000" y="1755648"/>
+            <a:ext cx="3566160" cy="384048"/>
           </a:xfrm>
           <a:prstGeom prst="rect">
             <a:avLst/>
@@ -9541,7 +10347,7 @@
               <a:buNone/>
             </a:pPr>
             <a:r>
-              <a:rPr lang="en-US" sz="1700" b="1" dirty="0">
+              <a:rPr lang="en-US" sz="2000" b="1" dirty="0">
                 <a:solidFill>
                   <a:srgbClr val="2F5D50"/>
                 </a:solidFill>
@@ -9549,22 +10355,100 @@
                 <a:ea typeface="Cambria" pitchFamily="34" charset="-122"/>
                 <a:cs typeface="Cambria" pitchFamily="34" charset="-120"/>
               </a:rPr>
-              <a:t>Coverage</a:t>
-            </a:r>
-            <a:endParaRPr lang="en-US" sz="1700" dirty="0"/>
-          </a:p>
-        </p:txBody>
-      </p:sp>
-      <p:sp>
-        <p:nvSpPr>
-          <p:cNvPr id="12" name="Text 10"/>
-          <p:cNvSpPr txBox="1"/>
-          <p:nvPr/>
-        </p:nvSpPr>
-        <p:spPr>
-          <a:xfrm>
-            <a:off x="822960" y="4078224"/>
-            <a:ext cx="4846320" cy="1234440"/>
+              <a:t>iPhone 15 Pro</a:t>
+            </a:r>
+            <a:endParaRPr lang="en-US" sz="2000" dirty="0"/>
+          </a:p>
+        </p:txBody>
+      </p:sp>
+      <p:sp>
+        <p:nvSpPr>
+          <p:cNvPr id="53" name="Text 51"/>
+          <p:cNvSpPr txBox="1"/>
+          <p:nvPr/>
+        </p:nvSpPr>
+        <p:spPr>
+          <a:xfrm>
+            <a:off x="8001000" y="2139696"/>
+            <a:ext cx="3566160" cy="292608"/>
+          </a:xfrm>
+          <a:prstGeom prst="rect">
+            <a:avLst/>
+          </a:prstGeom>
+          <a:noFill/>
+          <a:ln/>
+        </p:spPr>
+        <p:txBody>
+          <a:bodyPr wrap="square" lIns="0" tIns="0" rIns="0" bIns="0" rtlCol="0" anchor="ctr"/>
+          <a:lstStyle/>
+          <a:p>
+            <a:pPr indent="0" marL="0">
+              <a:buNone/>
+            </a:pPr>
+            <a:r>
+              <a:rPr lang="en-US" sz="1400" dirty="0">
+                <a:solidFill>
+                  <a:srgbClr val="6D6A64"/>
+                </a:solidFill>
+                <a:latin typeface="Calibri" pitchFamily="34" charset="0"/>
+                <a:ea typeface="Calibri" pitchFamily="34" charset="-122"/>
+                <a:cs typeface="Calibri" pitchFamily="34" charset="-120"/>
+              </a:rPr>
+              <a:t>iOS 26.6.1</a:t>
+            </a:r>
+            <a:endParaRPr lang="en-US" sz="1400" dirty="0"/>
+          </a:p>
+        </p:txBody>
+      </p:sp>
+      <p:sp>
+        <p:nvSpPr>
+          <p:cNvPr id="54" name="Text 52"/>
+          <p:cNvSpPr txBox="1"/>
+          <p:nvPr/>
+        </p:nvSpPr>
+        <p:spPr>
+          <a:xfrm>
+            <a:off x="8001000" y="2523744"/>
+            <a:ext cx="3566160" cy="347472"/>
+          </a:xfrm>
+          <a:prstGeom prst="rect">
+            <a:avLst/>
+          </a:prstGeom>
+          <a:noFill/>
+          <a:ln/>
+        </p:spPr>
+        <p:txBody>
+          <a:bodyPr wrap="square" lIns="0" tIns="0" rIns="0" bIns="0" rtlCol="0" anchor="ctr"/>
+          <a:lstStyle/>
+          <a:p>
+            <a:pPr indent="0" marL="0">
+              <a:buNone/>
+            </a:pPr>
+            <a:r>
+              <a:rPr lang="en-US" sz="1600" b="1" dirty="0">
+                <a:solidFill>
+                  <a:srgbClr val="1B1A18"/>
+                </a:solidFill>
+                <a:latin typeface="Calibri" pitchFamily="34" charset="0"/>
+                <a:ea typeface="Calibri" pitchFamily="34" charset="-122"/>
+                <a:cs typeface="Calibri" pitchFamily="34" charset="-120"/>
+              </a:rPr>
+              <a:t>71 of 72 accepted</a:t>
+            </a:r>
+            <a:endParaRPr lang="en-US" sz="1600" dirty="0"/>
+          </a:p>
+        </p:txBody>
+      </p:sp>
+      <p:sp>
+        <p:nvSpPr>
+          <p:cNvPr id="55" name="Text 53"/>
+          <p:cNvSpPr txBox="1"/>
+          <p:nvPr/>
+        </p:nvSpPr>
+        <p:spPr>
+          <a:xfrm>
+            <a:off x="8001000" y="2926080"/>
+            <a:ext cx="3566160" cy="914400"/>
           </a:xfrm>
           <a:prstGeom prst="rect">
             <a:avLst/>
@@ -9576,93 +10460,41 @@
           <a:bodyPr wrap="square" lIns="0" tIns="0" rIns="0" bIns="0" rtlCol="0" anchor="t"/>
           <a:lstStyle/>
           <a:p>
-            <a:pPr marL="342900" indent="-342900">
+            <a:pPr indent="0" marL="0">
               <a:lnSpc>
                 <a:spcPts val="1800"/>
               </a:lnSpc>
-              <a:spcAft>
-                <a:spcPts val="600"/>
-              </a:spcAft>
-              <a:buSzPct val="100000"/>
-              <a:buChar char="•"/>
+              <a:buNone/>
             </a:pPr>
             <a:r>
               <a:rPr lang="en-US" sz="1400" dirty="0">
                 <a:solidFill>
-                  <a:srgbClr val="1B1A18"/>
+                  <a:srgbClr val="6D6A64"/>
                 </a:solidFill>
                 <a:latin typeface="Calibri" pitchFamily="34" charset="0"/>
                 <a:ea typeface="Calibri" pitchFamily="34" charset="-122"/>
                 <a:cs typeface="Calibri" pitchFamily="34" charset="-120"/>
               </a:rPr>
-              <a:t>Galaxy A-series and both OS floors untested</a:t>
+              <a:t>the one refusal is a zero-byte file, which is correct</a:t>
             </a:r>
             <a:endParaRPr lang="en-US" sz="1400" dirty="0"/>
           </a:p>
-          <a:p>
-            <a:pPr marL="342900" indent="-342900">
-              <a:lnSpc>
-                <a:spcPts val="1800"/>
-              </a:lnSpc>
-              <a:spcAft>
-                <a:spcPts val="600"/>
-              </a:spcAft>
-              <a:buSzPct val="100000"/>
-              <a:buChar char="•"/>
-            </a:pPr>
-            <a:r>
-              <a:rPr lang="en-US" sz="1400" dirty="0">
-                <a:solidFill>
-                  <a:srgbClr val="1B1A18"/>
-                </a:solidFill>
-                <a:latin typeface="Calibri" pitchFamily="34" charset="0"/>
-                <a:ea typeface="Calibri" pitchFamily="34" charset="-122"/>
-                <a:cs typeface="Calibri" pitchFamily="34" charset="-120"/>
-              </a:rPr>
-              <a:t>Multi-hour fills untested — batteries learn over days</a:t>
-            </a:r>
-            <a:endParaRPr lang="en-US" sz="1400" dirty="0"/>
-          </a:p>
-          <a:p>
-            <a:pPr marL="342900" indent="-342900">
-              <a:lnSpc>
-                <a:spcPts val="1800"/>
-              </a:lnSpc>
-              <a:spcAft>
-                <a:spcPts val="600"/>
-              </a:spcAft>
-              <a:buSzPct val="100000"/>
-              <a:buChar char="•"/>
-            </a:pPr>
-            <a:r>
-              <a:rPr lang="en-US" sz="1400" dirty="0">
-                <a:solidFill>
-                  <a:srgbClr val="1B1A18"/>
-                </a:solidFill>
-                <a:latin typeface="Calibri" pitchFamily="34" charset="0"/>
-                <a:ea typeface="Calibri" pitchFamily="34" charset="-122"/>
-                <a:cs typeface="Calibri" pitchFamily="34" charset="-120"/>
-              </a:rPr>
-              <a:t>TestFlight and signed APK distribution not set up</a:t>
-            </a:r>
-            <a:endParaRPr lang="en-US" sz="1400" dirty="0"/>
-          </a:p>
-        </p:txBody>
-      </p:sp>
-      <p:sp>
-        <p:nvSpPr>
-          <p:cNvPr id="13" name="Shape 11"/>
+        </p:txBody>
+      </p:sp>
+      <p:sp>
+        <p:nvSpPr>
+          <p:cNvPr id="56" name="Shape 54"/>
           <p:cNvSpPr/>
           <p:nvPr/>
         </p:nvSpPr>
         <p:spPr>
           <a:xfrm>
-            <a:off x="6263640" y="3529584"/>
-            <a:ext cx="5349240" cy="1901952"/>
+            <a:off x="548640" y="4334256"/>
+            <a:ext cx="5486400" cy="1152144"/>
           </a:xfrm>
           <a:prstGeom prst="roundRect">
             <a:avLst>
-              <a:gd name="adj" fmla="val 4327"/>
+              <a:gd name="adj" fmla="val 7143"/>
             </a:avLst>
           </a:prstGeom>
           <a:solidFill>
@@ -9678,14 +10510,14 @@
       </p:sp>
       <p:sp>
         <p:nvSpPr>
-          <p:cNvPr id="14" name="Text 12"/>
-          <p:cNvSpPr txBox="1"/>
-          <p:nvPr/>
-        </p:nvSpPr>
-        <p:spPr>
-          <a:xfrm>
-            <a:off x="6537960" y="3675888"/>
-            <a:ext cx="4754880" cy="347472"/>
+          <p:cNvPr id="57" name="Text 55"/>
+          <p:cNvSpPr txBox="1"/>
+          <p:nvPr/>
+        </p:nvSpPr>
+        <p:spPr>
+          <a:xfrm>
+            <a:off x="822960" y="4480560"/>
+            <a:ext cx="5029200" cy="329184"/>
           </a:xfrm>
           <a:prstGeom prst="rect">
             <a:avLst/>
@@ -9701,7 +10533,7 @@
               <a:buNone/>
             </a:pPr>
             <a:r>
-              <a:rPr lang="en-US" sz="1700" b="1" dirty="0">
+              <a:rPr lang="en-US" sz="1600" b="1" dirty="0">
                 <a:solidFill>
                   <a:srgbClr val="2F5D50"/>
                 </a:solidFill>
@@ -9709,22 +10541,22 @@
                 <a:ea typeface="Cambria" pitchFamily="34" charset="-122"/>
                 <a:cs typeface="Cambria" pitchFamily="34" charset="-120"/>
               </a:rPr>
-              <a:t>Robustness</a:t>
-            </a:r>
-            <a:endParaRPr lang="en-US" sz="1700" dirty="0"/>
-          </a:p>
-        </p:txBody>
-      </p:sp>
-      <p:sp>
-        <p:nvSpPr>
-          <p:cNvPr id="15" name="Text 13"/>
-          <p:cNvSpPr txBox="1"/>
-          <p:nvPr/>
-        </p:nvSpPr>
-        <p:spPr>
-          <a:xfrm>
-            <a:off x="6537960" y="4078224"/>
-            <a:ext cx="4846320" cy="1234440"/>
+              <a:t>Pixel 9 emulator · Android 17</a:t>
+            </a:r>
+            <a:endParaRPr lang="en-US" sz="1600" dirty="0"/>
+          </a:p>
+        </p:txBody>
+      </p:sp>
+      <p:sp>
+        <p:nvSpPr>
+          <p:cNvPr id="58" name="Text 56"/>
+          <p:cNvSpPr txBox="1"/>
+          <p:nvPr/>
+        </p:nvSpPr>
+        <p:spPr>
+          <a:xfrm>
+            <a:off x="822960" y="4846320"/>
+            <a:ext cx="4983480" cy="548640"/>
           </a:xfrm>
           <a:prstGeom prst="rect">
             <a:avLst/>
@@ -9736,88 +10568,144 @@
           <a:bodyPr wrap="square" lIns="0" tIns="0" rIns="0" bIns="0" rtlCol="0" anchor="t"/>
           <a:lstStyle/>
           <a:p>
-            <a:pPr marL="342900" indent="-342900">
+            <a:pPr indent="0" marL="0">
               <a:lnSpc>
                 <a:spcPts val="1800"/>
               </a:lnSpc>
-              <a:spcAft>
-                <a:spcPts val="600"/>
-              </a:spcAft>
-              <a:buSzPct val="100000"/>
-              <a:buChar char="•"/>
+              <a:buNone/>
             </a:pPr>
             <a:r>
               <a:rPr lang="en-US" sz="1400" dirty="0">
                 <a:solidFill>
-                  <a:srgbClr val="1B1A18"/>
+                  <a:srgbClr val="6D6A64"/>
                 </a:solidFill>
                 <a:latin typeface="Calibri" pitchFamily="34" charset="0"/>
                 <a:ea typeface="Calibri" pitchFamily="34" charset="-122"/>
                 <a:cs typeface="Calibri" pitchFamily="34" charset="-120"/>
               </a:rPr>
-              <a:t>Resume is per-file, not per-byte, on both loaders</a:t>
+              <a:t>all assets indexed — DATE_TAKEN matched the manifest to under a second</a:t>
             </a:r>
             <a:endParaRPr lang="en-US" sz="1400" dirty="0"/>
           </a:p>
-          <a:p>
-            <a:pPr marL="342900" indent="-342900">
+        </p:txBody>
+      </p:sp>
+      <p:sp>
+        <p:nvSpPr>
+          <p:cNvPr id="59" name="Shape 57"/>
+          <p:cNvSpPr/>
+          <p:nvPr/>
+        </p:nvSpPr>
+        <p:spPr>
+          <a:xfrm>
+            <a:off x="6309360" y="4334256"/>
+            <a:ext cx="5486400" cy="1152144"/>
+          </a:xfrm>
+          <a:prstGeom prst="roundRect">
+            <a:avLst>
+              <a:gd name="adj" fmla="val 7143"/>
+            </a:avLst>
+          </a:prstGeom>
+          <a:solidFill>
+            <a:srgbClr val="E4EEE9"/>
+          </a:solidFill>
+          <a:ln w="12700">
+            <a:solidFill>
+              <a:srgbClr val="E4EEE9"/>
+            </a:solidFill>
+            <a:prstDash val="solid"/>
+          </a:ln>
+        </p:spPr>
+      </p:sp>
+      <p:sp>
+        <p:nvSpPr>
+          <p:cNvPr id="60" name="Text 58"/>
+          <p:cNvSpPr txBox="1"/>
+          <p:nvPr/>
+        </p:nvSpPr>
+        <p:spPr>
+          <a:xfrm>
+            <a:off x="6583680" y="4480560"/>
+            <a:ext cx="5029200" cy="329184"/>
+          </a:xfrm>
+          <a:prstGeom prst="rect">
+            <a:avLst/>
+          </a:prstGeom>
+          <a:noFill/>
+          <a:ln/>
+        </p:spPr>
+        <p:txBody>
+          <a:bodyPr wrap="square" lIns="0" tIns="0" rIns="0" bIns="0" rtlCol="0" anchor="ctr"/>
+          <a:lstStyle/>
+          <a:p>
+            <a:pPr indent="0" marL="0">
+              <a:buNone/>
+            </a:pPr>
+            <a:r>
+              <a:rPr lang="en-US" sz="1600" b="1" dirty="0">
+                <a:solidFill>
+                  <a:srgbClr val="2F5D50"/>
+                </a:solidFill>
+                <a:latin typeface="Cambria" pitchFamily="34" charset="0"/>
+                <a:ea typeface="Cambria" pitchFamily="34" charset="-122"/>
+                <a:cs typeface="Cambria" pitchFamily="34" charset="-120"/>
+              </a:rPr>
+              <a:t>iPhone 17 Pro simulator · iOS 26.5</a:t>
+            </a:r>
+            <a:endParaRPr lang="en-US" sz="1600" dirty="0"/>
+          </a:p>
+        </p:txBody>
+      </p:sp>
+      <p:sp>
+        <p:nvSpPr>
+          <p:cNvPr id="61" name="Text 59"/>
+          <p:cNvSpPr txBox="1"/>
+          <p:nvPr/>
+        </p:nvSpPr>
+        <p:spPr>
+          <a:xfrm>
+            <a:off x="6583680" y="4846320"/>
+            <a:ext cx="4983480" cy="548640"/>
+          </a:xfrm>
+          <a:prstGeom prst="rect">
+            <a:avLst/>
+          </a:prstGeom>
+          <a:noFill/>
+          <a:ln/>
+        </p:spPr>
+        <p:txBody>
+          <a:bodyPr wrap="square" lIns="0" tIns="0" rIns="0" bIns="0" rtlCol="0" anchor="t"/>
+          <a:lstStyle/>
+          <a:p>
+            <a:pPr indent="0" marL="0">
               <a:lnSpc>
                 <a:spcPts val="1800"/>
               </a:lnSpc>
-              <a:spcAft>
-                <a:spcPts val="600"/>
-              </a:spcAft>
-              <a:buSzPct val="100000"/>
-              <a:buChar char="•"/>
+              <a:buNone/>
             </a:pPr>
             <a:r>
               <a:rPr lang="en-US" sz="1400" dirty="0">
                 <a:solidFill>
-                  <a:srgbClr val="1B1A18"/>
+                  <a:srgbClr val="6D6A64"/>
                 </a:solidFill>
                 <a:latin typeface="Calibri" pitchFamily="34" charset="0"/>
                 <a:ea typeface="Calibri" pitchFamily="34" charset="-122"/>
                 <a:cs typeface="Calibri" pitchFamily="34" charset="-120"/>
               </a:rPr>
-              <a:t>Physical iPhones cannot be verified by tdg verify</a:t>
+              <a:t>HEIC + HEVC — creationDate exact, 0.000 s delta</a:t>
             </a:r>
             <a:endParaRPr lang="en-US" sz="1400" dirty="0"/>
           </a:p>
-          <a:p>
-            <a:pPr marL="342900" indent="-342900">
-              <a:lnSpc>
-                <a:spcPts val="1800"/>
-              </a:lnSpc>
-              <a:spcAft>
-                <a:spcPts val="600"/>
-              </a:spcAft>
-              <a:buSzPct val="100000"/>
-              <a:buChar char="•"/>
-            </a:pPr>
-            <a:r>
-              <a:rPr lang="en-US" sz="1400" dirty="0">
-                <a:solidFill>
-                  <a:srgbClr val="1B1A18"/>
-                </a:solidFill>
-                <a:latin typeface="Calibri" pitchFamily="34" charset="0"/>
-                <a:ea typeface="Calibri" pitchFamily="34" charset="-122"/>
-                <a:cs typeface="Calibri" pitchFamily="34" charset="-120"/>
-              </a:rPr>
-              <a:t>Live Photos and the 4 GB single file not built</a:t>
-            </a:r>
-            <a:endParaRPr lang="en-US" sz="1400" dirty="0"/>
-          </a:p>
-        </p:txBody>
-      </p:sp>
-      <p:sp>
-        <p:nvSpPr>
-          <p:cNvPr id="16" name="Text 14"/>
-          <p:cNvSpPr txBox="1"/>
-          <p:nvPr/>
-        </p:nvSpPr>
-        <p:spPr>
-          <a:xfrm>
-            <a:off x="548640" y="5669280"/>
+        </p:txBody>
+      </p:sp>
+      <p:sp>
+        <p:nvSpPr>
+          <p:cNvPr id="62" name="Text 60"/>
+          <p:cNvSpPr txBox="1"/>
+          <p:nvPr/>
+        </p:nvSpPr>
+        <p:spPr>
+          <a:xfrm>
+            <a:off x="548640" y="5687568"/>
             <a:ext cx="11064240" cy="384048"/>
           </a:xfrm>
           <a:prstGeom prst="rect">
@@ -9842,7 +10730,7 @@
                 <a:ea typeface="Cambria" pitchFamily="34" charset="-122"/>
                 <a:cs typeface="Cambria" pitchFamily="34" charset="-120"/>
               </a:rPr>
-              <a:t>Security is the only group that blocks use beyond a trusted lab network. The rest is packaging and coverage.</a:t>
+              <a:t>Two iOS loader bugs were found by the first physical run that no simulator had surfaced.</a:t>
             </a:r>
             <a:endParaRPr lang="en-US" sz="1500" dirty="0"/>
           </a:p>

--- a/docs/TDG-overview.pptx
+++ b/docs/TDG-overview.pptx
@@ -12,6 +12,7 @@
     <p:sldId id="260" r:id="rId6"/>
     <p:sldId id="261" r:id="rId7"/>
     <p:sldId id="262" r:id="rId8"/>
+    <p:sldId id="267" r:id="rId18"/>
     <p:sldId id="263" r:id="rId9"/>
     <p:sldId id="264" r:id="rId10"/>
     <p:sldId id="265" r:id="rId11"/>
@@ -2118,7 +2119,7 @@
                 <a:ea typeface="Cambria" pitchFamily="34" charset="-122"/>
                 <a:cs typeface="Cambria" pitchFamily="34" charset="-120"/>
               </a:rPr>
-              <a:t>190</a:t>
+              <a:t>205</a:t>
             </a:r>
             <a:endParaRPr lang="en-US" sz="3400" dirty="0"/>
           </a:p>
@@ -3076,7 +3077,7 @@
                 <a:ea typeface="Calibri" pitchFamily="34" charset="-122"/>
                 <a:cs typeface="Calibri" pitchFamily="34" charset="-120"/>
               </a:rPr>
-              <a:t>All seven planned phases are built and pushed. The generator, the control plane and both mobile loaders work end to end on real hardware, with 190 automated checks and conformance results committed per device.</a:t>
+              <a:t>All seven planned phases are built and pushed. The generator, the control plane and both mobile loaders work end to end on real hardware, with 205 automated checks and conformance results committed per device.</a:t>
             </a:r>
             <a:endParaRPr lang="en-US" sz="1450" dirty="0"/>
           </a:p>
@@ -3355,6 +3356,805 @@
               <a:t>wipe from a receipt</a:t>
             </a:r>
             <a:endParaRPr lang="en-US" sz="1400" dirty="0"/>
+          </a:p>
+        </p:txBody>
+      </p:sp>
+    </p:spTree>
+  </p:cSld>
+  <p:clrMapOvr>
+    <a:masterClrMapping/>
+  </p:clrMapOvr>
+</p:sld>
+</file>
+
+<file path=ppt/slides/slide12.xml><?xml version="1.0" encoding="utf-8"?>
+<p:sld xmlns:a="http://schemas.openxmlformats.org/drawingml/2006/main" xmlns:r="http://schemas.openxmlformats.org/officeDocument/2006/relationships" xmlns:p="http://schemas.openxmlformats.org/presentationml/2006/main">
+  <p:cSld name="Slide 6">
+    <p:spTree>
+      <p:nvGrpSpPr>
+        <p:cNvPr id="1" name=""/>
+        <p:cNvGrpSpPr/>
+        <p:nvPr/>
+      </p:nvGrpSpPr>
+      <p:grpSpPr>
+        <a:xfrm>
+          <a:off x="0" y="0"/>
+          <a:ext cx="0" cy="0"/>
+          <a:chOff x="0" y="0"/>
+          <a:chExt cx="0" cy="0"/>
+        </a:xfrm>
+      </p:grpSpPr>
+      <p:sp>
+        <p:nvSpPr>
+          <p:cNvPr id="2" name="Text 0"/>
+          <p:cNvSpPr txBox="1"/>
+          <p:nvPr/>
+        </p:nvSpPr>
+        <p:spPr>
+          <a:xfrm>
+            <a:off x="548640" y="274320"/>
+            <a:ext cx="11064240" cy="274320"/>
+          </a:xfrm>
+          <a:prstGeom prst="rect">
+            <a:avLst/>
+          </a:prstGeom>
+          <a:noFill/>
+          <a:ln/>
+        </p:spPr>
+        <p:txBody>
+          <a:bodyPr wrap="square" lIns="0" tIns="0" rIns="0" bIns="0" rtlCol="0" anchor="ctr"/>
+          <a:lstStyle/>
+          <a:p>
+            <a:pPr indent="0" marL="0">
+              <a:buNone/>
+            </a:pPr>
+            <a:r>
+              <a:rPr lang="en-US" sz="1400" b="1" spc="200" kern="0" dirty="0">
+                <a:solidFill>
+                  <a:srgbClr val="2F5D50"/>
+                </a:solidFill>
+                <a:latin typeface="Calibri" pitchFamily="34" charset="0"/>
+                <a:ea typeface="Calibri" pitchFamily="34" charset="-122"/>
+                <a:cs typeface="Calibri" pitchFamily="34" charset="-120"/>
+              </a:rPr>
+              <a:t>REVERSIBILITY</a:t>
+            </a:r>
+            <a:endParaRPr lang="en-US" sz="1400" dirty="0"/>
+          </a:p>
+        </p:txBody>
+      </p:sp>
+      <p:sp>
+        <p:nvSpPr>
+          <p:cNvPr id="3" name="Text 1"/>
+          <p:cNvSpPr txBox="1"/>
+          <p:nvPr/>
+        </p:nvSpPr>
+        <p:spPr>
+          <a:xfrm>
+            <a:off x="548640" y="585216"/>
+            <a:ext cx="11064240" cy="713232"/>
+          </a:xfrm>
+          <a:prstGeom prst="rect">
+            <a:avLst/>
+          </a:prstGeom>
+          <a:noFill/>
+          <a:ln/>
+        </p:spPr>
+        <p:txBody>
+          <a:bodyPr wrap="square" lIns="0" tIns="0" rIns="0" bIns="0" rtlCol="0" anchor="ctr"/>
+          <a:lstStyle/>
+          <a:p>
+            <a:pPr indent="0" marL="0">
+              <a:buNone/>
+            </a:pPr>
+            <a:r>
+              <a:rPr lang="en-US" sz="3200" b="1" dirty="0">
+                <a:solidFill>
+                  <a:srgbClr val="1B1A18"/>
+                </a:solidFill>
+                <a:latin typeface="Cambria" pitchFamily="34" charset="0"/>
+                <a:ea typeface="Cambria" pitchFamily="34" charset="-122"/>
+                <a:cs typeface="Cambria" pitchFamily="34" charset="-120"/>
+              </a:rPr>
+              <a:t>The receipt has to outlive the app</a:t>
+            </a:r>
+            <a:endParaRPr lang="en-US" sz="3200" dirty="0"/>
+          </a:p>
+        </p:txBody>
+      </p:sp>
+      <p:sp>
+        <p:nvSpPr>
+          <p:cNvPr id="4" name="Text 2"/>
+          <p:cNvSpPr txBox="1"/>
+          <p:nvPr/>
+        </p:nvSpPr>
+        <p:spPr>
+          <a:xfrm>
+            <a:off x="548640" y="1389888"/>
+            <a:ext cx="11064240" cy="365760"/>
+          </a:xfrm>
+          <a:prstGeom prst="rect">
+            <a:avLst/>
+          </a:prstGeom>
+          <a:noFill/>
+          <a:ln/>
+        </p:spPr>
+        <p:txBody>
+          <a:bodyPr wrap="square" lIns="0" tIns="0" rIns="0" bIns="0" rtlCol="0" anchor="ctr"/>
+          <a:lstStyle/>
+          <a:p>
+            <a:pPr indent="0" marL="0">
+              <a:buNone/>
+            </a:pPr>
+            <a:r>
+              <a:rPr lang="en-US" sz="1400" dirty="0">
+                <a:solidFill>
+                  <a:srgbClr val="6D6A64"/>
+                </a:solidFill>
+                <a:latin typeface="Calibri" pitchFamily="34" charset="0"/>
+                <a:ea typeface="Calibri" pitchFamily="34" charset="-122"/>
+                <a:cs typeface="Calibri" pitchFamily="34" charset="-120"/>
+              </a:rPr>
+              <a:t>Wipe deletes what a receipt records. That receipt lived in app storage — so deleting the app stranded every asset it had written.</a:t>
+            </a:r>
+            <a:endParaRPr lang="en-US" sz="1400" dirty="0"/>
+          </a:p>
+        </p:txBody>
+      </p:sp>
+      <p:sp>
+        <p:nvSpPr>
+          <p:cNvPr id="5" name="Shape 3"/>
+          <p:cNvSpPr/>
+          <p:nvPr/>
+        </p:nvSpPr>
+        <p:spPr>
+          <a:xfrm>
+            <a:off x="548640" y="1847088"/>
+            <a:ext cx="5349240" cy="1463040"/>
+          </a:xfrm>
+          <a:prstGeom prst="roundRect">
+            <a:avLst>
+              <a:gd name="adj" fmla="val 5625"/>
+            </a:avLst>
+          </a:prstGeom>
+          <a:solidFill>
+            <a:srgbClr val="F3E6E2"/>
+          </a:solidFill>
+          <a:ln w="12700">
+            <a:solidFill>
+              <a:srgbClr val="F3E6E2"/>
+            </a:solidFill>
+            <a:prstDash val="solid"/>
+          </a:ln>
+        </p:spPr>
+      </p:sp>
+      <p:sp>
+        <p:nvSpPr>
+          <p:cNvPr id="6" name="Text 4"/>
+          <p:cNvSpPr txBox="1"/>
+          <p:nvPr/>
+        </p:nvSpPr>
+        <p:spPr>
+          <a:xfrm>
+            <a:off x="822960" y="2194560"/>
+            <a:ext cx="1417320" cy="658368"/>
+          </a:xfrm>
+          <a:prstGeom prst="rect">
+            <a:avLst/>
+          </a:prstGeom>
+          <a:noFill/>
+          <a:ln/>
+        </p:spPr>
+        <p:txBody>
+          <a:bodyPr wrap="square" lIns="0" tIns="0" rIns="0" bIns="0" rtlCol="0" anchor="ctr"/>
+          <a:lstStyle/>
+          <a:p>
+            <a:pPr indent="0" marL="0">
+              <a:buNone/>
+            </a:pPr>
+            <a:r>
+              <a:rPr lang="en-US" sz="4000" b="1" dirty="0">
+                <a:solidFill>
+                  <a:srgbClr val="9C4A32"/>
+                </a:solidFill>
+                <a:latin typeface="Cambria" pitchFamily="34" charset="0"/>
+                <a:ea typeface="Cambria" pitchFamily="34" charset="-122"/>
+                <a:cs typeface="Cambria" pitchFamily="34" charset="-120"/>
+              </a:rPr>
+              <a:t>169</a:t>
+            </a:r>
+            <a:endParaRPr lang="en-US" sz="4000" dirty="0"/>
+          </a:p>
+        </p:txBody>
+      </p:sp>
+      <p:sp>
+        <p:nvSpPr>
+          <p:cNvPr id="7" name="Text 5"/>
+          <p:cNvSpPr txBox="1"/>
+          <p:nvPr/>
+        </p:nvSpPr>
+        <p:spPr>
+          <a:xfrm>
+            <a:off x="2331720" y="2029968"/>
+            <a:ext cx="3383280" cy="310896"/>
+          </a:xfrm>
+          <a:prstGeom prst="rect">
+            <a:avLst/>
+          </a:prstGeom>
+          <a:noFill/>
+          <a:ln/>
+        </p:spPr>
+        <p:txBody>
+          <a:bodyPr wrap="square" lIns="0" tIns="0" rIns="0" bIns="0" rtlCol="0" anchor="ctr"/>
+          <a:lstStyle/>
+          <a:p>
+            <a:pPr indent="0" marL="0">
+              <a:buNone/>
+            </a:pPr>
+            <a:r>
+              <a:rPr lang="en-US" sz="1600" b="1" dirty="0">
+                <a:solidFill>
+                  <a:srgbClr val="1B1A18"/>
+                </a:solidFill>
+                <a:latin typeface="Cambria" pitchFamily="34" charset="0"/>
+                <a:ea typeface="Cambria" pitchFamily="34" charset="-122"/>
+                <a:cs typeface="Cambria" pitchFamily="34" charset="-120"/>
+              </a:rPr>
+              <a:t>Stranded by an uninstall</a:t>
+            </a:r>
+            <a:endParaRPr lang="en-US" sz="1600" dirty="0"/>
+          </a:p>
+        </p:txBody>
+      </p:sp>
+      <p:sp>
+        <p:nvSpPr>
+          <p:cNvPr id="8" name="Text 6"/>
+          <p:cNvSpPr txBox="1"/>
+          <p:nvPr/>
+        </p:nvSpPr>
+        <p:spPr>
+          <a:xfrm>
+            <a:off x="2331720" y="2359152"/>
+            <a:ext cx="3383280" cy="859536"/>
+          </a:xfrm>
+          <a:prstGeom prst="rect">
+            <a:avLst/>
+          </a:prstGeom>
+          <a:noFill/>
+          <a:ln/>
+        </p:spPr>
+        <p:txBody>
+          <a:bodyPr wrap="square" lIns="0" tIns="0" rIns="0" bIns="0" rtlCol="0" anchor="t"/>
+          <a:lstStyle/>
+          <a:p>
+            <a:pPr indent="0" marL="0">
+              <a:lnSpc>
+                <a:spcPts val="1800"/>
+              </a:lnSpc>
+              <a:buNone/>
+            </a:pPr>
+            <a:r>
+              <a:rPr lang="en-US" sz="1400" dirty="0">
+                <a:solidFill>
+                  <a:srgbClr val="6D6A64"/>
+                </a:solidFill>
+                <a:latin typeface="Calibri" pitchFamily="34" charset="0"/>
+                <a:ea typeface="Calibri" pitchFamily="34" charset="-122"/>
+                <a:cs typeface="Calibri" pitchFamily="34" charset="-120"/>
+              </a:rPr>
+              <a:t>Assets left in the gallery with nothing left to name them. The bytes stay; the only record of which bytes they are goes with the app.</a:t>
+            </a:r>
+            <a:endParaRPr lang="en-US" sz="1400" dirty="0"/>
+          </a:p>
+        </p:txBody>
+      </p:sp>
+      <p:sp>
+        <p:nvSpPr>
+          <p:cNvPr id="9" name="Shape 7"/>
+          <p:cNvSpPr/>
+          <p:nvPr/>
+        </p:nvSpPr>
+        <p:spPr>
+          <a:xfrm>
+            <a:off x="6263640" y="1847088"/>
+            <a:ext cx="5349240" cy="1463040"/>
+          </a:xfrm>
+          <a:prstGeom prst="roundRect">
+            <a:avLst>
+              <a:gd name="adj" fmla="val 5625"/>
+            </a:avLst>
+          </a:prstGeom>
+          <a:solidFill>
+            <a:srgbClr val="E4EEE9"/>
+          </a:solidFill>
+          <a:ln w="12700">
+            <a:solidFill>
+              <a:srgbClr val="E4EEE9"/>
+            </a:solidFill>
+            <a:prstDash val="solid"/>
+          </a:ln>
+        </p:spPr>
+      </p:sp>
+      <p:sp>
+        <p:nvSpPr>
+          <p:cNvPr id="10" name="Text 8"/>
+          <p:cNvSpPr txBox="1"/>
+          <p:nvPr/>
+        </p:nvSpPr>
+        <p:spPr>
+          <a:xfrm>
+            <a:off x="6537960" y="2194560"/>
+            <a:ext cx="1417320" cy="658368"/>
+          </a:xfrm>
+          <a:prstGeom prst="rect">
+            <a:avLst/>
+          </a:prstGeom>
+          <a:noFill/>
+          <a:ln/>
+        </p:spPr>
+        <p:txBody>
+          <a:bodyPr wrap="square" lIns="0" tIns="0" rIns="0" bIns="0" rtlCol="0" anchor="ctr"/>
+          <a:lstStyle/>
+          <a:p>
+            <a:pPr indent="0" marL="0">
+              <a:buNone/>
+            </a:pPr>
+            <a:r>
+              <a:rPr lang="en-US" sz="4000" b="1" dirty="0">
+                <a:solidFill>
+                  <a:srgbClr val="2F5D50"/>
+                </a:solidFill>
+                <a:latin typeface="Cambria" pitchFamily="34" charset="0"/>
+                <a:ea typeface="Cambria" pitchFamily="34" charset="-122"/>
+                <a:cs typeface="Cambria" pitchFamily="34" charset="-120"/>
+              </a:rPr>
+              <a:t>0</a:t>
+            </a:r>
+            <a:endParaRPr lang="en-US" sz="4000" dirty="0"/>
+          </a:p>
+        </p:txBody>
+      </p:sp>
+      <p:sp>
+        <p:nvSpPr>
+          <p:cNvPr id="11" name="Text 9"/>
+          <p:cNvSpPr txBox="1"/>
+          <p:nvPr/>
+        </p:nvSpPr>
+        <p:spPr>
+          <a:xfrm>
+            <a:off x="8046720" y="2029968"/>
+            <a:ext cx="3383280" cy="310896"/>
+          </a:xfrm>
+          <a:prstGeom prst="rect">
+            <a:avLst/>
+          </a:prstGeom>
+          <a:noFill/>
+          <a:ln/>
+        </p:spPr>
+        <p:txBody>
+          <a:bodyPr wrap="square" lIns="0" tIns="0" rIns="0" bIns="0" rtlCol="0" anchor="ctr"/>
+          <a:lstStyle/>
+          <a:p>
+            <a:pPr indent="0" marL="0">
+              <a:buNone/>
+            </a:pPr>
+            <a:r>
+              <a:rPr lang="en-US" sz="1600" b="1" dirty="0">
+                <a:solidFill>
+                  <a:srgbClr val="1B1A18"/>
+                </a:solidFill>
+                <a:latin typeface="Cambria" pitchFamily="34" charset="0"/>
+                <a:ea typeface="Cambria" pitchFamily="34" charset="-122"/>
+                <a:cs typeface="Cambria" pitchFamily="34" charset="-120"/>
+              </a:rPr>
+              <a:t>Left behind now</a:t>
+            </a:r>
+            <a:endParaRPr lang="en-US" sz="1600" dirty="0"/>
+          </a:p>
+        </p:txBody>
+      </p:sp>
+      <p:sp>
+        <p:nvSpPr>
+          <p:cNvPr id="12" name="Text 10"/>
+          <p:cNvSpPr txBox="1"/>
+          <p:nvPr/>
+        </p:nvSpPr>
+        <p:spPr>
+          <a:xfrm>
+            <a:off x="8046720" y="2359152"/>
+            <a:ext cx="3383280" cy="859536"/>
+          </a:xfrm>
+          <a:prstGeom prst="rect">
+            <a:avLst/>
+          </a:prstGeom>
+          <a:noFill/>
+          <a:ln/>
+        </p:spPr>
+        <p:txBody>
+          <a:bodyPr wrap="square" lIns="0" tIns="0" rIns="0" bIns="0" rtlCol="0" anchor="t"/>
+          <a:lstStyle/>
+          <a:p>
+            <a:pPr indent="0" marL="0">
+              <a:lnSpc>
+                <a:spcPts val="1800"/>
+              </a:lnSpc>
+              <a:buNone/>
+            </a:pPr>
+            <a:r>
+              <a:rPr lang="en-US" sz="1400" dirty="0">
+                <a:solidFill>
+                  <a:srgbClr val="6D6A64"/>
+                </a:solidFill>
+                <a:latin typeface="Calibri" pitchFamily="34" charset="0"/>
+                <a:ea typeface="Calibri" pitchFamily="34" charset="-122"/>
+                <a:cs typeface="Calibri" pitchFamily="34" charset="-120"/>
+              </a:rPr>
+              <a:t>The control plane keeps a copy. A reinstalled app asks for it back and takes every asset with it — verified on both handsets.</a:t>
+            </a:r>
+            <a:endParaRPr lang="en-US" sz="1400" dirty="0"/>
+          </a:p>
+        </p:txBody>
+      </p:sp>
+      <p:sp>
+        <p:nvSpPr>
+          <p:cNvPr id="13" name="Shape 11"/>
+          <p:cNvSpPr/>
+          <p:nvPr/>
+        </p:nvSpPr>
+        <p:spPr>
+          <a:xfrm>
+            <a:off x="548640" y="3493008"/>
+            <a:ext cx="3447288" cy="1993392"/>
+          </a:xfrm>
+          <a:prstGeom prst="roundRect">
+            <a:avLst>
+              <a:gd name="adj" fmla="val 4128"/>
+            </a:avLst>
+          </a:prstGeom>
+          <a:solidFill>
+            <a:srgbClr val="E4EEE9"/>
+          </a:solidFill>
+          <a:ln w="12700">
+            <a:solidFill>
+              <a:srgbClr val="E4EEE9"/>
+            </a:solidFill>
+            <a:prstDash val="solid"/>
+          </a:ln>
+        </p:spPr>
+      </p:sp>
+      <p:sp>
+        <p:nvSpPr>
+          <p:cNvPr id="14" name="Text 12"/>
+          <p:cNvSpPr txBox="1"/>
+          <p:nvPr/>
+        </p:nvSpPr>
+        <p:spPr>
+          <a:xfrm>
+            <a:off x="786384" y="3657600"/>
+            <a:ext cx="3017520" cy="347472"/>
+          </a:xfrm>
+          <a:prstGeom prst="rect">
+            <a:avLst/>
+          </a:prstGeom>
+          <a:noFill/>
+          <a:ln/>
+        </p:spPr>
+        <p:txBody>
+          <a:bodyPr wrap="square" lIns="0" tIns="0" rIns="0" bIns="0" rtlCol="0" anchor="ctr"/>
+          <a:lstStyle/>
+          <a:p>
+            <a:pPr indent="0" marL="0">
+              <a:buNone/>
+            </a:pPr>
+            <a:r>
+              <a:rPr lang="en-US" sz="1600" b="1" dirty="0">
+                <a:solidFill>
+                  <a:srgbClr val="2F5D50"/>
+                </a:solidFill>
+                <a:latin typeface="Cambria" pitchFamily="34" charset="0"/>
+                <a:ea typeface="Cambria" pitchFamily="34" charset="-122"/>
+                <a:cs typeface="Cambria" pitchFamily="34" charset="-120"/>
+              </a:rPr>
+              <a:t>Deposit</a:t>
+            </a:r>
+            <a:endParaRPr lang="en-US" sz="1600" dirty="0"/>
+          </a:p>
+        </p:txBody>
+      </p:sp>
+      <p:sp>
+        <p:nvSpPr>
+          <p:cNvPr id="15" name="Text 13"/>
+          <p:cNvSpPr txBox="1"/>
+          <p:nvPr/>
+        </p:nvSpPr>
+        <p:spPr>
+          <a:xfrm>
+            <a:off x="786384" y="4041648"/>
+            <a:ext cx="2999232" cy="1316736"/>
+          </a:xfrm>
+          <a:prstGeom prst="rect">
+            <a:avLst/>
+          </a:prstGeom>
+          <a:noFill/>
+          <a:ln/>
+        </p:spPr>
+        <p:txBody>
+          <a:bodyPr wrap="square" lIns="0" tIns="0" rIns="0" bIns="0" rtlCol="0" anchor="t"/>
+          <a:lstStyle/>
+          <a:p>
+            <a:pPr indent="0" marL="0">
+              <a:lnSpc>
+                <a:spcPts val="1700"/>
+              </a:lnSpc>
+              <a:buNone/>
+            </a:pPr>
+            <a:r>
+              <a:rPr lang="en-US" sz="1400" dirty="0">
+                <a:solidFill>
+                  <a:srgbClr val="6D6A64"/>
+                </a:solidFill>
+                <a:latin typeface="Calibri" pitchFamily="34" charset="0"/>
+                <a:ea typeface="Calibri" pitchFamily="34" charset="-122"/>
+                <a:cs typeface="Calibri" pitchFamily="34" charset="-120"/>
+              </a:rPr>
+              <a:t>A loader sends its receipt to the control plane when a fill ends. Best effort throughout: a server that has moved must never fail a fill or block a wipe.</a:t>
+            </a:r>
+            <a:endParaRPr lang="en-US" sz="1400" dirty="0"/>
+          </a:p>
+        </p:txBody>
+      </p:sp>
+      <p:sp>
+        <p:nvSpPr>
+          <p:cNvPr id="16" name="Shape 14"/>
+          <p:cNvSpPr/>
+          <p:nvPr/>
+        </p:nvSpPr>
+        <p:spPr>
+          <a:xfrm>
+            <a:off x="4361688" y="3493008"/>
+            <a:ext cx="3447288" cy="1993392"/>
+          </a:xfrm>
+          <a:prstGeom prst="roundRect">
+            <a:avLst>
+              <a:gd name="adj" fmla="val 4128"/>
+            </a:avLst>
+          </a:prstGeom>
+          <a:solidFill>
+            <a:srgbClr val="E4EEE9"/>
+          </a:solidFill>
+          <a:ln w="12700">
+            <a:solidFill>
+              <a:srgbClr val="E4EEE9"/>
+            </a:solidFill>
+            <a:prstDash val="solid"/>
+          </a:ln>
+        </p:spPr>
+      </p:sp>
+      <p:sp>
+        <p:nvSpPr>
+          <p:cNvPr id="17" name="Text 15"/>
+          <p:cNvSpPr txBox="1"/>
+          <p:nvPr/>
+        </p:nvSpPr>
+        <p:spPr>
+          <a:xfrm>
+            <a:off x="4599432" y="3657600"/>
+            <a:ext cx="3017520" cy="347472"/>
+          </a:xfrm>
+          <a:prstGeom prst="rect">
+            <a:avLst/>
+          </a:prstGeom>
+          <a:noFill/>
+          <a:ln/>
+        </p:spPr>
+        <p:txBody>
+          <a:bodyPr wrap="square" lIns="0" tIns="0" rIns="0" bIns="0" rtlCol="0" anchor="ctr"/>
+          <a:lstStyle/>
+          <a:p>
+            <a:pPr indent="0" marL="0">
+              <a:buNone/>
+            </a:pPr>
+            <a:r>
+              <a:rPr lang="en-US" sz="1600" b="1" dirty="0">
+                <a:solidFill>
+                  <a:srgbClr val="2F5D50"/>
+                </a:solidFill>
+                <a:latin typeface="Cambria" pitchFamily="34" charset="0"/>
+                <a:ea typeface="Cambria" pitchFamily="34" charset="-122"/>
+                <a:cs typeface="Cambria" pitchFamily="34" charset="-120"/>
+              </a:rPr>
+              <a:t>Recover</a:t>
+            </a:r>
+            <a:endParaRPr lang="en-US" sz="1600" dirty="0"/>
+          </a:p>
+        </p:txBody>
+      </p:sp>
+      <p:sp>
+        <p:nvSpPr>
+          <p:cNvPr id="18" name="Text 16"/>
+          <p:cNvSpPr txBox="1"/>
+          <p:nvPr/>
+        </p:nvSpPr>
+        <p:spPr>
+          <a:xfrm>
+            <a:off x="4599432" y="4041648"/>
+            <a:ext cx="2999232" cy="1316736"/>
+          </a:xfrm>
+          <a:prstGeom prst="rect">
+            <a:avLst/>
+          </a:prstGeom>
+          <a:noFill/>
+          <a:ln/>
+        </p:spPr>
+        <p:txBody>
+          <a:bodyPr wrap="square" lIns="0" tIns="0" rIns="0" bIns="0" rtlCol="0" anchor="t"/>
+          <a:lstStyle/>
+          <a:p>
+            <a:pPr indent="0" marL="0">
+              <a:lnSpc>
+                <a:spcPts val="1700"/>
+              </a:lnSpc>
+              <a:buNone/>
+            </a:pPr>
+            <a:r>
+              <a:rPr lang="en-US" sz="1400" dirty="0">
+                <a:solidFill>
+                  <a:srgbClr val="6D6A64"/>
+                </a:solidFill>
+                <a:latin typeface="Calibri" pitchFamily="34" charset="0"/>
+                <a:ea typeface="Calibri" pitchFamily="34" charset="-122"/>
+                <a:cs typeface="Calibri" pitchFamily="34" charset="-120"/>
+              </a:rPr>
+              <a:t>Pairing on a fresh install restores it. This works after a prune too — a reclaimed pack with a full phone attached is exactly the case it exists for.</a:t>
+            </a:r>
+            <a:endParaRPr lang="en-US" sz="1400" dirty="0"/>
+          </a:p>
+        </p:txBody>
+      </p:sp>
+      <p:sp>
+        <p:nvSpPr>
+          <p:cNvPr id="19" name="Shape 17"/>
+          <p:cNvSpPr/>
+          <p:nvPr/>
+        </p:nvSpPr>
+        <p:spPr>
+          <a:xfrm>
+            <a:off x="8174736" y="3493008"/>
+            <a:ext cx="3447288" cy="1993392"/>
+          </a:xfrm>
+          <a:prstGeom prst="roundRect">
+            <a:avLst>
+              <a:gd name="adj" fmla="val 4128"/>
+            </a:avLst>
+          </a:prstGeom>
+          <a:solidFill>
+            <a:srgbClr val="E4EEE9"/>
+          </a:solidFill>
+          <a:ln w="12700">
+            <a:solidFill>
+              <a:srgbClr val="E4EEE9"/>
+            </a:solidFill>
+            <a:prstDash val="solid"/>
+          </a:ln>
+        </p:spPr>
+      </p:sp>
+      <p:sp>
+        <p:nvSpPr>
+          <p:cNvPr id="20" name="Text 18"/>
+          <p:cNvSpPr txBox="1"/>
+          <p:nvPr/>
+        </p:nvSpPr>
+        <p:spPr>
+          <a:xfrm>
+            <a:off x="8412480" y="3657600"/>
+            <a:ext cx="3017520" cy="347472"/>
+          </a:xfrm>
+          <a:prstGeom prst="rect">
+            <a:avLst/>
+          </a:prstGeom>
+          <a:noFill/>
+          <a:ln/>
+        </p:spPr>
+        <p:txBody>
+          <a:bodyPr wrap="square" lIns="0" tIns="0" rIns="0" bIns="0" rtlCol="0" anchor="ctr"/>
+          <a:lstStyle/>
+          <a:p>
+            <a:pPr indent="0" marL="0">
+              <a:buNone/>
+            </a:pPr>
+            <a:r>
+              <a:rPr lang="en-US" sz="1600" b="1" dirty="0">
+                <a:solidFill>
+                  <a:srgbClr val="2F5D50"/>
+                </a:solidFill>
+                <a:latin typeface="Cambria" pitchFamily="34" charset="0"/>
+                <a:ea typeface="Cambria" pitchFamily="34" charset="-122"/>
+                <a:cs typeface="Cambria" pitchFamily="34" charset="-120"/>
+              </a:rPr>
+              <a:t>Withdraw</a:t>
+            </a:r>
+            <a:endParaRPr lang="en-US" sz="1600" dirty="0"/>
+          </a:p>
+        </p:txBody>
+      </p:sp>
+      <p:sp>
+        <p:nvSpPr>
+          <p:cNvPr id="21" name="Text 19"/>
+          <p:cNvSpPr txBox="1"/>
+          <p:nvPr/>
+        </p:nvSpPr>
+        <p:spPr>
+          <a:xfrm>
+            <a:off x="8412480" y="4041648"/>
+            <a:ext cx="2999232" cy="1316736"/>
+          </a:xfrm>
+          <a:prstGeom prst="rect">
+            <a:avLst/>
+          </a:prstGeom>
+          <a:noFill/>
+          <a:ln/>
+        </p:spPr>
+        <p:txBody>
+          <a:bodyPr wrap="square" lIns="0" tIns="0" rIns="0" bIns="0" rtlCol="0" anchor="t"/>
+          <a:lstStyle/>
+          <a:p>
+            <a:pPr indent="0" marL="0">
+              <a:lnSpc>
+                <a:spcPts val="1700"/>
+              </a:lnSpc>
+              <a:buNone/>
+            </a:pPr>
+            <a:r>
+              <a:rPr lang="en-US" sz="1400" dirty="0">
+                <a:solidFill>
+                  <a:srgbClr val="6D6A64"/>
+                </a:solidFill>
+                <a:latin typeface="Calibri" pitchFamily="34" charset="0"/>
+                <a:ea typeface="Calibri" pitchFamily="34" charset="-122"/>
+                <a:cs typeface="Calibri" pitchFamily="34" charset="-120"/>
+              </a:rPr>
+              <a:t>A wipe removes the copy. Deleting a job discards them, so the API refuses that while any device still carries the pack.</a:t>
+            </a:r>
+            <a:endParaRPr lang="en-US" sz="1400" dirty="0"/>
+          </a:p>
+        </p:txBody>
+      </p:sp>
+      <p:sp>
+        <p:nvSpPr>
+          <p:cNvPr id="22" name="Text 20"/>
+          <p:cNvSpPr txBox="1"/>
+          <p:nvPr/>
+        </p:nvSpPr>
+        <p:spPr>
+          <a:xfrm>
+            <a:off x="548640" y="5650992"/>
+            <a:ext cx="11064240" cy="384048"/>
+          </a:xfrm>
+          <a:prstGeom prst="rect">
+            <a:avLst/>
+          </a:prstGeom>
+          <a:noFill/>
+          <a:ln/>
+        </p:spPr>
+        <p:txBody>
+          <a:bodyPr wrap="square" lIns="0" tIns="0" rIns="0" bIns="0" rtlCol="0" anchor="ctr"/>
+          <a:lstStyle/>
+          <a:p>
+            <a:pPr indent="0" marL="0">
+              <a:buNone/>
+            </a:pPr>
+            <a:r>
+              <a:rPr lang="en-US" sz="1500" i="1" dirty="0">
+                <a:solidFill>
+                  <a:srgbClr val="9C4A32"/>
+                </a:solidFill>
+                <a:latin typeface="Cambria" pitchFamily="34" charset="0"/>
+                <a:ea typeface="Cambria" pitchFamily="34" charset="-122"/>
+                <a:cs typeface="Cambria" pitchFamily="34" charset="-120"/>
+              </a:rPr>
+              <a:t>Identity is not authority: Android clears media ownership on uninstall, so recovery names the assets and one system prompt is still needed to remove them. iOS needs no such step.</a:t>
+            </a:r>
+            <a:endParaRPr lang="en-US" sz="1500" dirty="0"/>
           </a:p>
         </p:txBody>
       </p:sp>
@@ -10433,7 +11233,7 @@
                 <a:ea typeface="Calibri" pitchFamily="34" charset="-122"/>
                 <a:cs typeface="Calibri" pitchFamily="34" charset="-120"/>
               </a:rPr>
-              <a:t>71 of 72 accepted</a:t>
+              <a:t>900 assets, 19 MB/s</a:t>
             </a:r>
             <a:endParaRPr lang="en-US" sz="1600" dirty="0"/>
           </a:p>
@@ -10475,7 +11275,7 @@
                 <a:ea typeface="Calibri" pitchFamily="34" charset="-122"/>
                 <a:cs typeface="Calibri" pitchFamily="34" charset="-120"/>
               </a:rPr>
-              <a:t>the one refusal is a zero-byte file, which is correct</a:t>
+              <a:t>plus 71 of 72 on the edge-case pack — the refusal is correct</a:t>
             </a:r>
             <a:endParaRPr lang="en-US" sz="1400" dirty="0"/>
           </a:p>
@@ -10730,7 +11530,7 @@
                 <a:ea typeface="Cambria" pitchFamily="34" charset="-122"/>
                 <a:cs typeface="Cambria" pitchFamily="34" charset="-120"/>
               </a:rPr>
-              <a:t>Two iOS loader bugs were found by the first physical run that no simulator had surfaced.</a:t>
+              <a:t>Every physical run has found something no simulator could — two iOS loader bugs, and three separate failures in the Android wipe path.</a:t>
             </a:r>
             <a:endParaRPr lang="en-US" sz="1500" dirty="0"/>
           </a:p>
